--- a/docs/Adversarial_ML.pptx
+++ b/docs/Adversarial_ML.pptx
@@ -680,7 +680,7 @@
           <a:lstStyle/>
           <a:p>
             <a:r>
-              <a:t>Generative models add a new problem: text is both data and instructions. Direct prompt injection is the user attacking the model. Indirect prompt injection is a third party hiding instructions in content the model reads, which matters most for agents that can call tools and send data out. OWASP's 2025 list for LLM applications puts prompt injection first and also covers sensitive information disclosure, supply chain, poisoning and excessive agency. NIST's advice is to assume prompt injection is possible whenever the model reads untrusted input. This repository has no generative-AI demo; this slide is for orientation.</a:t>
+              <a:t>Generative models add a new problem: text is both data and instructions. Direct prompt injection is the user attacking the model. Indirect prompt injection is a third party hiding instructions in content the model reads, which matters most for agents that can call tools and send data out. OWASP's 2025 list for LLM applications puts prompt injection first and also covers sensitive information disclosure, supply chain, poisoning and excessive agency. NIST's advice is to assume prompt injection is possible whenever the model reads untrusted input. This repository has no generative-AI demo; the companion repository safety-trust-engine runs garak, AgentDojo and PyRIT against a model or agent and fails CI when an attack-success rate passes its tolerance, with each finding mapped to EU AI Act, DORA, FCA and NIST controls.</a:t>
             </a:r>
           </a:p>
         </p:txBody>
@@ -7418,7 +7418,7 @@
                 </a:solidFill>
                 <a:latin typeface="IBM Plex Sans"/>
               </a:rPr>
-              <a:t>NIST AI 100-2e2025 §3.3-3.5. OWASP Top 10 for LLM Applications 2025 (genai.owasp.org). Not demonstrated here.</a:t>
+              <a:t>NIST AI 100-2e2025 §3.3-3.5. OWASP Top 10 for LLM Applications 2025 (genai.owasp.org). LLM tests: olonok69/safety-trust-engine.</a:t>
             </a:r>
           </a:p>
         </p:txBody>
@@ -21299,7 +21299,7 @@
                 </a:solidFill>
                 <a:latin typeface="IBM Plex Sans"/>
               </a:rPr>
-              <a:t>No LLM demo. Prompt injection and agents are covered in slides only.</a:t>
+              <a:t>No LLM demo here. safety-trust-engine tests prompt injection and agents with garak, AgentDojo, PyRIT.</a:t>
             </a:r>
           </a:p>
         </p:txBody>

--- a/docs/Adversarial_ML.pptx
+++ b/docs/Adversarial_ML.pptx
@@ -44,6 +44,7 @@
     <p:sldId id="292" r:id="rId44"/>
     <p:sldId id="293" r:id="rId45"/>
     <p:sldId id="294" r:id="rId46"/>
+    <p:sldId id="295" r:id="rId47"/>
   </p:sldIdLst>
   <p:sldSz cx="12191695" cy="6858000" type="screen4x3"/>
   <p:notesSz cx="6858000" cy="9144000"/>
@@ -2710,7 +2711,7 @@
           <a:lstStyle/>
           <a:p>
             <a:r>
-              <a:t>Setup is in the repository README: create a Python 3.11 environment with uv and install demo/requirements.txt, which brings numpy, scikit-learn and sacroml (and PyTorch with it). Demo 3 and demo 1 run in seconds; demo 2 takes a few minutes. The guides in docs/guide walk through every report section by section.</a:t>
+              <a:t>The gate reruns demos 1 and 3, reads the numbers they already print, and judges each regulatory control as pass, fail or not evidenced. The GRAIMATTER controls pass on the wrapped tree. The robustness controls fail on the forest of demo 3: privacy checks alone do not make a model resilient in the sense of Article 15(5), which also names poisoning and evasion. A control whose demo did not run is reported as not evidenced, never as pass; CI declares demo 2 out of scope explicitly because it does not install sacroml. The US pack reads the same evidence through NIST AI RMF MEASURE 2.6, 2.7 and 2.10 and federal model risk guidance, where a classifier fits directly. The tolerances are a risk appetite set for the workshop, and the mapping is this repository's own.</a:t>
             </a:r>
           </a:p>
         </p:txBody>
@@ -2780,7 +2781,7 @@
           <a:lstStyle/>
           <a:p>
             <a:r>
-              <a:t>Both PDFs, the NIST report and the green paper, are in the repository root. The guide, in English and Spanish, follows the same order as these slides and maps each section to its slides in Appendix A.</a:t>
+              <a:t>Setup is in the repository README: create a Python 3.11 environment with uv and install demo/requirements.txt, which brings numpy, scikit-learn and sacroml (and PyTorch with it). Demo 3 and demo 1 run in seconds; demo 2 takes a few minutes. run_gate.py reruns the demos and writes the gate report to demo/output/gate; CI runs it on every pull request. The guides in docs/guide walk through every report section by section.</a:t>
             </a:r>
           </a:p>
         </p:txBody>
@@ -2851,6 +2852,76 @@
           <a:p>
             <a:r>
               <a:t>NIST separates training-time attacks from deployment-time attacks and lists the capabilities an attacker needs. Training data control enables poisoning. Model or source-code control enables model poisoning and supply-chain attacks. Query access enables evasion, extraction and the privacy attacks. GRAIMATTER sits on the right of this picture: the model file and the queries made to it, and only the privacy objective. That is why demo 3 exists: it covers the integrity attacks that a TRE's checks would not see.</a:t>
+            </a:r>
+          </a:p>
+        </p:txBody>
+      </p:sp>
+      <p:sp>
+        <p:nvSpPr>
+          <p:cNvPr id="4" name="Slide Number Placeholder 3"/>
+          <p:cNvSpPr>
+            <a:spLocks noGrp="1"/>
+          </p:cNvSpPr>
+          <p:nvPr>
+            <p:ph type="sldNum" idx="5" sz="quarter"/>
+          </p:nvPr>
+        </p:nvSpPr>
+        <p:spPr/>
+      </p:sp>
+    </p:spTree>
+  </p:cSld>
+  <p:clrMapOvr>
+    <a:masterClrMapping/>
+  </p:clrMapOvr>
+</p:notes>
+</file>
+
+<file path=ppt/notesSlides/notesSlide40.xml><?xml version="1.0" encoding="utf-8"?>
+<p:notes xmlns:a="http://schemas.openxmlformats.org/drawingml/2006/main" xmlns:p="http://schemas.openxmlformats.org/presentationml/2006/main" xmlns:r="http://schemas.openxmlformats.org/officeDocument/2006/relationships">
+  <p:cSld>
+    <p:spTree>
+      <p:nvGrpSpPr>
+        <p:cNvPr id="1" name=""/>
+        <p:cNvGrpSpPr/>
+        <p:nvPr/>
+      </p:nvGrpSpPr>
+      <p:grpSpPr>
+        <a:xfrm>
+          <a:off x="0" y="0"/>
+          <a:ext cx="0" cy="0"/>
+          <a:chOff x="0" y="0"/>
+          <a:chExt cx="0" cy="0"/>
+        </a:xfrm>
+      </p:grpSpPr>
+      <p:sp>
+        <p:nvSpPr>
+          <p:cNvPr id="2" name="Slide Image Placeholder 1"/>
+          <p:cNvSpPr>
+            <a:spLocks noGrp="1"/>
+          </p:cNvSpPr>
+          <p:nvPr>
+            <p:ph type="sldImg" idx="2"/>
+          </p:nvPr>
+        </p:nvSpPr>
+        <p:spPr/>
+      </p:sp>
+      <p:sp>
+        <p:nvSpPr>
+          <p:cNvPr id="3" name="Notes Placeholder 2"/>
+          <p:cNvSpPr>
+            <a:spLocks noGrp="1"/>
+          </p:cNvSpPr>
+          <p:nvPr>
+            <p:ph type="body" idx="3" sz="quarter"/>
+          </p:nvPr>
+        </p:nvSpPr>
+        <p:spPr/>
+        <p:txBody>
+          <a:bodyPr/>
+          <a:lstStyle/>
+          <a:p>
+            <a:r>
+              <a:t>Both PDFs, the NIST report and the green paper, are in the repository root. The guide, in English and Spanish, follows the same order as these slides and maps each section to its slides in Appendix A.</a:t>
             </a:r>
           </a:p>
         </p:txBody>
@@ -21497,7 +21568,7 @@
                 </a:solidFill>
                 <a:latin typeface="IBM Plex Sans"/>
               </a:rPr>
-              <a:t>Three scripts, one environment, reports under demo/output</a:t>
+              <a:t>One gate, four lenses: GRAIMATTER passes, Article 15(5) fails</a:t>
             </a:r>
           </a:p>
         </p:txBody>
@@ -21532,43 +21603,600 @@
                 </a:solidFill>
                 <a:latin typeface="Consolas"/>
               </a:rPr>
-              <a:t>RUN IT YOURSELF</a:t>
-            </a:r>
-          </a:p>
-        </p:txBody>
-      </p:sp>
-      <p:sp>
-        <p:nvSpPr>
-          <p:cNvPr id="4" name="Rounded Rectangle 3"/>
-          <p:cNvSpPr/>
-          <p:nvPr/>
-        </p:nvSpPr>
-        <p:spPr>
-          <a:xfrm>
-            <a:off x="813816" y="2011680"/>
-            <a:ext cx="5669280" cy="3886200"/>
-          </a:xfrm>
-          <a:prstGeom prst="roundRect">
-            <a:avLst>
-              <a:gd name="adj" fmla="val 2823"/>
-            </a:avLst>
-          </a:prstGeom>
-          <a:solidFill>
-            <a:srgbClr val="0F1B2D"/>
-          </a:solidFill>
-          <a:ln>
-            <a:noFill/>
-          </a:ln>
-          <a:effectLst/>
-        </p:spPr>
-        <p:txBody>
-          <a:bodyPr rtlCol="0" anchor="ctr"/>
-          <a:lstStyle/>
-          <a:p>
-            <a:pPr algn="ctr"/>
-          </a:p>
-        </p:txBody>
-      </p:sp>
+              <a:t>RELEASE GATE · DEMO/RUN_GATE.PY · CI</a:t>
+            </a:r>
+          </a:p>
+        </p:txBody>
+      </p:sp>
+      <p:graphicFrame>
+        <p:nvGraphicFramePr>
+          <p:cNvPr id="4" name="Table 3"/>
+          <p:cNvGraphicFramePr>
+            <a:graphicFrameLocks noGrp="1"/>
+          </p:cNvGraphicFramePr>
+          <p:nvPr/>
+        </p:nvGraphicFramePr>
+        <p:xfrm>
+          <a:off x="813816" y="1920240"/>
+          <a:ext cx="6400800" cy="2103120"/>
+        </p:xfrm>
+        <a:graphic>
+          <a:graphicData uri="http://schemas.openxmlformats.org/drawingml/2006/table">
+            <a:tbl>
+              <a:tblPr firstRow="1" bandRow="1">
+                <a:tableStyleId>{5C22544A-7EE6-4342-B048-85BDC9FD1C3A}</a:tableStyleId>
+              </a:tblPr>
+              <a:tblGrid>
+                <a:gridCol w="2377440"/>
+                <a:gridCol w="960120"/>
+                <a:gridCol w="822960"/>
+                <a:gridCol w="822960"/>
+                <a:gridCol w="1417320"/>
+              </a:tblGrid>
+              <a:tr h="420624">
+                <a:tc>
+                  <a:txBody>
+                    <a:bodyPr wrap="square"/>
+                    <a:lstStyle/>
+                    <a:p>
+                      <a:r>
+                        <a:rPr sz="1300" b="1">
+                          <a:solidFill>
+                            <a:srgbClr val="F6F5F0"/>
+                          </a:solidFill>
+                          <a:latin typeface="IBM Plex Sans"/>
+                        </a:rPr>
+                        <a:t>Pack</a:t>
+                      </a:r>
+                    </a:p>
+                  </a:txBody>
+                  <a:tcPr marL="91440" marR="91440" marT="36576" marB="36576" anchor="ctr">
+                    <a:solidFill>
+                      <a:srgbClr val="0F1B2D"/>
+                    </a:solidFill>
+                  </a:tcPr>
+                </a:tc>
+                <a:tc>
+                  <a:txBody>
+                    <a:bodyPr wrap="square"/>
+                    <a:lstStyle/>
+                    <a:p>
+                      <a:r>
+                        <a:rPr sz="1300" b="1">
+                          <a:solidFill>
+                            <a:srgbClr val="F6F5F0"/>
+                          </a:solidFill>
+                          <a:latin typeface="IBM Plex Sans"/>
+                        </a:rPr>
+                        <a:t>Controls</a:t>
+                      </a:r>
+                    </a:p>
+                  </a:txBody>
+                  <a:tcPr marL="91440" marR="91440" marT="36576" marB="36576" anchor="ctr">
+                    <a:solidFill>
+                      <a:srgbClr val="0F1B2D"/>
+                    </a:solidFill>
+                  </a:tcPr>
+                </a:tc>
+                <a:tc>
+                  <a:txBody>
+                    <a:bodyPr wrap="square"/>
+                    <a:lstStyle/>
+                    <a:p>
+                      <a:r>
+                        <a:rPr sz="1300" b="1">
+                          <a:solidFill>
+                            <a:srgbClr val="F6F5F0"/>
+                          </a:solidFill>
+                          <a:latin typeface="IBM Plex Sans"/>
+                        </a:rPr>
+                        <a:t>Pass</a:t>
+                      </a:r>
+                    </a:p>
+                  </a:txBody>
+                  <a:tcPr marL="91440" marR="91440" marT="36576" marB="36576" anchor="ctr">
+                    <a:solidFill>
+                      <a:srgbClr val="0F1B2D"/>
+                    </a:solidFill>
+                  </a:tcPr>
+                </a:tc>
+                <a:tc>
+                  <a:txBody>
+                    <a:bodyPr wrap="square"/>
+                    <a:lstStyle/>
+                    <a:p>
+                      <a:r>
+                        <a:rPr sz="1300" b="1">
+                          <a:solidFill>
+                            <a:srgbClr val="F6F5F0"/>
+                          </a:solidFill>
+                          <a:latin typeface="IBM Plex Sans"/>
+                        </a:rPr>
+                        <a:t>Fail</a:t>
+                      </a:r>
+                    </a:p>
+                  </a:txBody>
+                  <a:tcPr marL="91440" marR="91440" marT="36576" marB="36576" anchor="ctr">
+                    <a:solidFill>
+                      <a:srgbClr val="0F1B2D"/>
+                    </a:solidFill>
+                  </a:tcPr>
+                </a:tc>
+                <a:tc>
+                  <a:txBody>
+                    <a:bodyPr wrap="square"/>
+                    <a:lstStyle/>
+                    <a:p>
+                      <a:r>
+                        <a:rPr sz="1300" b="1">
+                          <a:solidFill>
+                            <a:srgbClr val="F6F5F0"/>
+                          </a:solidFill>
+                          <a:latin typeface="IBM Plex Sans"/>
+                        </a:rPr>
+                        <a:t>Not evidenced</a:t>
+                      </a:r>
+                    </a:p>
+                  </a:txBody>
+                  <a:tcPr marL="91440" marR="91440" marT="36576" marB="36576" anchor="ctr">
+                    <a:solidFill>
+                      <a:srgbClr val="0F1B2D"/>
+                    </a:solidFill>
+                  </a:tcPr>
+                </a:tc>
+              </a:tr>
+              <a:tr h="420624">
+                <a:tc>
+                  <a:txBody>
+                    <a:bodyPr wrap="square"/>
+                    <a:lstStyle/>
+                    <a:p>
+                      <a:r>
+                        <a:rPr sz="1300" b="1">
+                          <a:solidFill>
+                            <a:srgbClr val="0F1B2D"/>
+                          </a:solidFill>
+                          <a:latin typeface="IBM Plex Sans"/>
+                        </a:rPr>
+                        <a:t>EU AI Act 15(5), UK Code</a:t>
+                      </a:r>
+                    </a:p>
+                  </a:txBody>
+                  <a:tcPr marL="91440" marR="91440" marT="36576" marB="36576" anchor="ctr">
+                    <a:solidFill>
+                      <a:srgbClr val="FDFCF9"/>
+                    </a:solidFill>
+                  </a:tcPr>
+                </a:tc>
+                <a:tc>
+                  <a:txBody>
+                    <a:bodyPr wrap="square"/>
+                    <a:lstStyle/>
+                    <a:p>
+                      <a:r>
+                        <a:rPr sz="1300" b="0">
+                          <a:solidFill>
+                            <a:srgbClr val="3A4556"/>
+                          </a:solidFill>
+                          <a:latin typeface="IBM Plex Sans"/>
+                        </a:rPr>
+                        <a:t>6</a:t>
+                      </a:r>
+                    </a:p>
+                  </a:txBody>
+                  <a:tcPr marL="91440" marR="91440" marT="36576" marB="36576" anchor="ctr">
+                    <a:solidFill>
+                      <a:srgbClr val="FDFCF9"/>
+                    </a:solidFill>
+                  </a:tcPr>
+                </a:tc>
+                <a:tc>
+                  <a:txBody>
+                    <a:bodyPr wrap="square"/>
+                    <a:lstStyle/>
+                    <a:p>
+                      <a:r>
+                        <a:rPr sz="1300" b="0">
+                          <a:solidFill>
+                            <a:srgbClr val="3A4556"/>
+                          </a:solidFill>
+                          <a:latin typeface="IBM Plex Sans"/>
+                        </a:rPr>
+                        <a:t>0</a:t>
+                      </a:r>
+                    </a:p>
+                  </a:txBody>
+                  <a:tcPr marL="91440" marR="91440" marT="36576" marB="36576" anchor="ctr">
+                    <a:solidFill>
+                      <a:srgbClr val="FDFCF9"/>
+                    </a:solidFill>
+                  </a:tcPr>
+                </a:tc>
+                <a:tc>
+                  <a:txBody>
+                    <a:bodyPr wrap="square"/>
+                    <a:lstStyle/>
+                    <a:p>
+                      <a:r>
+                        <a:rPr sz="1300" b="0">
+                          <a:solidFill>
+                            <a:srgbClr val="3A4556"/>
+                          </a:solidFill>
+                          <a:latin typeface="IBM Plex Sans"/>
+                        </a:rPr>
+                        <a:t>6</a:t>
+                      </a:r>
+                    </a:p>
+                  </a:txBody>
+                  <a:tcPr marL="91440" marR="91440" marT="36576" marB="36576" anchor="ctr">
+                    <a:solidFill>
+                      <a:srgbClr val="FBE9DC"/>
+                    </a:solidFill>
+                  </a:tcPr>
+                </a:tc>
+                <a:tc>
+                  <a:txBody>
+                    <a:bodyPr wrap="square"/>
+                    <a:lstStyle/>
+                    <a:p>
+                      <a:r>
+                        <a:rPr sz="1300" b="0">
+                          <a:solidFill>
+                            <a:srgbClr val="3A4556"/>
+                          </a:solidFill>
+                          <a:latin typeface="IBM Plex Sans"/>
+                        </a:rPr>
+                        <a:t>0</a:t>
+                      </a:r>
+                    </a:p>
+                  </a:txBody>
+                  <a:tcPr marL="91440" marR="91440" marT="36576" marB="36576" anchor="ctr">
+                    <a:solidFill>
+                      <a:srgbClr val="FDFCF9"/>
+                    </a:solidFill>
+                  </a:tcPr>
+                </a:tc>
+              </a:tr>
+              <a:tr h="420624">
+                <a:tc>
+                  <a:txBody>
+                    <a:bodyPr wrap="square"/>
+                    <a:lstStyle/>
+                    <a:p>
+                      <a:r>
+                        <a:rPr sz="1300" b="1">
+                          <a:solidFill>
+                            <a:srgbClr val="0F1B2D"/>
+                          </a:solidFill>
+                          <a:latin typeface="IBM Plex Sans"/>
+                        </a:rPr>
+                        <a:t>NIST AI 100-2</a:t>
+                      </a:r>
+                    </a:p>
+                  </a:txBody>
+                  <a:tcPr marL="91440" marR="91440" marT="36576" marB="36576" anchor="ctr">
+                    <a:solidFill>
+                      <a:srgbClr val="F1EFE8"/>
+                    </a:solidFill>
+                  </a:tcPr>
+                </a:tc>
+                <a:tc>
+                  <a:txBody>
+                    <a:bodyPr wrap="square"/>
+                    <a:lstStyle/>
+                    <a:p>
+                      <a:r>
+                        <a:rPr sz="1300" b="0">
+                          <a:solidFill>
+                            <a:srgbClr val="3A4556"/>
+                          </a:solidFill>
+                          <a:latin typeface="IBM Plex Sans"/>
+                        </a:rPr>
+                        <a:t>5</a:t>
+                      </a:r>
+                    </a:p>
+                  </a:txBody>
+                  <a:tcPr marL="91440" marR="91440" marT="36576" marB="36576" anchor="ctr">
+                    <a:solidFill>
+                      <a:srgbClr val="F1EFE8"/>
+                    </a:solidFill>
+                  </a:tcPr>
+                </a:tc>
+                <a:tc>
+                  <a:txBody>
+                    <a:bodyPr wrap="square"/>
+                    <a:lstStyle/>
+                    <a:p>
+                      <a:r>
+                        <a:rPr sz="1300" b="0">
+                          <a:solidFill>
+                            <a:srgbClr val="3A4556"/>
+                          </a:solidFill>
+                          <a:latin typeface="IBM Plex Sans"/>
+                        </a:rPr>
+                        <a:t>2</a:t>
+                      </a:r>
+                    </a:p>
+                  </a:txBody>
+                  <a:tcPr marL="91440" marR="91440" marT="36576" marB="36576" anchor="ctr">
+                    <a:solidFill>
+                      <a:srgbClr val="F1EFE8"/>
+                    </a:solidFill>
+                  </a:tcPr>
+                </a:tc>
+                <a:tc>
+                  <a:txBody>
+                    <a:bodyPr wrap="square"/>
+                    <a:lstStyle/>
+                    <a:p>
+                      <a:r>
+                        <a:rPr sz="1300" b="0">
+                          <a:solidFill>
+                            <a:srgbClr val="3A4556"/>
+                          </a:solidFill>
+                          <a:latin typeface="IBM Plex Sans"/>
+                        </a:rPr>
+                        <a:t>3</a:t>
+                      </a:r>
+                    </a:p>
+                  </a:txBody>
+                  <a:tcPr marL="91440" marR="91440" marT="36576" marB="36576" anchor="ctr">
+                    <a:solidFill>
+                      <a:srgbClr val="FBE9DC"/>
+                    </a:solidFill>
+                  </a:tcPr>
+                </a:tc>
+                <a:tc>
+                  <a:txBody>
+                    <a:bodyPr wrap="square"/>
+                    <a:lstStyle/>
+                    <a:p>
+                      <a:r>
+                        <a:rPr sz="1300" b="0">
+                          <a:solidFill>
+                            <a:srgbClr val="3A4556"/>
+                          </a:solidFill>
+                          <a:latin typeface="IBM Plex Sans"/>
+                        </a:rPr>
+                        <a:t>0</a:t>
+                      </a:r>
+                    </a:p>
+                  </a:txBody>
+                  <a:tcPr marL="91440" marR="91440" marT="36576" marB="36576" anchor="ctr">
+                    <a:solidFill>
+                      <a:srgbClr val="F1EFE8"/>
+                    </a:solidFill>
+                  </a:tcPr>
+                </a:tc>
+              </a:tr>
+              <a:tr h="420624">
+                <a:tc>
+                  <a:txBody>
+                    <a:bodyPr wrap="square"/>
+                    <a:lstStyle/>
+                    <a:p>
+                      <a:r>
+                        <a:rPr sz="1300" b="1">
+                          <a:solidFill>
+                            <a:srgbClr val="0F1B2D"/>
+                          </a:solidFill>
+                          <a:latin typeface="IBM Plex Sans"/>
+                        </a:rPr>
+                        <a:t>GRAIMATTER TECH</a:t>
+                      </a:r>
+                    </a:p>
+                  </a:txBody>
+                  <a:tcPr marL="91440" marR="91440" marT="36576" marB="36576" anchor="ctr">
+                    <a:solidFill>
+                      <a:srgbClr val="FDFCF9"/>
+                    </a:solidFill>
+                  </a:tcPr>
+                </a:tc>
+                <a:tc>
+                  <a:txBody>
+                    <a:bodyPr wrap="square"/>
+                    <a:lstStyle/>
+                    <a:p>
+                      <a:r>
+                        <a:rPr sz="1300" b="0">
+                          <a:solidFill>
+                            <a:srgbClr val="3A4556"/>
+                          </a:solidFill>
+                          <a:latin typeface="IBM Plex Sans"/>
+                        </a:rPr>
+                        <a:t>6</a:t>
+                      </a:r>
+                    </a:p>
+                  </a:txBody>
+                  <a:tcPr marL="91440" marR="91440" marT="36576" marB="36576" anchor="ctr">
+                    <a:solidFill>
+                      <a:srgbClr val="FDFCF9"/>
+                    </a:solidFill>
+                  </a:tcPr>
+                </a:tc>
+                <a:tc>
+                  <a:txBody>
+                    <a:bodyPr wrap="square"/>
+                    <a:lstStyle/>
+                    <a:p>
+                      <a:r>
+                        <a:rPr sz="1300" b="0">
+                          <a:solidFill>
+                            <a:srgbClr val="3A4556"/>
+                          </a:solidFill>
+                          <a:latin typeface="IBM Plex Sans"/>
+                        </a:rPr>
+                        <a:t>5</a:t>
+                      </a:r>
+                    </a:p>
+                  </a:txBody>
+                  <a:tcPr marL="91440" marR="91440" marT="36576" marB="36576" anchor="ctr">
+                    <a:solidFill>
+                      <a:srgbClr val="DCEBDD"/>
+                    </a:solidFill>
+                  </a:tcPr>
+                </a:tc>
+                <a:tc>
+                  <a:txBody>
+                    <a:bodyPr wrap="square"/>
+                    <a:lstStyle/>
+                    <a:p>
+                      <a:r>
+                        <a:rPr sz="1300" b="0">
+                          <a:solidFill>
+                            <a:srgbClr val="3A4556"/>
+                          </a:solidFill>
+                          <a:latin typeface="IBM Plex Sans"/>
+                        </a:rPr>
+                        <a:t>0</a:t>
+                      </a:r>
+                    </a:p>
+                  </a:txBody>
+                  <a:tcPr marL="91440" marR="91440" marT="36576" marB="36576" anchor="ctr">
+                    <a:solidFill>
+                      <a:srgbClr val="FDFCF9"/>
+                    </a:solidFill>
+                  </a:tcPr>
+                </a:tc>
+                <a:tc>
+                  <a:txBody>
+                    <a:bodyPr wrap="square"/>
+                    <a:lstStyle/>
+                    <a:p>
+                      <a:r>
+                        <a:rPr sz="1300" b="0">
+                          <a:solidFill>
+                            <a:srgbClr val="3A4556"/>
+                          </a:solidFill>
+                          <a:latin typeface="IBM Plex Sans"/>
+                        </a:rPr>
+                        <a:t>1 (demo 2)</a:t>
+                      </a:r>
+                    </a:p>
+                  </a:txBody>
+                  <a:tcPr marL="91440" marR="91440" marT="36576" marB="36576" anchor="ctr">
+                    <a:solidFill>
+                      <a:srgbClr val="FDFCF9"/>
+                    </a:solidFill>
+                  </a:tcPr>
+                </a:tc>
+              </a:tr>
+              <a:tr h="420624">
+                <a:tc>
+                  <a:txBody>
+                    <a:bodyPr wrap="square"/>
+                    <a:lstStyle/>
+                    <a:p>
+                      <a:r>
+                        <a:rPr sz="1300" b="1">
+                          <a:solidFill>
+                            <a:srgbClr val="0F1B2D"/>
+                          </a:solidFill>
+                          <a:latin typeface="IBM Plex Sans"/>
+                        </a:rPr>
+                        <a:t>NIST AI RMF, SR 26-02</a:t>
+                      </a:r>
+                    </a:p>
+                  </a:txBody>
+                  <a:tcPr marL="91440" marR="91440" marT="36576" marB="36576" anchor="ctr">
+                    <a:solidFill>
+                      <a:srgbClr val="F1EFE8"/>
+                    </a:solidFill>
+                  </a:tcPr>
+                </a:tc>
+                <a:tc>
+                  <a:txBody>
+                    <a:bodyPr wrap="square"/>
+                    <a:lstStyle/>
+                    <a:p>
+                      <a:r>
+                        <a:rPr sz="1300" b="0">
+                          <a:solidFill>
+                            <a:srgbClr val="3A4556"/>
+                          </a:solidFill>
+                          <a:latin typeface="IBM Plex Sans"/>
+                        </a:rPr>
+                        <a:t>6</a:t>
+                      </a:r>
+                    </a:p>
+                  </a:txBody>
+                  <a:tcPr marL="91440" marR="91440" marT="36576" marB="36576" anchor="ctr">
+                    <a:solidFill>
+                      <a:srgbClr val="F1EFE8"/>
+                    </a:solidFill>
+                  </a:tcPr>
+                </a:tc>
+                <a:tc>
+                  <a:txBody>
+                    <a:bodyPr wrap="square"/>
+                    <a:lstStyle/>
+                    <a:p>
+                      <a:r>
+                        <a:rPr sz="1300" b="0">
+                          <a:solidFill>
+                            <a:srgbClr val="3A4556"/>
+                          </a:solidFill>
+                          <a:latin typeface="IBM Plex Sans"/>
+                        </a:rPr>
+                        <a:t>3</a:t>
+                      </a:r>
+                    </a:p>
+                  </a:txBody>
+                  <a:tcPr marL="91440" marR="91440" marT="36576" marB="36576" anchor="ctr">
+                    <a:solidFill>
+                      <a:srgbClr val="F1EFE8"/>
+                    </a:solidFill>
+                  </a:tcPr>
+                </a:tc>
+                <a:tc>
+                  <a:txBody>
+                    <a:bodyPr wrap="square"/>
+                    <a:lstStyle/>
+                    <a:p>
+                      <a:r>
+                        <a:rPr sz="1300" b="0">
+                          <a:solidFill>
+                            <a:srgbClr val="3A4556"/>
+                          </a:solidFill>
+                          <a:latin typeface="IBM Plex Sans"/>
+                        </a:rPr>
+                        <a:t>3</a:t>
+                      </a:r>
+                    </a:p>
+                  </a:txBody>
+                  <a:tcPr marL="91440" marR="91440" marT="36576" marB="36576" anchor="ctr">
+                    <a:solidFill>
+                      <a:srgbClr val="FBE9DC"/>
+                    </a:solidFill>
+                  </a:tcPr>
+                </a:tc>
+                <a:tc>
+                  <a:txBody>
+                    <a:bodyPr wrap="square"/>
+                    <a:lstStyle/>
+                    <a:p>
+                      <a:r>
+                        <a:rPr sz="1300" b="0">
+                          <a:solidFill>
+                            <a:srgbClr val="3A4556"/>
+                          </a:solidFill>
+                          <a:latin typeface="IBM Plex Sans"/>
+                        </a:rPr>
+                        <a:t>0</a:t>
+                      </a:r>
+                    </a:p>
+                  </a:txBody>
+                  <a:tcPr marL="91440" marR="91440" marT="36576" marB="36576" anchor="ctr">
+                    <a:solidFill>
+                      <a:srgbClr val="F1EFE8"/>
+                    </a:solidFill>
+                  </a:tcPr>
+                </a:tc>
+              </a:tr>
+            </a:tbl>
+          </a:graphicData>
+        </a:graphic>
+      </p:graphicFrame>
       <p:sp>
         <p:nvSpPr>
           <p:cNvPr id="5" name="TextBox 4"/>
@@ -21577,8 +22205,8 @@
         </p:nvSpPr>
         <p:spPr>
           <a:xfrm>
-            <a:off x="1088136" y="2194560"/>
-            <a:ext cx="5212080" cy="3566160"/>
+            <a:off x="813816" y="4114800"/>
+            <a:ext cx="6400800" cy="1188720"/>
           </a:xfrm>
           <a:prstGeom prst="rect">
             <a:avLst/>
@@ -21593,13 +22221,22 @@
           <a:p>
             <a:pPr algn="l"/>
             <a:r>
-              <a:rPr sz="1350" b="0" i="0">
-                <a:solidFill>
-                  <a:srgbClr val="F6F5F0"/>
-                </a:solidFill>
-                <a:latin typeface="Consolas"/>
-              </a:rPr>
-              <a:t>uv venv --python 3.11</a:t>
+              <a:rPr sz="1300" b="1" i="0">
+                <a:solidFill>
+                  <a:srgbClr val="3A4556"/>
+                </a:solidFill>
+                <a:latin typeface="IBM Plex Sans"/>
+              </a:rPr>
+              <a:t>Breached: </a:t>
+            </a:r>
+            <a:r>
+              <a:rPr sz="1300" b="0" i="0">
+                <a:solidFill>
+                  <a:srgbClr val="3A4556"/>
+                </a:solidFill>
+                <a:latin typeface="IBM Plex Sans"/>
+              </a:rPr>
+              <a:t>evasion 78.7% (tolerance 10%), a copy agreeing 86.9% after one 200-row budget (80%), a backdoor lifting trigger success by 71.7 points (tolerance 10).</a:t>
             </a:r>
           </a:p>
           <a:p>
@@ -21609,157 +22246,22 @@
               </a:spcBef>
             </a:pPr>
             <a:r>
-              <a:rPr sz="1350" b="0" i="0">
-                <a:solidFill>
-                  <a:srgbClr val="F6F5F0"/>
-                </a:solidFill>
-                <a:latin typeface="Consolas"/>
-              </a:rPr>
-              <a:t>uv pip install -r demo/requirements.txt</a:t>
-            </a:r>
-          </a:p>
-          <a:p>
-            <a:pPr algn="l">
-              <a:spcBef>
-                <a:spcPts val="600"/>
-              </a:spcBef>
-            </a:pPr>
-            <a:r>
-              <a:rPr sz="1350" b="0" i="0">
-                <a:solidFill>
-                  <a:srgbClr val="F6F5F0"/>
-                </a:solidFill>
-                <a:latin typeface="Consolas"/>
-              </a:rPr>
-              <a:t/>
-            </a:r>
-          </a:p>
-          <a:p>
-            <a:pPr algn="l">
-              <a:spcBef>
-                <a:spcPts val="600"/>
-              </a:spcBef>
-            </a:pPr>
-            <a:r>
-              <a:rPr sz="1350" b="0" i="0">
-                <a:solidFill>
-                  <a:srgbClr val="F6F5F0"/>
-                </a:solidFill>
-                <a:latin typeface="Consolas"/>
-              </a:rPr>
-              <a:t>uv run python demo/run_aml_demo.py</a:t>
-            </a:r>
-          </a:p>
-          <a:p>
-            <a:pPr algn="l">
-              <a:spcBef>
-                <a:spcPts val="600"/>
-              </a:spcBef>
-            </a:pPr>
-            <a:r>
-              <a:rPr sz="1350" b="0" i="0">
-                <a:solidFill>
-                  <a:srgbClr val="F6F5F0"/>
-                </a:solidFill>
-                <a:latin typeface="Consolas"/>
-              </a:rPr>
-              <a:t>uv run python demo/run_demo.py</a:t>
-            </a:r>
-          </a:p>
-          <a:p>
-            <a:pPr algn="l">
-              <a:spcBef>
-                <a:spcPts val="600"/>
-              </a:spcBef>
-            </a:pPr>
-            <a:r>
-              <a:rPr sz="1350" b="0" i="0">
-                <a:solidFill>
-                  <a:srgbClr val="F6F5F0"/>
-                </a:solidFill>
-                <a:latin typeface="Consolas"/>
-              </a:rPr>
-              <a:t>uv run python demo/run_sacroml_demo.py</a:t>
-            </a:r>
-          </a:p>
-          <a:p>
-            <a:pPr algn="l">
-              <a:spcBef>
-                <a:spcPts val="600"/>
-              </a:spcBef>
-            </a:pPr>
-            <a:r>
-              <a:rPr sz="1350" b="0" i="0">
-                <a:solidFill>
-                  <a:srgbClr val="F6F5F0"/>
-                </a:solidFill>
-                <a:latin typeface="Consolas"/>
-              </a:rPr>
-              <a:t/>
-            </a:r>
-          </a:p>
-          <a:p>
-            <a:pPr algn="l">
-              <a:spcBef>
-                <a:spcPts val="600"/>
-              </a:spcBef>
-            </a:pPr>
-            <a:r>
-              <a:rPr sz="1350" b="0" i="0">
-                <a:solidFill>
-                  <a:srgbClr val="F6F5F0"/>
-                </a:solidFill>
-                <a:latin typeface="Consolas"/>
-              </a:rPr>
-              <a:t># figures and this deck</a:t>
-            </a:r>
-          </a:p>
-          <a:p>
-            <a:pPr algn="l">
-              <a:spcBef>
-                <a:spcPts val="600"/>
-              </a:spcBef>
-            </a:pPr>
-            <a:r>
-              <a:rPr sz="1350" b="0" i="0">
-                <a:solidFill>
-                  <a:srgbClr val="F6F5F0"/>
-                </a:solidFill>
-                <a:latin typeface="Consolas"/>
-              </a:rPr>
-              <a:t>python docs/guide/make_figures.py</a:t>
-            </a:r>
-          </a:p>
-          <a:p>
-            <a:pPr algn="l">
-              <a:spcBef>
-                <a:spcPts val="600"/>
-              </a:spcBef>
-            </a:pPr>
-            <a:r>
-              <a:rPr sz="1350" b="0" i="0">
-                <a:solidFill>
-                  <a:srgbClr val="F6F5F0"/>
-                </a:solidFill>
-                <a:latin typeface="Consolas"/>
-              </a:rPr>
-              <a:t>python docs/guide/make_aml_figures.py</a:t>
-            </a:r>
-          </a:p>
-          <a:p>
-            <a:pPr algn="l">
-              <a:spcBef>
-                <a:spcPts val="600"/>
-              </a:spcBef>
-            </a:pPr>
-            <a:r>
-              <a:rPr sz="1350" b="0" i="0">
-                <a:solidFill>
-                  <a:srgbClr val="F6F5F0"/>
-                </a:solidFill>
-                <a:latin typeface="Consolas"/>
-              </a:rPr>
-              <a:t>python docs/make_deck.py</a:t>
+              <a:rPr sz="1300" b="1" i="0">
+                <a:solidFill>
+                  <a:srgbClr val="3A4556"/>
+                </a:solidFill>
+                <a:latin typeface="IBM Plex Sans"/>
+              </a:rPr>
+              <a:t>Within: </a:t>
+            </a:r>
+            <a:r>
+              <a:rPr sz="1300" b="0" i="0">
+                <a:solidFill>
+                  <a:srgbClr val="3A4556"/>
+                </a:solidFill>
+                <a:latin typeface="IBM Plex Sans"/>
+              </a:rPr>
+              <a:t>membership, attribute, holdout gap, stored rows, release checks, query budget.</a:t>
             </a:r>
           </a:p>
         </p:txBody>
@@ -21772,12 +22274,12 @@
         </p:nvSpPr>
         <p:spPr>
           <a:xfrm>
-            <a:off x="6757416" y="2011680"/>
-            <a:ext cx="4617720" cy="1188720"/>
+            <a:off x="7534656" y="1920240"/>
+            <a:ext cx="3840480" cy="1874519"/>
           </a:xfrm>
           <a:prstGeom prst="roundRect">
             <a:avLst>
-              <a:gd name="adj" fmla="val 8000"/>
+              <a:gd name="adj" fmla="val 5853"/>
             </a:avLst>
           </a:prstGeom>
           <a:solidFill>
@@ -21806,8 +22308,8 @@
         </p:nvSpPr>
         <p:spPr>
           <a:xfrm>
-            <a:off x="6958583" y="2194560"/>
-            <a:ext cx="4215383" cy="365760"/>
+            <a:off x="7735824" y="2103120"/>
+            <a:ext cx="3438144" cy="365760"/>
           </a:xfrm>
           <a:prstGeom prst="rect">
             <a:avLst/>
@@ -21828,7 +22330,7 @@
                 </a:solidFill>
                 <a:latin typeface="IBM Plex Sans"/>
               </a:rPr>
-              <a:t>Demo 3 · seconds</a:t>
+              <a:t>Never a silent green</a:t>
             </a:r>
           </a:p>
         </p:txBody>
@@ -21841,8 +22343,8 @@
         </p:nvSpPr>
         <p:spPr>
           <a:xfrm>
-            <a:off x="6958583" y="2468880"/>
-            <a:ext cx="4215383" cy="640080"/>
+            <a:off x="7735824" y="2377440"/>
+            <a:ext cx="3438144" cy="1325879"/>
           </a:xfrm>
           <a:prstGeom prst="rect">
             <a:avLst/>
@@ -21863,7 +22365,7 @@
                 </a:solidFill>
                 <a:latin typeface="IBM Plex Sans"/>
               </a:rPr>
-              <a:t>aml_report.txt: evasion, extraction, backdoor.</a:t>
+              <a:t>A control whose demo did not run is not_evidenced, not pass. CI does not install sacroml, so it declares demo 2 out of scope with --accept-missing 2 and the report says so.</a:t>
             </a:r>
           </a:p>
         </p:txBody>
@@ -21876,21 +22378,19 @@
         </p:nvSpPr>
         <p:spPr>
           <a:xfrm>
-            <a:off x="6757416" y="3337560"/>
-            <a:ext cx="4617720" cy="1188720"/>
+            <a:off x="7534656" y="3931920"/>
+            <a:ext cx="3840480" cy="1874519"/>
           </a:xfrm>
           <a:prstGeom prst="roundRect">
             <a:avLst>
-              <a:gd name="adj" fmla="val 8000"/>
+              <a:gd name="adj" fmla="val 5853"/>
             </a:avLst>
           </a:prstGeom>
           <a:solidFill>
-            <a:srgbClr val="FDFCF9"/>
+            <a:srgbClr val="0F1B2D"/>
           </a:solidFill>
-          <a:ln w="12700">
-            <a:solidFill>
-              <a:srgbClr val="E2DFD6"/>
-            </a:solidFill>
+          <a:ln>
+            <a:noFill/>
           </a:ln>
           <a:effectLst/>
         </p:spPr>
@@ -21910,8 +22410,8 @@
         </p:nvSpPr>
         <p:spPr>
           <a:xfrm>
-            <a:off x="6958583" y="3520440"/>
-            <a:ext cx="4215383" cy="365760"/>
+            <a:off x="7735824" y="4114800"/>
+            <a:ext cx="3438144" cy="365760"/>
           </a:xfrm>
           <a:prstGeom prst="rect">
             <a:avLst/>
@@ -21928,11 +22428,11 @@
             <a:r>
               <a:rPr sz="1600" b="1" i="0">
                 <a:solidFill>
-                  <a:srgbClr val="0F1B2D"/>
+                  <a:srgbClr val="F2A35E"/>
                 </a:solidFill>
                 <a:latin typeface="IBM Plex Sans"/>
               </a:rPr>
-              <a:t>Demo 1 · seconds</a:t>
+              <a:t>Read with SR 26-02</a:t>
             </a:r>
           </a:p>
         </p:txBody>
@@ -21945,8 +22445,8 @@
         </p:nvSpPr>
         <p:spPr>
           <a:xfrm>
-            <a:off x="6958583" y="3794760"/>
-            <a:ext cx="4215383" cy="640080"/>
+            <a:off x="7735824" y="4389120"/>
+            <a:ext cx="3438144" cy="1325879"/>
           </a:xfrm>
           <a:prstGeom prst="rect">
             <a:avLst/>
@@ -21963,59 +22463,25 @@
             <a:r>
               <a:rPr sz="1250" b="0" i="0">
                 <a:solidFill>
-                  <a:srgbClr val="3A4556"/>
+                  <a:srgbClr val="D9DEE6"/>
                 </a:solidFill>
                 <a:latin typeface="IBM Plex Sans"/>
               </a:rPr>
-              <a:t>demo_report.txt, data dictionary, register entry, pipeline snapshot, release reports.</a:t>
-            </a:r>
-          </a:p>
-        </p:txBody>
-      </p:sp>
-      <p:sp>
-        <p:nvSpPr>
-          <p:cNvPr id="12" name="Rounded Rectangle 11"/>
-          <p:cNvSpPr/>
-          <p:nvPr/>
-        </p:nvSpPr>
-        <p:spPr>
-          <a:xfrm>
-            <a:off x="6757416" y="4663440"/>
-            <a:ext cx="4617720" cy="1234440"/>
-          </a:xfrm>
-          <a:prstGeom prst="roundRect">
-            <a:avLst>
-              <a:gd name="adj" fmla="val 8000"/>
-            </a:avLst>
-          </a:prstGeom>
-          <a:solidFill>
-            <a:srgbClr val="FDFCF9"/>
-          </a:solidFill>
-          <a:ln w="12700">
-            <a:solidFill>
-              <a:srgbClr val="E2DFD6"/>
-            </a:solidFill>
-          </a:ln>
-          <a:effectLst/>
-        </p:spPr>
-        <p:txBody>
-          <a:bodyPr rtlCol="0" anchor="ctr"/>
-          <a:lstStyle/>
-          <a:p>
-            <a:pPr algn="ctr"/>
-          </a:p>
-        </p:txBody>
-      </p:sp>
-      <p:sp>
-        <p:nvSpPr>
-          <p:cNvPr id="13" name="TextBox 12"/>
+              <a:t>A risk classifier is a model in the plain sense of model risk guidance. The TRE holdout (TECH 6) is the independent validation; the gate in CI is the ongoing monitoring.</a:t>
+            </a:r>
+          </a:p>
+        </p:txBody>
+      </p:sp>
+      <p:sp>
+        <p:nvSpPr>
+          <p:cNvPr id="12" name="TextBox 11"/>
           <p:cNvSpPr txBox="1"/>
           <p:nvPr/>
         </p:nvSpPr>
         <p:spPr>
           <a:xfrm>
-            <a:off x="6958583" y="4846320"/>
-            <a:ext cx="4215383" cy="365760"/>
+            <a:off x="813816" y="6236208"/>
+            <a:ext cx="10561320" cy="274320"/>
           </a:xfrm>
           <a:prstGeom prst="rect">
             <a:avLst/>
@@ -22030,83 +22496,13 @@
           <a:p>
             <a:pPr algn="l"/>
             <a:r>
-              <a:rPr sz="1600" b="1" i="0">
-                <a:solidFill>
-                  <a:srgbClr val="0F1B2D"/>
+              <a:rPr sz="1200" b="0" i="0">
+                <a:solidFill>
+                  <a:srgbClr val="5F6979"/>
                 </a:solidFill>
                 <a:latin typeface="IBM Plex Sans"/>
               </a:rPr>
-              <a:t>Demo 2 · a few minutes</a:t>
-            </a:r>
-          </a:p>
-        </p:txBody>
-      </p:sp>
-      <p:sp>
-        <p:nvSpPr>
-          <p:cNvPr id="14" name="TextBox 13"/>
-          <p:cNvSpPr txBox="1"/>
-          <p:nvPr/>
-        </p:nvSpPr>
-        <p:spPr>
-          <a:xfrm>
-            <a:off x="6958583" y="5120640"/>
-            <a:ext cx="4215383" cy="685800"/>
-          </a:xfrm>
-          <a:prstGeom prst="rect">
-            <a:avLst/>
-          </a:prstGeom>
-          <a:noFill/>
-        </p:spPr>
-        <p:txBody>
-          <a:bodyPr wrap="square" anchor="t" lIns="0" rIns="0" tIns="0" bIns="0">
-            <a:spAutoFit/>
-          </a:bodyPr>
-          <a:lstStyle/>
-          <a:p>
-            <a:pPr algn="l"/>
-            <a:r>
-              <a:rPr sz="1250" b="0" i="0">
-                <a:solidFill>
-                  <a:srgbClr val="3A4556"/>
-                </a:solidFill>
-                <a:latin typeface="IBM Plex Sans"/>
-              </a:rPr>
-              <a:t>sacroml/sacroml_report.txt; report.json and report.pdf per attack.</a:t>
-            </a:r>
-          </a:p>
-        </p:txBody>
-      </p:sp>
-      <p:sp>
-        <p:nvSpPr>
-          <p:cNvPr id="15" name="TextBox 14"/>
-          <p:cNvSpPr txBox="1"/>
-          <p:nvPr/>
-        </p:nvSpPr>
-        <p:spPr>
-          <a:xfrm>
-            <a:off x="813816" y="6236208"/>
-            <a:ext cx="10561320" cy="274320"/>
-          </a:xfrm>
-          <a:prstGeom prst="rect">
-            <a:avLst/>
-          </a:prstGeom>
-          <a:noFill/>
-        </p:spPr>
-        <p:txBody>
-          <a:bodyPr wrap="square" anchor="t" lIns="0" rIns="0" tIns="0" bIns="0">
-            <a:spAutoFit/>
-          </a:bodyPr>
-          <a:lstStyle/>
-          <a:p>
-            <a:pPr algn="l"/>
-            <a:r>
-              <a:rPr sz="1200" b="0" i="0">
-                <a:solidFill>
-                  <a:srgbClr val="5F6979"/>
-                </a:solidFill>
-                <a:latin typeface="IBM Plex Sans"/>
-              </a:rPr>
-              <a:t>Setup details: README.md. Section notes: demo/README.md. Guides: docs/guide/ (English and Spanish).</a:t>
+              <a:t>Tolerances are a demo risk appetite (ELA 8), not official cut-offs. Pattern from safety-trust-engine. demo/output/gate/.</a:t>
             </a:r>
           </a:p>
         </p:txBody>
@@ -22165,7 +22561,7 @@
                 </a:solidFill>
                 <a:latin typeface="IBM Plex Sans"/>
               </a:rPr>
-              <a:t>Read further</a:t>
+              <a:t>Three demos and a gate, reports under demo/output</a:t>
             </a:r>
           </a:p>
         </p:txBody>
@@ -22200,21 +22596,53 @@
                 </a:solidFill>
                 <a:latin typeface="Consolas"/>
               </a:rPr>
-              <a:t>REFERENCES</a:t>
-            </a:r>
-          </a:p>
-        </p:txBody>
-      </p:sp>
-      <p:sp>
-        <p:nvSpPr>
-          <p:cNvPr id="4" name="TextBox 3"/>
+              <a:t>RUN IT YOURSELF</a:t>
+            </a:r>
+          </a:p>
+        </p:txBody>
+      </p:sp>
+      <p:sp>
+        <p:nvSpPr>
+          <p:cNvPr id="4" name="Rounded Rectangle 3"/>
+          <p:cNvSpPr/>
+          <p:nvPr/>
+        </p:nvSpPr>
+        <p:spPr>
+          <a:xfrm>
+            <a:off x="813816" y="2011680"/>
+            <a:ext cx="5669280" cy="3886200"/>
+          </a:xfrm>
+          <a:prstGeom prst="roundRect">
+            <a:avLst>
+              <a:gd name="adj" fmla="val 2823"/>
+            </a:avLst>
+          </a:prstGeom>
+          <a:solidFill>
+            <a:srgbClr val="0F1B2D"/>
+          </a:solidFill>
+          <a:ln>
+            <a:noFill/>
+          </a:ln>
+          <a:effectLst/>
+        </p:spPr>
+        <p:txBody>
+          <a:bodyPr rtlCol="0" anchor="ctr"/>
+          <a:lstStyle/>
+          <a:p>
+            <a:pPr algn="ctr"/>
+          </a:p>
+        </p:txBody>
+      </p:sp>
+      <p:sp>
+        <p:nvSpPr>
+          <p:cNvPr id="5" name="TextBox 4"/>
           <p:cNvSpPr txBox="1"/>
           <p:nvPr/>
         </p:nvSpPr>
         <p:spPr>
           <a:xfrm>
-            <a:off x="813816" y="1920240"/>
-            <a:ext cx="10561320" cy="4206240"/>
+            <a:off x="1088136" y="2194560"/>
+            <a:ext cx="5212080" cy="3566160"/>
           </a:xfrm>
           <a:prstGeom prst="rect">
             <a:avLst/>
@@ -22229,22 +22657,13 @@
           <a:p>
             <a:pPr algn="l"/>
             <a:r>
-              <a:rPr sz="1350" b="1" i="0">
-                <a:solidFill>
-                  <a:srgbClr val="3A4556"/>
-                </a:solidFill>
-                <a:latin typeface="IBM Plex Sans"/>
-              </a:rPr>
-              <a:t>NIST AI 100-2e2025. </a:t>
-            </a:r>
-            <a:r>
-              <a:rPr sz="1350" b="0" i="0">
-                <a:solidFill>
-                  <a:srgbClr val="3A4556"/>
-                </a:solidFill>
-                <a:latin typeface="IBM Plex Sans"/>
-              </a:rPr>
-              <a:t>Vassilev, Oprea, Fordyce, Anderson, Davies, Hamin. Adversarial Machine Learning: A Taxonomy and Terminology of Attacks and Mitigations. March 2025. doi:10.6028/NIST.AI.100-2e2025 (in this repository).</a:t>
+              <a:rPr sz="1250" b="0" i="0">
+                <a:solidFill>
+                  <a:srgbClr val="F6F5F0"/>
+                </a:solidFill>
+                <a:latin typeface="Consolas"/>
+              </a:rPr>
+              <a:t>uv venv --python 3.11</a:t>
             </a:r>
           </a:p>
           <a:p>
@@ -22254,22 +22673,13 @@
               </a:spcBef>
             </a:pPr>
             <a:r>
-              <a:rPr sz="1350" b="1" i="0">
-                <a:solidFill>
-                  <a:srgbClr val="3A4556"/>
-                </a:solidFill>
-                <a:latin typeface="IBM Plex Sans"/>
-              </a:rPr>
-              <a:t>MITRE ATLAS. </a:t>
-            </a:r>
-            <a:r>
-              <a:rPr sz="1350" b="0" i="0">
-                <a:solidFill>
-                  <a:srgbClr val="3A4556"/>
-                </a:solidFill>
-                <a:latin typeface="IBM Plex Sans"/>
-              </a:rPr>
-              <a:t>atlas.mitre.org, data release 2026.09.</a:t>
+              <a:rPr sz="1250" b="0" i="0">
+                <a:solidFill>
+                  <a:srgbClr val="F6F5F0"/>
+                </a:solidFill>
+                <a:latin typeface="Consolas"/>
+              </a:rPr>
+              <a:t>uv pip install -r demo/requirements.txt</a:t>
             </a:r>
           </a:p>
           <a:p>
@@ -22279,22 +22689,13 @@
               </a:spcBef>
             </a:pPr>
             <a:r>
-              <a:rPr sz="1350" b="1" i="0">
-                <a:solidFill>
-                  <a:srgbClr val="3A4556"/>
-                </a:solidFill>
-                <a:latin typeface="IBM Plex Sans"/>
-              </a:rPr>
-              <a:t>OWASP. </a:t>
-            </a:r>
-            <a:r>
-              <a:rPr sz="1350" b="0" i="0">
-                <a:solidFill>
-                  <a:srgbClr val="3A4556"/>
-                </a:solidFill>
-                <a:latin typeface="IBM Plex Sans"/>
-              </a:rPr>
-              <a:t>Machine Learning Security Top 10 (2023, draft); Top 10 for LLM Applications 2025.</a:t>
+              <a:rPr sz="1250" b="0" i="0">
+                <a:solidFill>
+                  <a:srgbClr val="F6F5F0"/>
+                </a:solidFill>
+                <a:latin typeface="Consolas"/>
+              </a:rPr>
+              <a:t/>
             </a:r>
           </a:p>
           <a:p>
@@ -22304,22 +22705,13 @@
               </a:spcBef>
             </a:pPr>
             <a:r>
-              <a:rPr sz="1350" b="1" i="0">
-                <a:solidFill>
-                  <a:srgbClr val="3A4556"/>
-                </a:solidFill>
-                <a:latin typeface="IBM Plex Sans"/>
-              </a:rPr>
-              <a:t>EU. </a:t>
-            </a:r>
-            <a:r>
-              <a:rPr sz="1350" b="0" i="0">
-                <a:solidFill>
-                  <a:srgbClr val="3A4556"/>
-                </a:solidFill>
-                <a:latin typeface="IBM Plex Sans"/>
-              </a:rPr>
-              <a:t>Regulation (EU) 2024/1689 (AI Act), Art. 15; Regulation (EU) 2026/1744 (Digital Omnibus on AI); EDPB Opinion 28/2024 on AI models.</a:t>
+              <a:rPr sz="1250" b="0" i="0">
+                <a:solidFill>
+                  <a:srgbClr val="F6F5F0"/>
+                </a:solidFill>
+                <a:latin typeface="Consolas"/>
+              </a:rPr>
+              <a:t>uv run python demo/run_aml_demo.py</a:t>
             </a:r>
           </a:p>
           <a:p>
@@ -22329,22 +22721,13 @@
               </a:spcBef>
             </a:pPr>
             <a:r>
-              <a:rPr sz="1350" b="1" i="0">
-                <a:solidFill>
-                  <a:srgbClr val="3A4556"/>
-                </a:solidFill>
-                <a:latin typeface="IBM Plex Sans"/>
-              </a:rPr>
-              <a:t>UK. </a:t>
-            </a:r>
-            <a:r>
-              <a:rPr sz="1350" b="0" i="0">
-                <a:solidFill>
-                  <a:srgbClr val="3A4556"/>
-                </a:solidFill>
-                <a:latin typeface="IBM Plex Sans"/>
-              </a:rPr>
-              <a:t>DSIT Code of Practice for the Cyber Security of AI (Jan 2025); ETSI EN 304 223 (Jan 2026); NCSC and CISA, Guidelines for secure AI system development (Nov 2023).</a:t>
+              <a:rPr sz="1250" b="0" i="0">
+                <a:solidFill>
+                  <a:srgbClr val="F6F5F0"/>
+                </a:solidFill>
+                <a:latin typeface="Consolas"/>
+              </a:rPr>
+              <a:t>uv run python demo/run_demo.py</a:t>
             </a:r>
           </a:p>
           <a:p>
@@ -22354,22 +22737,456 @@
               </a:spcBef>
             </a:pPr>
             <a:r>
-              <a:rPr sz="1350" b="1" i="0">
+              <a:rPr sz="1250" b="0" i="0">
+                <a:solidFill>
+                  <a:srgbClr val="F6F5F0"/>
+                </a:solidFill>
+                <a:latin typeface="Consolas"/>
+              </a:rPr>
+              <a:t>uv run python demo/run_sacroml_demo.py</a:t>
+            </a:r>
+          </a:p>
+          <a:p>
+            <a:pPr algn="l">
+              <a:spcBef>
+                <a:spcPts val="600"/>
+              </a:spcBef>
+            </a:pPr>
+            <a:r>
+              <a:rPr sz="1250" b="0" i="0">
+                <a:solidFill>
+                  <a:srgbClr val="F6F5F0"/>
+                </a:solidFill>
+                <a:latin typeface="Consolas"/>
+              </a:rPr>
+              <a:t>uv run python demo/run_gate.py</a:t>
+            </a:r>
+          </a:p>
+          <a:p>
+            <a:pPr algn="l">
+              <a:spcBef>
+                <a:spcPts val="600"/>
+              </a:spcBef>
+            </a:pPr>
+            <a:r>
+              <a:rPr sz="1250" b="0" i="0">
+                <a:solidFill>
+                  <a:srgbClr val="F6F5F0"/>
+                </a:solidFill>
+                <a:latin typeface="Consolas"/>
+              </a:rPr>
+              <a:t/>
+            </a:r>
+          </a:p>
+          <a:p>
+            <a:pPr algn="l">
+              <a:spcBef>
+                <a:spcPts val="600"/>
+              </a:spcBef>
+            </a:pPr>
+            <a:r>
+              <a:rPr sz="1250" b="0" i="0">
+                <a:solidFill>
+                  <a:srgbClr val="F6F5F0"/>
+                </a:solidFill>
+                <a:latin typeface="Consolas"/>
+              </a:rPr>
+              <a:t># figures and this deck</a:t>
+            </a:r>
+          </a:p>
+          <a:p>
+            <a:pPr algn="l">
+              <a:spcBef>
+                <a:spcPts val="600"/>
+              </a:spcBef>
+            </a:pPr>
+            <a:r>
+              <a:rPr sz="1250" b="0" i="0">
+                <a:solidFill>
+                  <a:srgbClr val="F6F5F0"/>
+                </a:solidFill>
+                <a:latin typeface="Consolas"/>
+              </a:rPr>
+              <a:t>python docs/guide/make_figures.py</a:t>
+            </a:r>
+          </a:p>
+          <a:p>
+            <a:pPr algn="l">
+              <a:spcBef>
+                <a:spcPts val="600"/>
+              </a:spcBef>
+            </a:pPr>
+            <a:r>
+              <a:rPr sz="1250" b="0" i="0">
+                <a:solidFill>
+                  <a:srgbClr val="F6F5F0"/>
+                </a:solidFill>
+                <a:latin typeface="Consolas"/>
+              </a:rPr>
+              <a:t>python docs/guide/make_aml_figures.py</a:t>
+            </a:r>
+          </a:p>
+          <a:p>
+            <a:pPr algn="l">
+              <a:spcBef>
+                <a:spcPts val="600"/>
+              </a:spcBef>
+            </a:pPr>
+            <a:r>
+              <a:rPr sz="1250" b="0" i="0">
+                <a:solidFill>
+                  <a:srgbClr val="F6F5F0"/>
+                </a:solidFill>
+                <a:latin typeface="Consolas"/>
+              </a:rPr>
+              <a:t>python docs/make_deck.py</a:t>
+            </a:r>
+          </a:p>
+        </p:txBody>
+      </p:sp>
+      <p:sp>
+        <p:nvSpPr>
+          <p:cNvPr id="6" name="Rounded Rectangle 5"/>
+          <p:cNvSpPr/>
+          <p:nvPr/>
+        </p:nvSpPr>
+        <p:spPr>
+          <a:xfrm>
+            <a:off x="6757416" y="2011680"/>
+            <a:ext cx="4617720" cy="1188720"/>
+          </a:xfrm>
+          <a:prstGeom prst="roundRect">
+            <a:avLst>
+              <a:gd name="adj" fmla="val 8000"/>
+            </a:avLst>
+          </a:prstGeom>
+          <a:solidFill>
+            <a:srgbClr val="FDFCF9"/>
+          </a:solidFill>
+          <a:ln w="12700">
+            <a:solidFill>
+              <a:srgbClr val="E2DFD6"/>
+            </a:solidFill>
+          </a:ln>
+          <a:effectLst/>
+        </p:spPr>
+        <p:txBody>
+          <a:bodyPr rtlCol="0" anchor="ctr"/>
+          <a:lstStyle/>
+          <a:p>
+            <a:pPr algn="ctr"/>
+          </a:p>
+        </p:txBody>
+      </p:sp>
+      <p:sp>
+        <p:nvSpPr>
+          <p:cNvPr id="7" name="TextBox 6"/>
+          <p:cNvSpPr txBox="1"/>
+          <p:nvPr/>
+        </p:nvSpPr>
+        <p:spPr>
+          <a:xfrm>
+            <a:off x="6958583" y="2194560"/>
+            <a:ext cx="4215383" cy="365760"/>
+          </a:xfrm>
+          <a:prstGeom prst="rect">
+            <a:avLst/>
+          </a:prstGeom>
+          <a:noFill/>
+        </p:spPr>
+        <p:txBody>
+          <a:bodyPr wrap="square" anchor="t" lIns="0" rIns="0" tIns="0" bIns="0">
+            <a:spAutoFit/>
+          </a:bodyPr>
+          <a:lstStyle/>
+          <a:p>
+            <a:pPr algn="l"/>
+            <a:r>
+              <a:rPr sz="1600" b="1" i="0">
+                <a:solidFill>
+                  <a:srgbClr val="0F1B2D"/>
+                </a:solidFill>
+                <a:latin typeface="IBM Plex Sans"/>
+              </a:rPr>
+              <a:t>Demo 3 · seconds</a:t>
+            </a:r>
+          </a:p>
+        </p:txBody>
+      </p:sp>
+      <p:sp>
+        <p:nvSpPr>
+          <p:cNvPr id="8" name="TextBox 7"/>
+          <p:cNvSpPr txBox="1"/>
+          <p:nvPr/>
+        </p:nvSpPr>
+        <p:spPr>
+          <a:xfrm>
+            <a:off x="6958583" y="2468880"/>
+            <a:ext cx="4215383" cy="640080"/>
+          </a:xfrm>
+          <a:prstGeom prst="rect">
+            <a:avLst/>
+          </a:prstGeom>
+          <a:noFill/>
+        </p:spPr>
+        <p:txBody>
+          <a:bodyPr wrap="square" anchor="t" lIns="0" rIns="0" tIns="0" bIns="0">
+            <a:spAutoFit/>
+          </a:bodyPr>
+          <a:lstStyle/>
+          <a:p>
+            <a:pPr algn="l"/>
+            <a:r>
+              <a:rPr sz="1250" b="0" i="0">
                 <a:solidFill>
                   <a:srgbClr val="3A4556"/>
                 </a:solidFill>
                 <a:latin typeface="IBM Plex Sans"/>
               </a:rPr>
-              <a:t>GRAIMATTER green paper. </a:t>
-            </a:r>
-            <a:r>
-              <a:rPr sz="1350" b="0" i="0">
+              <a:t>aml_report.txt: evasion, extraction, backdoor.</a:t>
+            </a:r>
+          </a:p>
+        </p:txBody>
+      </p:sp>
+      <p:sp>
+        <p:nvSpPr>
+          <p:cNvPr id="9" name="Rounded Rectangle 8"/>
+          <p:cNvSpPr/>
+          <p:nvPr/>
+        </p:nvSpPr>
+        <p:spPr>
+          <a:xfrm>
+            <a:off x="6757416" y="3337560"/>
+            <a:ext cx="4617720" cy="1188720"/>
+          </a:xfrm>
+          <a:prstGeom prst="roundRect">
+            <a:avLst>
+              <a:gd name="adj" fmla="val 8000"/>
+            </a:avLst>
+          </a:prstGeom>
+          <a:solidFill>
+            <a:srgbClr val="FDFCF9"/>
+          </a:solidFill>
+          <a:ln w="12700">
+            <a:solidFill>
+              <a:srgbClr val="E2DFD6"/>
+            </a:solidFill>
+          </a:ln>
+          <a:effectLst/>
+        </p:spPr>
+        <p:txBody>
+          <a:bodyPr rtlCol="0" anchor="ctr"/>
+          <a:lstStyle/>
+          <a:p>
+            <a:pPr algn="ctr"/>
+          </a:p>
+        </p:txBody>
+      </p:sp>
+      <p:sp>
+        <p:nvSpPr>
+          <p:cNvPr id="10" name="TextBox 9"/>
+          <p:cNvSpPr txBox="1"/>
+          <p:nvPr/>
+        </p:nvSpPr>
+        <p:spPr>
+          <a:xfrm>
+            <a:off x="6958583" y="3520440"/>
+            <a:ext cx="4215383" cy="365760"/>
+          </a:xfrm>
+          <a:prstGeom prst="rect">
+            <a:avLst/>
+          </a:prstGeom>
+          <a:noFill/>
+        </p:spPr>
+        <p:txBody>
+          <a:bodyPr wrap="square" anchor="t" lIns="0" rIns="0" tIns="0" bIns="0">
+            <a:spAutoFit/>
+          </a:bodyPr>
+          <a:lstStyle/>
+          <a:p>
+            <a:pPr algn="l"/>
+            <a:r>
+              <a:rPr sz="1600" b="1" i="0">
+                <a:solidFill>
+                  <a:srgbClr val="0F1B2D"/>
+                </a:solidFill>
+                <a:latin typeface="IBM Plex Sans"/>
+              </a:rPr>
+              <a:t>Demo 1 · seconds</a:t>
+            </a:r>
+          </a:p>
+        </p:txBody>
+      </p:sp>
+      <p:sp>
+        <p:nvSpPr>
+          <p:cNvPr id="11" name="TextBox 10"/>
+          <p:cNvSpPr txBox="1"/>
+          <p:nvPr/>
+        </p:nvSpPr>
+        <p:spPr>
+          <a:xfrm>
+            <a:off x="6958583" y="3794760"/>
+            <a:ext cx="4215383" cy="640080"/>
+          </a:xfrm>
+          <a:prstGeom prst="rect">
+            <a:avLst/>
+          </a:prstGeom>
+          <a:noFill/>
+        </p:spPr>
+        <p:txBody>
+          <a:bodyPr wrap="square" anchor="t" lIns="0" rIns="0" tIns="0" bIns="0">
+            <a:spAutoFit/>
+          </a:bodyPr>
+          <a:lstStyle/>
+          <a:p>
+            <a:pPr algn="l"/>
+            <a:r>
+              <a:rPr sz="1250" b="0" i="0">
                 <a:solidFill>
                   <a:srgbClr val="3A4556"/>
                 </a:solidFill>
                 <a:latin typeface="IBM Plex Sans"/>
               </a:rPr>
-              <a:t>Recommendations for disclosure control of trained ML models from TREs. DARE UK, September 2022 (in this repository). SACRO-ML: github.com/AI-SDC/SACRO-ML.</a:t>
+              <a:t>demo_report.txt, data dictionary, register entry, pipeline snapshot, release reports.</a:t>
+            </a:r>
+          </a:p>
+        </p:txBody>
+      </p:sp>
+      <p:sp>
+        <p:nvSpPr>
+          <p:cNvPr id="12" name="Rounded Rectangle 11"/>
+          <p:cNvSpPr/>
+          <p:nvPr/>
+        </p:nvSpPr>
+        <p:spPr>
+          <a:xfrm>
+            <a:off x="6757416" y="4663440"/>
+            <a:ext cx="4617720" cy="1234440"/>
+          </a:xfrm>
+          <a:prstGeom prst="roundRect">
+            <a:avLst>
+              <a:gd name="adj" fmla="val 8000"/>
+            </a:avLst>
+          </a:prstGeom>
+          <a:solidFill>
+            <a:srgbClr val="FDFCF9"/>
+          </a:solidFill>
+          <a:ln w="12700">
+            <a:solidFill>
+              <a:srgbClr val="E2DFD6"/>
+            </a:solidFill>
+          </a:ln>
+          <a:effectLst/>
+        </p:spPr>
+        <p:txBody>
+          <a:bodyPr rtlCol="0" anchor="ctr"/>
+          <a:lstStyle/>
+          <a:p>
+            <a:pPr algn="ctr"/>
+          </a:p>
+        </p:txBody>
+      </p:sp>
+      <p:sp>
+        <p:nvSpPr>
+          <p:cNvPr id="13" name="TextBox 12"/>
+          <p:cNvSpPr txBox="1"/>
+          <p:nvPr/>
+        </p:nvSpPr>
+        <p:spPr>
+          <a:xfrm>
+            <a:off x="6958583" y="4846320"/>
+            <a:ext cx="4215383" cy="365760"/>
+          </a:xfrm>
+          <a:prstGeom prst="rect">
+            <a:avLst/>
+          </a:prstGeom>
+          <a:noFill/>
+        </p:spPr>
+        <p:txBody>
+          <a:bodyPr wrap="square" anchor="t" lIns="0" rIns="0" tIns="0" bIns="0">
+            <a:spAutoFit/>
+          </a:bodyPr>
+          <a:lstStyle/>
+          <a:p>
+            <a:pPr algn="l"/>
+            <a:r>
+              <a:rPr sz="1600" b="1" i="0">
+                <a:solidFill>
+                  <a:srgbClr val="0F1B2D"/>
+                </a:solidFill>
+                <a:latin typeface="IBM Plex Sans"/>
+              </a:rPr>
+              <a:t>Demo 2 · a few minutes</a:t>
+            </a:r>
+          </a:p>
+        </p:txBody>
+      </p:sp>
+      <p:sp>
+        <p:nvSpPr>
+          <p:cNvPr id="14" name="TextBox 13"/>
+          <p:cNvSpPr txBox="1"/>
+          <p:nvPr/>
+        </p:nvSpPr>
+        <p:spPr>
+          <a:xfrm>
+            <a:off x="6958583" y="5120640"/>
+            <a:ext cx="4215383" cy="685800"/>
+          </a:xfrm>
+          <a:prstGeom prst="rect">
+            <a:avLst/>
+          </a:prstGeom>
+          <a:noFill/>
+        </p:spPr>
+        <p:txBody>
+          <a:bodyPr wrap="square" anchor="t" lIns="0" rIns="0" tIns="0" bIns="0">
+            <a:spAutoFit/>
+          </a:bodyPr>
+          <a:lstStyle/>
+          <a:p>
+            <a:pPr algn="l"/>
+            <a:r>
+              <a:rPr sz="1250" b="0" i="0">
+                <a:solidFill>
+                  <a:srgbClr val="3A4556"/>
+                </a:solidFill>
+                <a:latin typeface="IBM Plex Sans"/>
+              </a:rPr>
+              <a:t>sacroml/sacroml_report.txt; report.json and report.pdf per attack.</a:t>
+            </a:r>
+          </a:p>
+        </p:txBody>
+      </p:sp>
+      <p:sp>
+        <p:nvSpPr>
+          <p:cNvPr id="15" name="TextBox 14"/>
+          <p:cNvSpPr txBox="1"/>
+          <p:nvPr/>
+        </p:nvSpPr>
+        <p:spPr>
+          <a:xfrm>
+            <a:off x="813816" y="6236208"/>
+            <a:ext cx="10561320" cy="274320"/>
+          </a:xfrm>
+          <a:prstGeom prst="rect">
+            <a:avLst/>
+          </a:prstGeom>
+          <a:noFill/>
+        </p:spPr>
+        <p:txBody>
+          <a:bodyPr wrap="square" anchor="t" lIns="0" rIns="0" tIns="0" bIns="0">
+            <a:spAutoFit/>
+          </a:bodyPr>
+          <a:lstStyle/>
+          <a:p>
+            <a:pPr algn="l"/>
+            <a:r>
+              <a:rPr sz="1200" b="0" i="0">
+                <a:solidFill>
+                  <a:srgbClr val="5F6979"/>
+                </a:solidFill>
+                <a:latin typeface="IBM Plex Sans"/>
+              </a:rPr>
+              <a:t>Setup details: README.md. Section notes: demo/README.md. Guides: docs/guide/ (English and Spanish).</a:t>
             </a:r>
           </a:p>
         </p:txBody>
@@ -22523,6 +23340,269 @@
                 <a:latin typeface="IBM Plex Sans"/>
               </a:rPr>
               <a:t>NIST AI 100-2e2025 §2.1.1 (stages) and §2.1.3 (capabilities). GRAIMATTER band: §10.1 of the green paper.</a:t>
+            </a:r>
+          </a:p>
+        </p:txBody>
+      </p:sp>
+    </p:spTree>
+  </p:cSld>
+  <p:clrMapOvr>
+    <a:masterClrMapping/>
+  </p:clrMapOvr>
+</p:sld>
+</file>
+
+<file path=ppt/slides/slide40.xml><?xml version="1.0" encoding="utf-8"?>
+<p:sld xmlns:a="http://schemas.openxmlformats.org/drawingml/2006/main" xmlns:p="http://schemas.openxmlformats.org/presentationml/2006/main" xmlns:r="http://schemas.openxmlformats.org/officeDocument/2006/relationships">
+  <p:cSld>
+    <p:bg>
+      <p:bgPr>
+        <a:solidFill>
+          <a:srgbClr val="F6F5F0"/>
+        </a:solidFill>
+        <a:effectLst/>
+      </p:bgPr>
+    </p:bg>
+    <p:spTree>
+      <p:nvGrpSpPr>
+        <p:cNvPr id="1" name=""/>
+        <p:cNvGrpSpPr/>
+        <p:nvPr/>
+      </p:nvGrpSpPr>
+      <p:grpSpPr/>
+      <p:sp>
+        <p:nvSpPr>
+          <p:cNvPr id="2" name="Title 1"/>
+          <p:cNvSpPr>
+            <a:spLocks noGrp="1"/>
+          </p:cNvSpPr>
+          <p:nvPr>
+            <p:ph type="title"/>
+          </p:nvPr>
+        </p:nvSpPr>
+        <p:spPr>
+          <a:xfrm>
+            <a:off x="813816" y="1207008"/>
+            <a:ext cx="10561320" cy="868680"/>
+          </a:xfrm>
+        </p:spPr>
+        <p:txBody>
+          <a:bodyPr wrap="square" anchor="t" lIns="0" rIns="0" tIns="0" bIns="0"/>
+          <a:lstStyle/>
+          <a:p>
+            <a:pPr algn="l"/>
+            <a:r>
+              <a:rPr sz="3000" b="1">
+                <a:solidFill>
+                  <a:srgbClr val="0F1B2D"/>
+                </a:solidFill>
+                <a:latin typeface="IBM Plex Sans"/>
+              </a:rPr>
+              <a:t>Read further</a:t>
+            </a:r>
+          </a:p>
+        </p:txBody>
+      </p:sp>
+      <p:sp>
+        <p:nvSpPr>
+          <p:cNvPr id="3" name="TextBox 2"/>
+          <p:cNvSpPr txBox="1"/>
+          <p:nvPr/>
+        </p:nvSpPr>
+        <p:spPr>
+          <a:xfrm>
+            <a:off x="813816" y="813816"/>
+            <a:ext cx="10561320" cy="274320"/>
+          </a:xfrm>
+          <a:prstGeom prst="rect">
+            <a:avLst/>
+          </a:prstGeom>
+          <a:noFill/>
+        </p:spPr>
+        <p:txBody>
+          <a:bodyPr wrap="square" anchor="t" lIns="0" rIns="0" tIns="0" bIns="0">
+            <a:spAutoFit/>
+          </a:bodyPr>
+          <a:lstStyle/>
+          <a:p>
+            <a:pPr algn="l"/>
+            <a:r>
+              <a:rPr sz="1200" b="0" i="0">
+                <a:solidFill>
+                  <a:srgbClr val="B4521A"/>
+                </a:solidFill>
+                <a:latin typeface="Consolas"/>
+              </a:rPr>
+              <a:t>REFERENCES</a:t>
+            </a:r>
+          </a:p>
+        </p:txBody>
+      </p:sp>
+      <p:sp>
+        <p:nvSpPr>
+          <p:cNvPr id="4" name="TextBox 3"/>
+          <p:cNvSpPr txBox="1"/>
+          <p:nvPr/>
+        </p:nvSpPr>
+        <p:spPr>
+          <a:xfrm>
+            <a:off x="813816" y="1920240"/>
+            <a:ext cx="10561320" cy="4206240"/>
+          </a:xfrm>
+          <a:prstGeom prst="rect">
+            <a:avLst/>
+          </a:prstGeom>
+          <a:noFill/>
+        </p:spPr>
+        <p:txBody>
+          <a:bodyPr wrap="square" anchor="t" lIns="0" rIns="0" tIns="0" bIns="0">
+            <a:spAutoFit/>
+          </a:bodyPr>
+          <a:lstStyle/>
+          <a:p>
+            <a:pPr algn="l"/>
+            <a:r>
+              <a:rPr sz="1350" b="1" i="0">
+                <a:solidFill>
+                  <a:srgbClr val="3A4556"/>
+                </a:solidFill>
+                <a:latin typeface="IBM Plex Sans"/>
+              </a:rPr>
+              <a:t>NIST AI 100-2e2025. </a:t>
+            </a:r>
+            <a:r>
+              <a:rPr sz="1350" b="0" i="0">
+                <a:solidFill>
+                  <a:srgbClr val="3A4556"/>
+                </a:solidFill>
+                <a:latin typeface="IBM Plex Sans"/>
+              </a:rPr>
+              <a:t>Vassilev, Oprea, Fordyce, Anderson, Davies, Hamin. Adversarial Machine Learning: A Taxonomy and Terminology of Attacks and Mitigations. March 2025. doi:10.6028/NIST.AI.100-2e2025 (in this repository).</a:t>
+            </a:r>
+          </a:p>
+          <a:p>
+            <a:pPr algn="l">
+              <a:spcBef>
+                <a:spcPts val="600"/>
+              </a:spcBef>
+            </a:pPr>
+            <a:r>
+              <a:rPr sz="1350" b="1" i="0">
+                <a:solidFill>
+                  <a:srgbClr val="3A4556"/>
+                </a:solidFill>
+                <a:latin typeface="IBM Plex Sans"/>
+              </a:rPr>
+              <a:t>MITRE ATLAS. </a:t>
+            </a:r>
+            <a:r>
+              <a:rPr sz="1350" b="0" i="0">
+                <a:solidFill>
+                  <a:srgbClr val="3A4556"/>
+                </a:solidFill>
+                <a:latin typeface="IBM Plex Sans"/>
+              </a:rPr>
+              <a:t>atlas.mitre.org, data release 2026.09.</a:t>
+            </a:r>
+          </a:p>
+          <a:p>
+            <a:pPr algn="l">
+              <a:spcBef>
+                <a:spcPts val="600"/>
+              </a:spcBef>
+            </a:pPr>
+            <a:r>
+              <a:rPr sz="1350" b="1" i="0">
+                <a:solidFill>
+                  <a:srgbClr val="3A4556"/>
+                </a:solidFill>
+                <a:latin typeface="IBM Plex Sans"/>
+              </a:rPr>
+              <a:t>OWASP. </a:t>
+            </a:r>
+            <a:r>
+              <a:rPr sz="1350" b="0" i="0">
+                <a:solidFill>
+                  <a:srgbClr val="3A4556"/>
+                </a:solidFill>
+                <a:latin typeface="IBM Plex Sans"/>
+              </a:rPr>
+              <a:t>Machine Learning Security Top 10 (2023, draft); Top 10 for LLM Applications 2025.</a:t>
+            </a:r>
+          </a:p>
+          <a:p>
+            <a:pPr algn="l">
+              <a:spcBef>
+                <a:spcPts val="600"/>
+              </a:spcBef>
+            </a:pPr>
+            <a:r>
+              <a:rPr sz="1350" b="1" i="0">
+                <a:solidFill>
+                  <a:srgbClr val="3A4556"/>
+                </a:solidFill>
+                <a:latin typeface="IBM Plex Sans"/>
+              </a:rPr>
+              <a:t>EU. </a:t>
+            </a:r>
+            <a:r>
+              <a:rPr sz="1350" b="0" i="0">
+                <a:solidFill>
+                  <a:srgbClr val="3A4556"/>
+                </a:solidFill>
+                <a:latin typeface="IBM Plex Sans"/>
+              </a:rPr>
+              <a:t>Regulation (EU) 2024/1689 (AI Act), Art. 15; Regulation (EU) 2026/1744 (Digital Omnibus on AI); EDPB Opinion 28/2024 on AI models.</a:t>
+            </a:r>
+          </a:p>
+          <a:p>
+            <a:pPr algn="l">
+              <a:spcBef>
+                <a:spcPts val="600"/>
+              </a:spcBef>
+            </a:pPr>
+            <a:r>
+              <a:rPr sz="1350" b="1" i="0">
+                <a:solidFill>
+                  <a:srgbClr val="3A4556"/>
+                </a:solidFill>
+                <a:latin typeface="IBM Plex Sans"/>
+              </a:rPr>
+              <a:t>UK. </a:t>
+            </a:r>
+            <a:r>
+              <a:rPr sz="1350" b="0" i="0">
+                <a:solidFill>
+                  <a:srgbClr val="3A4556"/>
+                </a:solidFill>
+                <a:latin typeface="IBM Plex Sans"/>
+              </a:rPr>
+              <a:t>DSIT Code of Practice for the Cyber Security of AI (Jan 2025); ETSI EN 304 223 (Jan 2026); NCSC and CISA, Guidelines for secure AI system development (Nov 2023).</a:t>
+            </a:r>
+          </a:p>
+          <a:p>
+            <a:pPr algn="l">
+              <a:spcBef>
+                <a:spcPts val="600"/>
+              </a:spcBef>
+            </a:pPr>
+            <a:r>
+              <a:rPr sz="1350" b="1" i="0">
+                <a:solidFill>
+                  <a:srgbClr val="3A4556"/>
+                </a:solidFill>
+                <a:latin typeface="IBM Plex Sans"/>
+              </a:rPr>
+              <a:t>GRAIMATTER green paper. </a:t>
+            </a:r>
+            <a:r>
+              <a:rPr sz="1350" b="0" i="0">
+                <a:solidFill>
+                  <a:srgbClr val="3A4556"/>
+                </a:solidFill>
+                <a:latin typeface="IBM Plex Sans"/>
+              </a:rPr>
+              <a:t>Recommendations for disclosure control of trained ML models from TREs. DARE UK, September 2022 (in this repository). SACRO-ML: github.com/AI-SDC/SACRO-ML.</a:t>
             </a:r>
           </a:p>
         </p:txBody>

--- a/docs/Adversarial_ML.pptx
+++ b/docs/Adversarial_ML.pptx
@@ -2991,7 +2991,7 @@
           <a:lstStyle/>
           <a:p>
             <a:r>
-              <a:t>The taxonomy starts from what the attacker wants. Availability: make the model useless for everyone, by poisoning or by inputs that make it slow. Integrity: make it give the answer the attacker wants, by evasion at deployment or by targeted and backdoor poisoning at training. Privacy: learn something that should stay hidden, about the training data or about the model itself. Each class has an identifier, so a test report can say NISTAML.033 rather than 'some privacy attack'. Highlighted boxes are the ones our three demos run.</a:t>
+              <a:t>The taxonomy starts from what the attacker wants, and the three objectives are the classic CIA triad: availability, integrity and confidentiality. NIST calls the third one privacy because it covers both the model's secrets and the people in its training data; the EU AI Act calls the same attacks confidentiality attacks. Supply chain is a route in, not a fourth goal. Availability: make the model useless for everyone, by poisoning or by inputs that make it slow. Integrity: make it give the answer the attacker wants, by evasion at deployment or by targeted and backdoor poisoning at training. Privacy: learn something that should stay hidden, about the training data or about the model itself. Each class has an identifier, so a test report can say NISTAML.033 rather than 'some privacy attack'. Highlighted boxes are the ones our three demos run.</a:t>
             </a:r>
           </a:p>
         </p:txBody>
@@ -23755,7 +23755,7 @@
                 </a:solidFill>
                 <a:latin typeface="IBM Plex Sans"/>
               </a:rPr>
-              <a:t>NIST AI 100-2e2025, Predictive AI and Generative AI Taxonomy Index (pp. x-xi) and §2.1.2.</a:t>
+              <a:t>The CIA triad in NIST's words: privacy = confidentiality (§2.1.2). NIST AI 100-2e2025, Taxonomy Index (pp. x-xi) and §2.1.2.</a:t>
             </a:r>
           </a:p>
         </p:txBody>

--- a/docs/Adversarial_ML.pptx
+++ b/docs/Adversarial_ML.pptx
@@ -2012,7 +2012,7 @@
           <a:lstStyle/>
           <a:p>
             <a:r>
-              <a:t>On the same wrapped tree we also run Salem-synth, where the attacker trains a shadow model on similar data rather than on the TRE's own tables. Its AUC is 0.512, close to chance. But its FDIF is 0.280 with p = 0.003, and TPR at 10% FPR is 0.252: members pile up in the extreme scores. This is exactly the Appendix F warning: an average metric can hide a tail. The demo's export rule follows the worst-case attack, whose FDIF is 0.020, so it still releases. A data controller who cares about the tail could refuse.</a:t>
+              <a:t>On the same wrapped tree we also run Salem-synth, where the attacker trains a shadow model on similar data rather than on the TRE's own tables. Its AUC is 0.512, close to chance. But its FDIF is 0.160 with p = 0.027: the top tenth of its scores holds clearly more members than the bottom tenth. This is exactly the Appendix F warning: an average metric can hide a tail. The demo's export rule follows the worst-case attack, whose FDIF is 0.020, so it still releases. A data controller who cares about the tail could refuse.</a:t>
             </a:r>
           </a:p>
         </p:txBody>
@@ -18112,7 +18112,7 @@
                 </a:solidFill>
                 <a:latin typeface="IBM Plex Sans"/>
               </a:rPr>
-              <a:t>The quiet failure: AUC near 0.5, but FDIF 0.280</a:t>
+              <a:t>The quiet failure: AUC near 0.5, but FDIF 0.160</a:t>
             </a:r>
           </a:p>
         </p:txBody>

--- a/docs/Adversarial_ML.pptx
+++ b/docs/Adversarial_ML.pptx
@@ -1032,7 +1032,7 @@
           <a:lstStyle/>
           <a:p>
             <a:r>
-              <a:t>OWASP's machine-learning list is short and practical. It overlaps NIST's privacy branch heavily: model inversion and membership inference are two of the ten, and model theft is a third. Model poisoning, ML10, means manipulating the model's parameters, which is what demo 1's tamper check catches. The list is marked as a draft and dates from 2023, so treat it as a checklist rather than a standard. The LLM list from 2025 is more current and is the one most teams building chat or agent products use.</a:t>
+              <a:t>OWASP's machine-learning list is short and practical. It overlaps NIST's privacy branch heavily: model inversion and membership inference are two of the ten, and model theft is a third. Model poisoning, ML10, means manipulating the model's parameters, which is what demo 1's tamper check catches, and AI supply chain attacks, ML06, are demo 4. The list is marked as a draft and dates from 2023, so treat it as a checklist rather than a standard. The LLM list from 2025 is more current and is the one most teams building chat or agent products use.</a:t>
             </a:r>
           </a:p>
         </p:txBody>
@@ -10577,13 +10577,13 @@
                           </a:solidFill>
                           <a:latin typeface="IBM Plex Sans"/>
                         </a:rPr>
-                        <a:t>–</a:t>
+                        <a:t>demo 4</a:t>
                       </a:r>
                     </a:p>
                   </a:txBody>
                   <a:tcPr marL="91440" marR="91440" marT="36576" marB="36576" anchor="ctr">
                     <a:solidFill>
-                      <a:srgbClr val="F1EFE8"/>
+                      <a:srgbClr val="FBE9DC"/>
                     </a:solidFill>
                   </a:tcPr>
                 </a:tc>
@@ -10977,7 +10977,7 @@
                 </a:solidFill>
                 <a:latin typeface="IBM Plex Sans"/>
               </a:rPr>
-              <a:t>ML03 and ML04 are what GRAIMATTER tests before release. ML10 is demo 1's check for edits after fit(). ML01, ML02 and ML05 are demo 3. The LLM list is on the generative-AI slide.</a:t>
+              <a:t>ML03 and ML04 are what GRAIMATTER tests before release. ML10 is demo 1's check for edits after fit(). ML01, ML02 and ML05 are demo 3, ML06 is demo 4. The LLM list is on the generative-AI slide.</a:t>
             </a:r>
           </a:p>
         </p:txBody>

--- a/docs/Adversarial_ML.pptx
+++ b/docs/Adversarial_ML.pptx
@@ -58,6 +58,7 @@
     <p:sldId id="306" r:id="rId58"/>
     <p:sldId id="307" r:id="rId59"/>
     <p:sldId id="308" r:id="rId60"/>
+    <p:sldId id="309" r:id="rId61"/>
   </p:sldIdLst>
   <p:sldSz cx="12191695" cy="6858000" type="screen4x3"/>
   <p:notesSz cx="6858000" cy="9144000"/>
@@ -3564,7 +3565,7 @@
           <a:lstStyle/>
           <a:p>
             <a:r>
-              <a:t>For generative AI, NIST keeps the three objectives and the supply chain, adds a fourth objective, misuse enablement, and adds classes that work through prompts: direct and indirect prompt injection, misaligned outputs, prompt extraction, leaks from user interactions, training data attacks, data extraction and the compromise of connected resources such as an agent's tools. This repository has no generative-AI demo; the companion repository safety-trust-engine tests these classes on live models and agents with the same idea of a gate.</a:t>
+              <a:t>Run demo 6. GRAIMATTER's checks ask whether a model leaks its training data by accident; they do not ask whether a researcher wrote data into it on purpose. The carrier is a small neural network on the same cohort. First channel: steganography in the low mantissa bits of the float32 weights. Hiding a 111-byte note moves no weight by more than 3e-06 and leaves accuracy at 0.575, so TECH 6 and the release gate pass it while the data rides out in the low bits; EvilModel (2021) hid whole malware files this way. Second channel: a watermark or backdoor, where trigger inputs far from the cohort carry the message one bit each; the model answers real rows as well as before and returns every planted bit. Defences: clipping the low bits, rounding to float16, or adding 0.1% noise each keeps accuracy and destroys the weight payload, but none touch the behavioural channel, which needs fine-tuning or differential privacy. A low-bit distribution test does not separate a clean model from a stego one, because the payload occupies about 115 of the 10,304 weights. The lesson for a TRE is to transform every released model, not to detect the payload. The demo is standalone and not wired into the gate.</a:t>
             </a:r>
           </a:p>
         </p:txBody>
@@ -3634,7 +3635,7 @@
           <a:lstStyle/>
           <a:p>
             <a:r>
-              <a:t>The taxonomy starts from what the attacker wants, and the three objectives are the classic CIA triad: availability, integrity and confidentiality. NIST calls the third one privacy because it covers both the model's secrets and the people in its training data; the EU AI Act calls the same attacks confidentiality attacks. Supply chain is a route in, not a fourth goal. Availability: make the model useless for everyone, by poisoning or by inputs that make it slow. Integrity: make it give the answer the attacker wants, by evasion at deployment or by targeted and backdoor poisoning at training. Privacy: learn something that should stay hidden, about the training data or about the model itself. Each class has an identifier, so a test report can say NISTAML.033 rather than 'some privacy attack'. Highlighted boxes are the ones our four demos run.</a:t>
+              <a:t>The taxonomy starts from what the attacker wants, and the three objectives are the classic CIA triad: availability, integrity and confidentiality. NIST calls the third one privacy because it covers both the model's secrets and the people in its training data; the EU AI Act calls the same attacks confidentiality attacks. Supply chain is a route in, not a fourth goal. Availability: make the model useless for everyone, by poisoning or by inputs that make it slow. Integrity: make it give the answer the attacker wants, by evasion at deployment or by targeted and backdoor poisoning at training. Privacy: learn something that should stay hidden, about the training data or about the model itself. Each class has an identifier, so a test report can say NISTAML.033 rather than 'some privacy attack'. Highlighted boxes are the ones our demos run.</a:t>
             </a:r>
           </a:p>
         </p:txBody>
@@ -3704,7 +3705,7 @@
           <a:lstStyle/>
           <a:p>
             <a:r>
-              <a:t>Be explicit about the edges. The cut-offs in disclosure.py exist so demo 1 can say yes or no; the paper publishes no universal thresholds. The legal slides summarise documents and are not advice. The attacks are teaching versions: no LiRA, and demo 3's evasion is a greedy search over a few fields, not an optimised attack. There is no private model and no generative-AI demo. The cohort is synthetic, and neither GRAIMATTER demo approves a model.</a:t>
+              <a:t>For generative AI, NIST keeps the three objectives and the supply chain, adds a fourth objective, misuse enablement, and adds classes that work through prompts: direct and indirect prompt injection, misaligned outputs, prompt extraction, leaks from user interactions, training data attacks, data extraction and the compromise of connected resources such as an agent's tools. This repository has no generative-AI demo; the companion repository safety-trust-engine tests these classes on live models and agents with the same idea of a gate.</a:t>
             </a:r>
           </a:p>
         </p:txBody>
@@ -3774,7 +3775,7 @@
           <a:lstStyle/>
           <a:p>
             <a:r>
-              <a:t>The gate reruns demos 1, 3 and 4, reads the numbers they already print, and judges each regulatory control as pass, fail or not evidenced. The GRAIMATTER controls pass on the wrapped tree. The robustness controls fail on the forest of demo 3: privacy checks alone do not make a model resilient in the sense of Article 15(5), which also names poisoning and evasion. Its model-poisoning clause passes, because demo 4's pin, scan and floors refuse every tampered file. A control whose demo did not run is reported as not evidenced, never as pass; CI declares demo 2 out of scope explicitly because it does not install sacroml. The US pack reads the same evidence through NIST AI RMF MEASURE 2.6, 2.7 and 2.10 and federal model risk guidance, where a classifier fits directly. The tolerances are a risk appetite set for the workshop, and the mapping is this repository's own.</a:t>
+              <a:t>Be explicit about the edges. The cut-offs in disclosure.py exist so demo 1 can say yes or no; the paper publishes no universal thresholds. The legal slides summarise documents and are not advice. The attacks are teaching versions: no LiRA, and demo 3's evasion is a greedy search over a few fields, not an optimised attack. There is no private model and no generative-AI demo. The cohort is synthetic, and neither GRAIMATTER demo approves a model.</a:t>
             </a:r>
           </a:p>
         </p:txBody>
@@ -3844,7 +3845,7 @@
           <a:lstStyle/>
           <a:p>
             <a:r>
-              <a:t>Setup is in the repository README: create a Python 3.11 environment with uv and install demo/requirements.txt, which brings numpy, scikit-learn and sacroml (and PyTorch with it). Demos 3, 4 and 1 run in seconds; demo 2 takes a few minutes. run_gate.py reruns the demos and writes the gate report to demo/output/gate; CI runs it on every pull request. The guides in docs/guide walk through every report section by section.</a:t>
+              <a:t>The gate reruns demos 1, 3 and 4, reads the numbers they already print, and judges each regulatory control as pass, fail or not evidenced. The GRAIMATTER controls pass on the wrapped tree. The robustness controls fail on the forest of demo 3: privacy checks alone do not make a model resilient in the sense of Article 15(5), which also names poisoning and evasion. Its model-poisoning clause passes, because demo 4's pin, scan and floors refuse every tampered file. A control whose demo did not run is reported as not evidenced, never as pass; CI declares demo 2 out of scope explicitly because it does not install sacroml. The US pack reads the same evidence through NIST AI RMF MEASURE 2.6, 2.7 and 2.10 and federal model risk guidance, where a classifier fits directly. The tolerances are a risk appetite set for the workshop, and the mapping is this repository's own.</a:t>
             </a:r>
           </a:p>
         </p:txBody>
@@ -3870,6 +3871,76 @@
 </file>
 
 <file path=ppt/notesSlides/notesSlide53.xml><?xml version="1.0" encoding="utf-8"?>
+<p:notes xmlns:a="http://schemas.openxmlformats.org/drawingml/2006/main" xmlns:p="http://schemas.openxmlformats.org/presentationml/2006/main" xmlns:r="http://schemas.openxmlformats.org/officeDocument/2006/relationships">
+  <p:cSld>
+    <p:spTree>
+      <p:nvGrpSpPr>
+        <p:cNvPr id="1" name=""/>
+        <p:cNvGrpSpPr/>
+        <p:nvPr/>
+      </p:nvGrpSpPr>
+      <p:grpSpPr>
+        <a:xfrm>
+          <a:off x="0" y="0"/>
+          <a:ext cx="0" cy="0"/>
+          <a:chOff x="0" y="0"/>
+          <a:chExt cx="0" cy="0"/>
+        </a:xfrm>
+      </p:grpSpPr>
+      <p:sp>
+        <p:nvSpPr>
+          <p:cNvPr id="2" name="Slide Image Placeholder 1"/>
+          <p:cNvSpPr>
+            <a:spLocks noGrp="1"/>
+          </p:cNvSpPr>
+          <p:nvPr>
+            <p:ph type="sldImg" idx="2"/>
+          </p:nvPr>
+        </p:nvSpPr>
+        <p:spPr/>
+      </p:sp>
+      <p:sp>
+        <p:nvSpPr>
+          <p:cNvPr id="3" name="Notes Placeholder 2"/>
+          <p:cNvSpPr>
+            <a:spLocks noGrp="1"/>
+          </p:cNvSpPr>
+          <p:nvPr>
+            <p:ph type="body" idx="3" sz="quarter"/>
+          </p:nvPr>
+        </p:nvSpPr>
+        <p:spPr/>
+        <p:txBody>
+          <a:bodyPr/>
+          <a:lstStyle/>
+          <a:p>
+            <a:r>
+              <a:t>Setup is in the repository README: create a Python 3.11 environment with uv and install demo/requirements.txt, which brings numpy, scikit-learn and sacroml (and PyTorch with it). Demos 3, 4 and 1 run in seconds; demo 2 takes a few minutes. run_gate.py reruns the demos and writes the gate report to demo/output/gate; CI runs it on every pull request. The guides in docs/guide walk through every report section by section.</a:t>
+            </a:r>
+          </a:p>
+        </p:txBody>
+      </p:sp>
+      <p:sp>
+        <p:nvSpPr>
+          <p:cNvPr id="4" name="Slide Number Placeholder 3"/>
+          <p:cNvSpPr>
+            <a:spLocks noGrp="1"/>
+          </p:cNvSpPr>
+          <p:nvPr>
+            <p:ph type="sldNum" idx="5" sz="quarter"/>
+          </p:nvPr>
+        </p:nvSpPr>
+        <p:spPr/>
+      </p:sp>
+    </p:spTree>
+  </p:cSld>
+  <p:clrMapOvr>
+    <a:masterClrMapping/>
+  </p:clrMapOvr>
+</p:notes>
+</file>
+
+<file path=ppt/notesSlides/notesSlide54.xml><?xml version="1.0" encoding="utf-8"?>
 <p:notes xmlns:a="http://schemas.openxmlformats.org/drawingml/2006/main" xmlns:p="http://schemas.openxmlformats.org/presentationml/2006/main" xmlns:r="http://schemas.openxmlformats.org/officeDocument/2006/relationships">
   <p:cSld>
     <p:spTree>
@@ -7403,7 +7474,7 @@
                 </a:solidFill>
                 <a:latin typeface="IBM Plex Sans"/>
               </a:rPr>
-              <a:t>4 demos, one synthetic cohort</a:t>
+              <a:t>5 demos, one synthetic cohort</a:t>
             </a:r>
           </a:p>
         </p:txBody>
@@ -30681,13 +30752,13 @@
           <a:p>
             <a:pPr algn="l"/>
             <a:r>
-              <a:rPr sz="3000" b="1">
+              <a:rPr sz="2700" b="1">
                 <a:solidFill>
                   <a:srgbClr val="0F1B2D"/>
                 </a:solidFill>
                 <a:latin typeface="IBM Plex Sans"/>
               </a:rPr>
-              <a:t>Generative AI keeps the objectives and adds classes</a:t>
+              <a:t>Writing data into the model: two channels an accuracy check misses</a:t>
             </a:r>
           </a:p>
         </p:txBody>
@@ -30722,22 +30793,116 @@
                 </a:solidFill>
                 <a:latin typeface="Consolas"/>
               </a:rPr>
-              <a:t>PART 4B · BEYOND PREDICTIVE AI · NIST §3</a:t>
+              <a:t>PART 4B · DEMO 6 · HIDING DATA IN A MODEL</a:t>
+            </a:r>
+          </a:p>
+        </p:txBody>
+      </p:sp>
+      <p:sp>
+        <p:nvSpPr>
+          <p:cNvPr id="4" name="TextBox 3"/>
+          <p:cNvSpPr txBox="1"/>
+          <p:nvPr/>
+        </p:nvSpPr>
+        <p:spPr>
+          <a:xfrm>
+            <a:off x="813816" y="1965960"/>
+            <a:ext cx="4023360" cy="3931920"/>
+          </a:xfrm>
+          <a:prstGeom prst="rect">
+            <a:avLst/>
+          </a:prstGeom>
+          <a:noFill/>
+        </p:spPr>
+        <p:txBody>
+          <a:bodyPr wrap="square" anchor="t" lIns="0" rIns="0" tIns="0" bIns="0">
+            <a:spAutoFit/>
+          </a:bodyPr>
+          <a:lstStyle/>
+          <a:p>
+            <a:pPr algn="l"/>
+            <a:r>
+              <a:rPr sz="1350" b="1" i="0">
+                <a:solidFill>
+                  <a:srgbClr val="3A4556"/>
+                </a:solidFill>
+                <a:latin typeface="IBM Plex Sans"/>
+              </a:rPr>
+              <a:t>1  In the weights. </a:t>
+            </a:r>
+            <a:r>
+              <a:rPr sz="1350" b="0" i="0">
+                <a:solidFill>
+                  <a:srgbClr val="3A4556"/>
+                </a:solidFill>
+                <a:latin typeface="IBM Plex Sans"/>
+              </a:rPr>
+              <a:t>Hide 111 bytes in the low 8 bits of a 10,304-weight network. The largest change to any weight is 3e-06; accuracy is unchanged and the payload reads back exactly (EvilModel, 2021).</a:t>
+            </a:r>
+          </a:p>
+          <a:p>
+            <a:pPr algn="l">
+              <a:spcBef>
+                <a:spcPts val="600"/>
+              </a:spcBef>
+            </a:pPr>
+            <a:r>
+              <a:rPr sz="1350" b="1" i="0">
+                <a:solidFill>
+                  <a:srgbClr val="3A4556"/>
+                </a:solidFill>
+                <a:latin typeface="IBM Plex Sans"/>
+              </a:rPr>
+              <a:t>2  In the behaviour. </a:t>
+            </a:r>
+            <a:r>
+              <a:rPr sz="1350" b="0" i="0">
+                <a:solidFill>
+                  <a:srgbClr val="3A4556"/>
+                </a:solidFill>
+                <a:latin typeface="IBM Plex Sans"/>
+              </a:rPr>
+              <a:t>A few trigger inputs carry a message one bit each; accuracy on real rows holds and the triggers return it exactly (Adi et al. 2018; Song et al. 2017).</a:t>
+            </a:r>
+          </a:p>
+          <a:p>
+            <a:pPr algn="l">
+              <a:spcBef>
+                <a:spcPts val="600"/>
+              </a:spcBef>
+            </a:pPr>
+            <a:r>
+              <a:rPr sz="1350" b="1" i="0">
+                <a:solidFill>
+                  <a:srgbClr val="3A4556"/>
+                </a:solidFill>
+                <a:latin typeface="IBM Plex Sans"/>
+              </a:rPr>
+              <a:t>3  Why it matters. </a:t>
+            </a:r>
+            <a:r>
+              <a:rPr sz="1350" b="0" i="0">
+                <a:solidFill>
+                  <a:srgbClr val="3A4556"/>
+                </a:solidFill>
+                <a:latin typeface="IBM Plex Sans"/>
+              </a:rPr>
+              <a:t>An accuracy-only export check passes both. The data leaves the TRE inside the model.</a:t>
             </a:r>
           </a:p>
         </p:txBody>
       </p:sp>
       <p:graphicFrame>
         <p:nvGraphicFramePr>
-          <p:cNvPr id="4" name="Table 3"/>
+          <p:cNvPr id="5" name="Table 4"/>
           <p:cNvGraphicFramePr>
             <a:graphicFrameLocks noGrp="1"/>
           </p:cNvGraphicFramePr>
           <p:nvPr/>
         </p:nvGraphicFramePr>
         <p:xfrm>
-          <a:off x="813816" y="1920240"/>
-          <a:ext cx="6583680" cy="3520440"/>
+          <a:off x="5065776" y="1965960"/>
+          <a:ext cx="6309360" cy="1371600"/>
         </p:xfrm>
         <a:graphic>
           <a:graphicData uri="http://schemas.openxmlformats.org/drawingml/2006/table">
@@ -30746,23 +30911,25 @@
                 <a:tableStyleId>{5C22544A-7EE6-4342-B048-85BDC9FD1C3A}</a:tableStyleId>
               </a:tblPr>
               <a:tblGrid>
-                <a:gridCol w="1463040"/>
-                <a:gridCol w="5120640"/>
+                <a:gridCol w="1371600"/>
+                <a:gridCol w="2377440"/>
+                <a:gridCol w="1280160"/>
+                <a:gridCol w="1280160"/>
               </a:tblGrid>
-              <a:tr h="502920">
-                <a:tc>
-                  <a:txBody>
-                    <a:bodyPr wrap="square"/>
-                    <a:lstStyle/>
-                    <a:p>
-                      <a:r>
-                        <a:rPr sz="1250" b="1">
+              <a:tr h="457200">
+                <a:tc>
+                  <a:txBody>
+                    <a:bodyPr wrap="square"/>
+                    <a:lstStyle/>
+                    <a:p>
+                      <a:r>
+                        <a:rPr sz="1150" b="1">
                           <a:solidFill>
                             <a:srgbClr val="F6F5F0"/>
                           </a:solidFill>
                           <a:latin typeface="IBM Plex Sans"/>
                         </a:rPr>
-                        <a:t>ID</a:t>
+                        <a:t>Channel</a:t>
                       </a:r>
                     </a:p>
                   </a:txBody>
@@ -30778,13 +30945,13 @@
                     <a:lstStyle/>
                     <a:p>
                       <a:r>
-                        <a:rPr sz="1250" b="1">
+                        <a:rPr sz="1150" b="1">
                           <a:solidFill>
                             <a:srgbClr val="F6F5F0"/>
                           </a:solidFill>
                           <a:latin typeface="IBM Plex Sans"/>
                         </a:rPr>
-                        <a:t>Class</a:t>
+                        <a:t>Where the message is</a:t>
                       </a:r>
                     </a:p>
                   </a:txBody>
@@ -30794,21 +30961,65 @@
                     </a:solidFill>
                   </a:tcPr>
                 </a:tc>
+                <a:tc>
+                  <a:txBody>
+                    <a:bodyPr wrap="square"/>
+                    <a:lstStyle/>
+                    <a:p>
+                      <a:r>
+                        <a:rPr sz="1150" b="1">
+                          <a:solidFill>
+                            <a:srgbClr val="F6F5F0"/>
+                          </a:solidFill>
+                          <a:latin typeface="IBM Plex Sans"/>
+                        </a:rPr>
+                        <a:t>Accuracy</a:t>
+                      </a:r>
+                    </a:p>
+                  </a:txBody>
+                  <a:tcPr marL="91440" marR="91440" marT="36576" marB="36576" anchor="ctr">
+                    <a:solidFill>
+                      <a:srgbClr val="0F1B2D"/>
+                    </a:solidFill>
+                  </a:tcPr>
+                </a:tc>
+                <a:tc>
+                  <a:txBody>
+                    <a:bodyPr wrap="square"/>
+                    <a:lstStyle/>
+                    <a:p>
+                      <a:r>
+                        <a:rPr sz="1150" b="1">
+                          <a:solidFill>
+                            <a:srgbClr val="F6F5F0"/>
+                          </a:solidFill>
+                          <a:latin typeface="IBM Plex Sans"/>
+                        </a:rPr>
+                        <a:t>Removed by</a:t>
+                      </a:r>
+                    </a:p>
+                  </a:txBody>
+                  <a:tcPr marL="91440" marR="91440" marT="36576" marB="36576" anchor="ctr">
+                    <a:solidFill>
+                      <a:srgbClr val="0F1B2D"/>
+                    </a:solidFill>
+                  </a:tcPr>
+                </a:tc>
               </a:tr>
-              <a:tr h="502920">
-                <a:tc>
-                  <a:txBody>
-                    <a:bodyPr wrap="square"/>
-                    <a:lstStyle/>
-                    <a:p>
-                      <a:r>
-                        <a:rPr sz="1250" b="1">
+              <a:tr h="457200">
+                <a:tc>
+                  <a:txBody>
+                    <a:bodyPr wrap="square"/>
+                    <a:lstStyle/>
+                    <a:p>
+                      <a:r>
+                        <a:rPr sz="1150" b="1">
                           <a:solidFill>
                             <a:srgbClr val="0F1B2D"/>
                           </a:solidFill>
                           <a:latin typeface="IBM Plex Sans"/>
                         </a:rPr>
-                        <a:t>NISTAML.04</a:t>
+                        <a:t>Weight LSB</a:t>
                       </a:r>
                     </a:p>
                   </a:txBody>
@@ -30824,13 +31035,13 @@
                     <a:lstStyle/>
                     <a:p>
                       <a:r>
-                        <a:rPr sz="1250" b="0">
+                        <a:rPr sz="1150" b="0">
                           <a:solidFill>
                             <a:srgbClr val="3A4556"/>
                           </a:solidFill>
                           <a:latin typeface="IBM Plex Sans"/>
                         </a:rPr>
-                        <a:t>Misuse enablement: get around the owner's restrictions</a:t>
+                        <a:t>low mantissa bits</a:t>
                       </a:r>
                     </a:p>
                   </a:txBody>
@@ -30840,21 +31051,65 @@
                     </a:solidFill>
                   </a:tcPr>
                 </a:tc>
+                <a:tc>
+                  <a:txBody>
+                    <a:bodyPr wrap="square"/>
+                    <a:lstStyle/>
+                    <a:p>
+                      <a:r>
+                        <a:rPr sz="1150" b="0">
+                          <a:solidFill>
+                            <a:srgbClr val="3A4556"/>
+                          </a:solidFill>
+                          <a:latin typeface="IBM Plex Sans"/>
+                        </a:rPr>
+                        <a:t>0.575 → 0.575</a:t>
+                      </a:r>
+                    </a:p>
+                  </a:txBody>
+                  <a:tcPr marL="91440" marR="91440" marT="36576" marB="36576" anchor="ctr">
+                    <a:solidFill>
+                      <a:srgbClr val="FDFCF9"/>
+                    </a:solidFill>
+                  </a:tcPr>
+                </a:tc>
+                <a:tc>
+                  <a:txBody>
+                    <a:bodyPr wrap="square"/>
+                    <a:lstStyle/>
+                    <a:p>
+                      <a:r>
+                        <a:rPr sz="1150" b="0">
+                          <a:solidFill>
+                            <a:srgbClr val="3A4556"/>
+                          </a:solidFill>
+                          <a:latin typeface="IBM Plex Sans"/>
+                        </a:rPr>
+                        <a:t>clip / quantise / noise</a:t>
+                      </a:r>
+                    </a:p>
+                  </a:txBody>
+                  <a:tcPr marL="91440" marR="91440" marT="36576" marB="36576" anchor="ctr">
+                    <a:solidFill>
+                      <a:srgbClr val="FBE9DC"/>
+                    </a:solidFill>
+                  </a:tcPr>
+                </a:tc>
               </a:tr>
-              <a:tr h="502920">
-                <a:tc>
-                  <a:txBody>
-                    <a:bodyPr wrap="square"/>
-                    <a:lstStyle/>
-                    <a:p>
-                      <a:r>
-                        <a:rPr sz="1250" b="1">
+              <a:tr h="457200">
+                <a:tc>
+                  <a:txBody>
+                    <a:bodyPr wrap="square"/>
+                    <a:lstStyle/>
+                    <a:p>
+                      <a:r>
+                        <a:rPr sz="1150" b="1">
                           <a:solidFill>
                             <a:srgbClr val="0F1B2D"/>
                           </a:solidFill>
                           <a:latin typeface="IBM Plex Sans"/>
                         </a:rPr>
-                        <a:t>.018 / .015</a:t>
+                        <a:t>Behaviour</a:t>
                       </a:r>
                     </a:p>
                   </a:txBody>
@@ -30870,13 +31125,13 @@
                     <a:lstStyle/>
                     <a:p>
                       <a:r>
-                        <a:rPr sz="1250" b="0">
+                        <a:rPr sz="1150" b="0">
                           <a:solidFill>
                             <a:srgbClr val="3A4556"/>
                           </a:solidFill>
                           <a:latin typeface="IBM Plex Sans"/>
                         </a:rPr>
-                        <a:t>Direct and indirect prompt injection</a:t>
+                        <a:t>trigger inputs</a:t>
                       </a:r>
                     </a:p>
                   </a:txBody>
@@ -30886,67 +31141,19 @@
                     </a:solidFill>
                   </a:tcPr>
                 </a:tc>
-              </a:tr>
-              <a:tr h="502920">
-                <a:tc>
-                  <a:txBody>
-                    <a:bodyPr wrap="square"/>
-                    <a:lstStyle/>
-                    <a:p>
-                      <a:r>
-                        <a:rPr sz="1250" b="1">
-                          <a:solidFill>
-                            <a:srgbClr val="0F1B2D"/>
-                          </a:solidFill>
-                          <a:latin typeface="IBM Plex Sans"/>
-                        </a:rPr>
-                        <a:t>.027</a:t>
-                      </a:r>
-                    </a:p>
-                  </a:txBody>
-                  <a:tcPr marL="91440" marR="91440" marT="36576" marB="36576" anchor="ctr">
-                    <a:solidFill>
-                      <a:srgbClr val="FDFCF9"/>
-                    </a:solidFill>
-                  </a:tcPr>
-                </a:tc>
-                <a:tc>
-                  <a:txBody>
-                    <a:bodyPr wrap="square"/>
-                    <a:lstStyle/>
-                    <a:p>
-                      <a:r>
-                        <a:rPr sz="1250" b="0">
+                <a:tc>
+                  <a:txBody>
+                    <a:bodyPr wrap="square"/>
+                    <a:lstStyle/>
+                    <a:p>
+                      <a:r>
+                        <a:rPr sz="1150" b="0">
                           <a:solidFill>
                             <a:srgbClr val="3A4556"/>
                           </a:solidFill>
                           <a:latin typeface="IBM Plex Sans"/>
                         </a:rPr>
-                        <a:t>Misaligned outputs</a:t>
-                      </a:r>
-                    </a:p>
-                  </a:txBody>
-                  <a:tcPr marL="91440" marR="91440" marT="36576" marB="36576" anchor="ctr">
-                    <a:solidFill>
-                      <a:srgbClr val="FDFCF9"/>
-                    </a:solidFill>
-                  </a:tcPr>
-                </a:tc>
-              </a:tr>
-              <a:tr h="502920">
-                <a:tc>
-                  <a:txBody>
-                    <a:bodyPr wrap="square"/>
-                    <a:lstStyle/>
-                    <a:p>
-                      <a:r>
-                        <a:rPr sz="1250" b="1">
-                          <a:solidFill>
-                            <a:srgbClr val="0F1B2D"/>
-                          </a:solidFill>
-                          <a:latin typeface="IBM Plex Sans"/>
-                        </a:rPr>
-                        <a:t>.035 / .036</a:t>
+                        <a:t>0.575 → 0.632</a:t>
                       </a:r>
                     </a:p>
                   </a:txBody>
@@ -30962,111 +31169,19 @@
                     <a:lstStyle/>
                     <a:p>
                       <a:r>
-                        <a:rPr sz="1250" b="0">
+                        <a:rPr sz="1150" b="0">
                           <a:solidFill>
                             <a:srgbClr val="3A4556"/>
                           </a:solidFill>
                           <a:latin typeface="IBM Plex Sans"/>
                         </a:rPr>
-                        <a:t>Prompt extraction; leaking information from user interactions</a:t>
-                      </a:r>
-                    </a:p>
-                  </a:txBody>
-                  <a:tcPr marL="91440" marR="91440" marT="36576" marB="36576" anchor="ctr">
-                    <a:solidFill>
-                      <a:srgbClr val="F1EFE8"/>
-                    </a:solidFill>
-                  </a:tcPr>
-                </a:tc>
-              </a:tr>
-              <a:tr h="502920">
-                <a:tc>
-                  <a:txBody>
-                    <a:bodyPr wrap="square"/>
-                    <a:lstStyle/>
-                    <a:p>
-                      <a:r>
-                        <a:rPr sz="1250" b="1">
-                          <a:solidFill>
-                            <a:srgbClr val="0F1B2D"/>
-                          </a:solidFill>
-                          <a:latin typeface="IBM Plex Sans"/>
-                        </a:rPr>
-                        <a:t>.037 / .038</a:t>
-                      </a:r>
-                    </a:p>
-                  </a:txBody>
-                  <a:tcPr marL="91440" marR="91440" marT="36576" marB="36576" anchor="ctr">
-                    <a:solidFill>
-                      <a:srgbClr val="FDFCF9"/>
-                    </a:solidFill>
-                  </a:tcPr>
-                </a:tc>
-                <a:tc>
-                  <a:txBody>
-                    <a:bodyPr wrap="square"/>
-                    <a:lstStyle/>
-                    <a:p>
-                      <a:r>
-                        <a:rPr sz="1250" b="0">
-                          <a:solidFill>
-                            <a:srgbClr val="3A4556"/>
-                          </a:solidFill>
-                          <a:latin typeface="IBM Plex Sans"/>
-                        </a:rPr>
-                        <a:t>Training data attacks; data extraction</a:t>
-                      </a:r>
-                    </a:p>
-                  </a:txBody>
-                  <a:tcPr marL="91440" marR="91440" marT="36576" marB="36576" anchor="ctr">
-                    <a:solidFill>
-                      <a:srgbClr val="FDFCF9"/>
-                    </a:solidFill>
-                  </a:tcPr>
-                </a:tc>
-              </a:tr>
-              <a:tr h="502920">
-                <a:tc>
-                  <a:txBody>
-                    <a:bodyPr wrap="square"/>
-                    <a:lstStyle/>
-                    <a:p>
-                      <a:r>
-                        <a:rPr sz="1250" b="1">
-                          <a:solidFill>
-                            <a:srgbClr val="0F1B2D"/>
-                          </a:solidFill>
-                          <a:latin typeface="IBM Plex Sans"/>
-                        </a:rPr>
-                        <a:t>.039</a:t>
-                      </a:r>
-                    </a:p>
-                  </a:txBody>
-                  <a:tcPr marL="91440" marR="91440" marT="36576" marB="36576" anchor="ctr">
-                    <a:solidFill>
-                      <a:srgbClr val="F1EFE8"/>
-                    </a:solidFill>
-                  </a:tcPr>
-                </a:tc>
-                <a:tc>
-                  <a:txBody>
-                    <a:bodyPr wrap="square"/>
-                    <a:lstStyle/>
-                    <a:p>
-                      <a:r>
-                        <a:rPr sz="1250" b="0">
-                          <a:solidFill>
-                            <a:srgbClr val="3A4556"/>
-                          </a:solidFill>
-                          <a:latin typeface="IBM Plex Sans"/>
-                        </a:rPr>
-                        <a:t>Compromising connected resources</a:t>
-                      </a:r>
-                    </a:p>
-                  </a:txBody>
-                  <a:tcPr marL="91440" marR="91440" marT="36576" marB="36576" anchor="ctr">
-                    <a:solidFill>
-                      <a:srgbClr val="F1EFE8"/>
+                        <a:t>fine-tune / DP</a:t>
+                      </a:r>
+                    </a:p>
+                  </a:txBody>
+                  <a:tcPr marL="91440" marR="91440" marT="36576" marB="36576" anchor="ctr">
+                    <a:solidFill>
+                      <a:srgbClr val="FBE9DC"/>
                     </a:solidFill>
                   </a:tcPr>
                 </a:tc>
@@ -31077,122 +31192,18 @@
       </p:graphicFrame>
       <p:sp>
         <p:nvSpPr>
-          <p:cNvPr id="5" name="Rounded Rectangle 4"/>
+          <p:cNvPr id="6" name="Rounded Rectangle 5"/>
           <p:cNvSpPr/>
           <p:nvPr/>
         </p:nvSpPr>
         <p:spPr>
           <a:xfrm>
-            <a:off x="7626096" y="1920240"/>
-            <a:ext cx="3749039" cy="2011680"/>
+            <a:off x="5065776" y="3246120"/>
+            <a:ext cx="6309360" cy="2606040"/>
           </a:xfrm>
           <a:prstGeom prst="roundRect">
             <a:avLst>
-              <a:gd name="adj" fmla="val 5454"/>
-            </a:avLst>
-          </a:prstGeom>
-          <a:solidFill>
-            <a:srgbClr val="FDFCF9"/>
-          </a:solidFill>
-          <a:ln w="12700">
-            <a:solidFill>
-              <a:srgbClr val="E2DFD6"/>
-            </a:solidFill>
-          </a:ln>
-          <a:effectLst/>
-        </p:spPr>
-        <p:txBody>
-          <a:bodyPr rtlCol="0" anchor="ctr"/>
-          <a:lstStyle/>
-          <a:p>
-            <a:pPr algn="ctr"/>
-          </a:p>
-        </p:txBody>
-      </p:sp>
-      <p:sp>
-        <p:nvSpPr>
-          <p:cNvPr id="6" name="TextBox 5"/>
-          <p:cNvSpPr txBox="1"/>
-          <p:nvPr/>
-        </p:nvSpPr>
-        <p:spPr>
-          <a:xfrm>
-            <a:off x="7827264" y="2103120"/>
-            <a:ext cx="3346703" cy="365760"/>
-          </a:xfrm>
-          <a:prstGeom prst="rect">
-            <a:avLst/>
-          </a:prstGeom>
-          <a:noFill/>
-        </p:spPr>
-        <p:txBody>
-          <a:bodyPr wrap="square" anchor="t" lIns="0" rIns="0" tIns="0" bIns="0">
-            <a:spAutoFit/>
-          </a:bodyPr>
-          <a:lstStyle/>
-          <a:p>
-            <a:pPr algn="l"/>
-            <a:r>
-              <a:rPr sz="1600" b="1" i="0">
-                <a:solidFill>
-                  <a:srgbClr val="0F1B2D"/>
-                </a:solidFill>
-                <a:latin typeface="IBM Plex Sans"/>
-              </a:rPr>
-              <a:t>Covered in Part 1</a:t>
-            </a:r>
-          </a:p>
-        </p:txBody>
-      </p:sp>
-      <p:sp>
-        <p:nvSpPr>
-          <p:cNvPr id="7" name="TextBox 6"/>
-          <p:cNvSpPr txBox="1"/>
-          <p:nvPr/>
-        </p:nvSpPr>
-        <p:spPr>
-          <a:xfrm>
-            <a:off x="7827264" y="2377440"/>
-            <a:ext cx="3346703" cy="1463040"/>
-          </a:xfrm>
-          <a:prstGeom prst="rect">
-            <a:avLst/>
-          </a:prstGeom>
-          <a:noFill/>
-        </p:spPr>
-        <p:txBody>
-          <a:bodyPr wrap="square" anchor="t" lIns="0" rIns="0" tIns="0" bIns="0">
-            <a:spAutoFit/>
-          </a:bodyPr>
-          <a:lstStyle/>
-          <a:p>
-            <a:pPr algn="l"/>
-            <a:r>
-              <a:rPr sz="1250" b="0" i="0">
-                <a:solidFill>
-                  <a:srgbClr val="3A4556"/>
-                </a:solidFill>
-                <a:latin typeface="IBM Plex Sans"/>
-              </a:rPr>
-              <a:t>Slide 12: direct and indirect prompt injection, the OWASP LLM Top 10 and NIST's design advice: assume injection and limit what the model can do.</a:t>
-            </a:r>
-          </a:p>
-        </p:txBody>
-      </p:sp>
-      <p:sp>
-        <p:nvSpPr>
-          <p:cNvPr id="8" name="Rounded Rectangle 7"/>
-          <p:cNvSpPr/>
-          <p:nvPr/>
-        </p:nvSpPr>
-        <p:spPr>
-          <a:xfrm>
-            <a:off x="7626096" y="4069080"/>
-            <a:ext cx="3749039" cy="1783080"/>
-          </a:xfrm>
-          <a:prstGeom prst="roundRect">
-            <a:avLst>
-              <a:gd name="adj" fmla="val 6153"/>
+              <a:gd name="adj" fmla="val 4210"/>
             </a:avLst>
           </a:prstGeom>
           <a:solidFill>
@@ -31213,14 +31224,14 @@
       </p:sp>
       <p:sp>
         <p:nvSpPr>
-          <p:cNvPr id="9" name="TextBox 8"/>
+          <p:cNvPr id="7" name="TextBox 6"/>
           <p:cNvSpPr txBox="1"/>
           <p:nvPr/>
         </p:nvSpPr>
         <p:spPr>
           <a:xfrm>
-            <a:off x="7827264" y="4251960"/>
-            <a:ext cx="3346703" cy="365760"/>
+            <a:off x="5266944" y="3429000"/>
+            <a:ext cx="5907024" cy="365760"/>
           </a:xfrm>
           <a:prstGeom prst="rect">
             <a:avLst/>
@@ -31241,21 +31252,21 @@
                 </a:solidFill>
                 <a:latin typeface="IBM Plex Sans"/>
               </a:rPr>
-              <a:t>Tested elsewhere</a:t>
-            </a:r>
-          </a:p>
-        </p:txBody>
-      </p:sp>
-      <p:sp>
-        <p:nvSpPr>
-          <p:cNvPr id="10" name="TextBox 9"/>
+              <a:t>The TRE's answer: transform, do not detect</a:t>
+            </a:r>
+          </a:p>
+        </p:txBody>
+      </p:sp>
+      <p:sp>
+        <p:nvSpPr>
+          <p:cNvPr id="8" name="TextBox 7"/>
           <p:cNvSpPr txBox="1"/>
           <p:nvPr/>
         </p:nvSpPr>
         <p:spPr>
           <a:xfrm>
-            <a:off x="7827264" y="4526280"/>
-            <a:ext cx="3346703" cy="1234440"/>
+            <a:off x="5266944" y="3703320"/>
+            <a:ext cx="5907024" cy="2057400"/>
           </a:xfrm>
           <a:prstGeom prst="rect">
             <a:avLst/>
@@ -31276,14 +31287,14 @@
                 </a:solidFill>
                 <a:latin typeface="IBM Plex Sans"/>
               </a:rPr>
-              <a:t>safety-trust-engine runs garak, AgentDojo and PyRIT against live models and agents, with the same gate pattern.</a:t>
-            </a:r>
-          </a:p>
-        </p:txBody>
-      </p:sp>
-      <p:sp>
-        <p:nvSpPr>
-          <p:cNvPr id="11" name="TextBox 10"/>
+              <a:t>Clipping the low bits, quantising to float16, or adding noise each keeps accuracy and wipes the weight channel; the behavioural channel needs fine-tuning or DP. A distribution test cannot tell the models apart, because the payload fills too few weights to move a statistic. So safe export should transform every released model and prefer DP training, not try to spot the hidden data after the fact.</a:t>
+            </a:r>
+          </a:p>
+        </p:txBody>
+      </p:sp>
+      <p:sp>
+        <p:nvSpPr>
+          <p:cNvPr id="9" name="TextBox 8"/>
           <p:cNvSpPr txBox="1"/>
           <p:nvPr/>
         </p:nvSpPr>
@@ -31311,7 +31322,7 @@
                 </a:solidFill>
                 <a:latin typeface="IBM Plex Sans"/>
               </a:rPr>
-              <a:t>NIST AI 100-2e2025 §3 and its taxonomy index. Technical guide §22 and §5.</a:t>
+              <a:t>uv run python demo/run_stego_demo.py · stego_report.txt · demo guide §6 · technical guide §9.4.</a:t>
             </a:r>
           </a:p>
         </p:txBody>
@@ -31523,7 +31534,7 @@
                 </a:solidFill>
                 <a:latin typeface="IBM Plex Sans"/>
               </a:rPr>
-              <a:t>What this repository does not decide</a:t>
+              <a:t>Generative AI keeps the objectives and adds classes</a:t>
             </a:r>
           </a:p>
         </p:txBody>
@@ -31558,25 +31569,373 @@
                 </a:solidFill>
                 <a:latin typeface="Consolas"/>
               </a:rPr>
-              <a:t>PART 4B · LIMITS</a:t>
-            </a:r>
-          </a:p>
-        </p:txBody>
-      </p:sp>
-      <p:sp>
-        <p:nvSpPr>
-          <p:cNvPr id="4" name="Rounded Rectangle 3"/>
+              <a:t>PART 4B · BEYOND PREDICTIVE AI · NIST §3</a:t>
+            </a:r>
+          </a:p>
+        </p:txBody>
+      </p:sp>
+      <p:graphicFrame>
+        <p:nvGraphicFramePr>
+          <p:cNvPr id="4" name="Table 3"/>
+          <p:cNvGraphicFramePr>
+            <a:graphicFrameLocks noGrp="1"/>
+          </p:cNvGraphicFramePr>
+          <p:nvPr/>
+        </p:nvGraphicFramePr>
+        <p:xfrm>
+          <a:off x="813816" y="1920240"/>
+          <a:ext cx="6583680" cy="3520440"/>
+        </p:xfrm>
+        <a:graphic>
+          <a:graphicData uri="http://schemas.openxmlformats.org/drawingml/2006/table">
+            <a:tbl>
+              <a:tblPr firstRow="1" bandRow="1">
+                <a:tableStyleId>{5C22544A-7EE6-4342-B048-85BDC9FD1C3A}</a:tableStyleId>
+              </a:tblPr>
+              <a:tblGrid>
+                <a:gridCol w="1463040"/>
+                <a:gridCol w="5120640"/>
+              </a:tblGrid>
+              <a:tr h="502920">
+                <a:tc>
+                  <a:txBody>
+                    <a:bodyPr wrap="square"/>
+                    <a:lstStyle/>
+                    <a:p>
+                      <a:r>
+                        <a:rPr sz="1250" b="1">
+                          <a:solidFill>
+                            <a:srgbClr val="F6F5F0"/>
+                          </a:solidFill>
+                          <a:latin typeface="IBM Plex Sans"/>
+                        </a:rPr>
+                        <a:t>ID</a:t>
+                      </a:r>
+                    </a:p>
+                  </a:txBody>
+                  <a:tcPr marL="91440" marR="91440" marT="36576" marB="36576" anchor="ctr">
+                    <a:solidFill>
+                      <a:srgbClr val="0F1B2D"/>
+                    </a:solidFill>
+                  </a:tcPr>
+                </a:tc>
+                <a:tc>
+                  <a:txBody>
+                    <a:bodyPr wrap="square"/>
+                    <a:lstStyle/>
+                    <a:p>
+                      <a:r>
+                        <a:rPr sz="1250" b="1">
+                          <a:solidFill>
+                            <a:srgbClr val="F6F5F0"/>
+                          </a:solidFill>
+                          <a:latin typeface="IBM Plex Sans"/>
+                        </a:rPr>
+                        <a:t>Class</a:t>
+                      </a:r>
+                    </a:p>
+                  </a:txBody>
+                  <a:tcPr marL="91440" marR="91440" marT="36576" marB="36576" anchor="ctr">
+                    <a:solidFill>
+                      <a:srgbClr val="0F1B2D"/>
+                    </a:solidFill>
+                  </a:tcPr>
+                </a:tc>
+              </a:tr>
+              <a:tr h="502920">
+                <a:tc>
+                  <a:txBody>
+                    <a:bodyPr wrap="square"/>
+                    <a:lstStyle/>
+                    <a:p>
+                      <a:r>
+                        <a:rPr sz="1250" b="1">
+                          <a:solidFill>
+                            <a:srgbClr val="0F1B2D"/>
+                          </a:solidFill>
+                          <a:latin typeface="IBM Plex Sans"/>
+                        </a:rPr>
+                        <a:t>NISTAML.04</a:t>
+                      </a:r>
+                    </a:p>
+                  </a:txBody>
+                  <a:tcPr marL="91440" marR="91440" marT="36576" marB="36576" anchor="ctr">
+                    <a:solidFill>
+                      <a:srgbClr val="FDFCF9"/>
+                    </a:solidFill>
+                  </a:tcPr>
+                </a:tc>
+                <a:tc>
+                  <a:txBody>
+                    <a:bodyPr wrap="square"/>
+                    <a:lstStyle/>
+                    <a:p>
+                      <a:r>
+                        <a:rPr sz="1250" b="0">
+                          <a:solidFill>
+                            <a:srgbClr val="3A4556"/>
+                          </a:solidFill>
+                          <a:latin typeface="IBM Plex Sans"/>
+                        </a:rPr>
+                        <a:t>Misuse enablement: get around the owner's restrictions</a:t>
+                      </a:r>
+                    </a:p>
+                  </a:txBody>
+                  <a:tcPr marL="91440" marR="91440" marT="36576" marB="36576" anchor="ctr">
+                    <a:solidFill>
+                      <a:srgbClr val="FDFCF9"/>
+                    </a:solidFill>
+                  </a:tcPr>
+                </a:tc>
+              </a:tr>
+              <a:tr h="502920">
+                <a:tc>
+                  <a:txBody>
+                    <a:bodyPr wrap="square"/>
+                    <a:lstStyle/>
+                    <a:p>
+                      <a:r>
+                        <a:rPr sz="1250" b="1">
+                          <a:solidFill>
+                            <a:srgbClr val="0F1B2D"/>
+                          </a:solidFill>
+                          <a:latin typeface="IBM Plex Sans"/>
+                        </a:rPr>
+                        <a:t>.018 / .015</a:t>
+                      </a:r>
+                    </a:p>
+                  </a:txBody>
+                  <a:tcPr marL="91440" marR="91440" marT="36576" marB="36576" anchor="ctr">
+                    <a:solidFill>
+                      <a:srgbClr val="F1EFE8"/>
+                    </a:solidFill>
+                  </a:tcPr>
+                </a:tc>
+                <a:tc>
+                  <a:txBody>
+                    <a:bodyPr wrap="square"/>
+                    <a:lstStyle/>
+                    <a:p>
+                      <a:r>
+                        <a:rPr sz="1250" b="0">
+                          <a:solidFill>
+                            <a:srgbClr val="3A4556"/>
+                          </a:solidFill>
+                          <a:latin typeface="IBM Plex Sans"/>
+                        </a:rPr>
+                        <a:t>Direct and indirect prompt injection</a:t>
+                      </a:r>
+                    </a:p>
+                  </a:txBody>
+                  <a:tcPr marL="91440" marR="91440" marT="36576" marB="36576" anchor="ctr">
+                    <a:solidFill>
+                      <a:srgbClr val="F1EFE8"/>
+                    </a:solidFill>
+                  </a:tcPr>
+                </a:tc>
+              </a:tr>
+              <a:tr h="502920">
+                <a:tc>
+                  <a:txBody>
+                    <a:bodyPr wrap="square"/>
+                    <a:lstStyle/>
+                    <a:p>
+                      <a:r>
+                        <a:rPr sz="1250" b="1">
+                          <a:solidFill>
+                            <a:srgbClr val="0F1B2D"/>
+                          </a:solidFill>
+                          <a:latin typeface="IBM Plex Sans"/>
+                        </a:rPr>
+                        <a:t>.027</a:t>
+                      </a:r>
+                    </a:p>
+                  </a:txBody>
+                  <a:tcPr marL="91440" marR="91440" marT="36576" marB="36576" anchor="ctr">
+                    <a:solidFill>
+                      <a:srgbClr val="FDFCF9"/>
+                    </a:solidFill>
+                  </a:tcPr>
+                </a:tc>
+                <a:tc>
+                  <a:txBody>
+                    <a:bodyPr wrap="square"/>
+                    <a:lstStyle/>
+                    <a:p>
+                      <a:r>
+                        <a:rPr sz="1250" b="0">
+                          <a:solidFill>
+                            <a:srgbClr val="3A4556"/>
+                          </a:solidFill>
+                          <a:latin typeface="IBM Plex Sans"/>
+                        </a:rPr>
+                        <a:t>Misaligned outputs</a:t>
+                      </a:r>
+                    </a:p>
+                  </a:txBody>
+                  <a:tcPr marL="91440" marR="91440" marT="36576" marB="36576" anchor="ctr">
+                    <a:solidFill>
+                      <a:srgbClr val="FDFCF9"/>
+                    </a:solidFill>
+                  </a:tcPr>
+                </a:tc>
+              </a:tr>
+              <a:tr h="502920">
+                <a:tc>
+                  <a:txBody>
+                    <a:bodyPr wrap="square"/>
+                    <a:lstStyle/>
+                    <a:p>
+                      <a:r>
+                        <a:rPr sz="1250" b="1">
+                          <a:solidFill>
+                            <a:srgbClr val="0F1B2D"/>
+                          </a:solidFill>
+                          <a:latin typeface="IBM Plex Sans"/>
+                        </a:rPr>
+                        <a:t>.035 / .036</a:t>
+                      </a:r>
+                    </a:p>
+                  </a:txBody>
+                  <a:tcPr marL="91440" marR="91440" marT="36576" marB="36576" anchor="ctr">
+                    <a:solidFill>
+                      <a:srgbClr val="F1EFE8"/>
+                    </a:solidFill>
+                  </a:tcPr>
+                </a:tc>
+                <a:tc>
+                  <a:txBody>
+                    <a:bodyPr wrap="square"/>
+                    <a:lstStyle/>
+                    <a:p>
+                      <a:r>
+                        <a:rPr sz="1250" b="0">
+                          <a:solidFill>
+                            <a:srgbClr val="3A4556"/>
+                          </a:solidFill>
+                          <a:latin typeface="IBM Plex Sans"/>
+                        </a:rPr>
+                        <a:t>Prompt extraction; leaking information from user interactions</a:t>
+                      </a:r>
+                    </a:p>
+                  </a:txBody>
+                  <a:tcPr marL="91440" marR="91440" marT="36576" marB="36576" anchor="ctr">
+                    <a:solidFill>
+                      <a:srgbClr val="F1EFE8"/>
+                    </a:solidFill>
+                  </a:tcPr>
+                </a:tc>
+              </a:tr>
+              <a:tr h="502920">
+                <a:tc>
+                  <a:txBody>
+                    <a:bodyPr wrap="square"/>
+                    <a:lstStyle/>
+                    <a:p>
+                      <a:r>
+                        <a:rPr sz="1250" b="1">
+                          <a:solidFill>
+                            <a:srgbClr val="0F1B2D"/>
+                          </a:solidFill>
+                          <a:latin typeface="IBM Plex Sans"/>
+                        </a:rPr>
+                        <a:t>.037 / .038</a:t>
+                      </a:r>
+                    </a:p>
+                  </a:txBody>
+                  <a:tcPr marL="91440" marR="91440" marT="36576" marB="36576" anchor="ctr">
+                    <a:solidFill>
+                      <a:srgbClr val="FDFCF9"/>
+                    </a:solidFill>
+                  </a:tcPr>
+                </a:tc>
+                <a:tc>
+                  <a:txBody>
+                    <a:bodyPr wrap="square"/>
+                    <a:lstStyle/>
+                    <a:p>
+                      <a:r>
+                        <a:rPr sz="1250" b="0">
+                          <a:solidFill>
+                            <a:srgbClr val="3A4556"/>
+                          </a:solidFill>
+                          <a:latin typeface="IBM Plex Sans"/>
+                        </a:rPr>
+                        <a:t>Training data attacks; data extraction</a:t>
+                      </a:r>
+                    </a:p>
+                  </a:txBody>
+                  <a:tcPr marL="91440" marR="91440" marT="36576" marB="36576" anchor="ctr">
+                    <a:solidFill>
+                      <a:srgbClr val="FDFCF9"/>
+                    </a:solidFill>
+                  </a:tcPr>
+                </a:tc>
+              </a:tr>
+              <a:tr h="502920">
+                <a:tc>
+                  <a:txBody>
+                    <a:bodyPr wrap="square"/>
+                    <a:lstStyle/>
+                    <a:p>
+                      <a:r>
+                        <a:rPr sz="1250" b="1">
+                          <a:solidFill>
+                            <a:srgbClr val="0F1B2D"/>
+                          </a:solidFill>
+                          <a:latin typeface="IBM Plex Sans"/>
+                        </a:rPr>
+                        <a:t>.039</a:t>
+                      </a:r>
+                    </a:p>
+                  </a:txBody>
+                  <a:tcPr marL="91440" marR="91440" marT="36576" marB="36576" anchor="ctr">
+                    <a:solidFill>
+                      <a:srgbClr val="F1EFE8"/>
+                    </a:solidFill>
+                  </a:tcPr>
+                </a:tc>
+                <a:tc>
+                  <a:txBody>
+                    <a:bodyPr wrap="square"/>
+                    <a:lstStyle/>
+                    <a:p>
+                      <a:r>
+                        <a:rPr sz="1250" b="0">
+                          <a:solidFill>
+                            <a:srgbClr val="3A4556"/>
+                          </a:solidFill>
+                          <a:latin typeface="IBM Plex Sans"/>
+                        </a:rPr>
+                        <a:t>Compromising connected resources</a:t>
+                      </a:r>
+                    </a:p>
+                  </a:txBody>
+                  <a:tcPr marL="91440" marR="91440" marT="36576" marB="36576" anchor="ctr">
+                    <a:solidFill>
+                      <a:srgbClr val="F1EFE8"/>
+                    </a:solidFill>
+                  </a:tcPr>
+                </a:tc>
+              </a:tr>
+            </a:tbl>
+          </a:graphicData>
+        </a:graphic>
+      </p:graphicFrame>
+      <p:sp>
+        <p:nvSpPr>
+          <p:cNvPr id="5" name="Rounded Rectangle 4"/>
           <p:cNvSpPr/>
           <p:nvPr/>
         </p:nvSpPr>
         <p:spPr>
           <a:xfrm>
-            <a:off x="813816" y="2011680"/>
-            <a:ext cx="3337560" cy="1783080"/>
+            <a:off x="7626096" y="1920240"/>
+            <a:ext cx="3749039" cy="2011680"/>
           </a:xfrm>
           <a:prstGeom prst="roundRect">
             <a:avLst>
-              <a:gd name="adj" fmla="val 6153"/>
+              <a:gd name="adj" fmla="val 5454"/>
             </a:avLst>
           </a:prstGeom>
           <a:solidFill>
@@ -31599,14 +31958,14 @@
       </p:sp>
       <p:sp>
         <p:nvSpPr>
-          <p:cNvPr id="5" name="TextBox 4"/>
+          <p:cNvPr id="6" name="TextBox 5"/>
           <p:cNvSpPr txBox="1"/>
           <p:nvPr/>
         </p:nvSpPr>
         <p:spPr>
           <a:xfrm>
-            <a:off x="1014984" y="2194560"/>
-            <a:ext cx="2935224" cy="365760"/>
+            <a:off x="7827264" y="2103120"/>
+            <a:ext cx="3346703" cy="365760"/>
           </a:xfrm>
           <a:prstGeom prst="rect">
             <a:avLst/>
@@ -31627,21 +31986,21 @@
                 </a:solidFill>
                 <a:latin typeface="IBM Plex Sans"/>
               </a:rPr>
-              <a:t>A real risk appetite</a:t>
-            </a:r>
-          </a:p>
-        </p:txBody>
-      </p:sp>
-      <p:sp>
-        <p:nvSpPr>
-          <p:cNvPr id="6" name="TextBox 5"/>
+              <a:t>Covered in Part 1</a:t>
+            </a:r>
+          </a:p>
+        </p:txBody>
+      </p:sp>
+      <p:sp>
+        <p:nvSpPr>
+          <p:cNvPr id="7" name="TextBox 6"/>
           <p:cNvSpPr txBox="1"/>
           <p:nvPr/>
         </p:nvSpPr>
         <p:spPr>
           <a:xfrm>
-            <a:off x="1014984" y="2468880"/>
-            <a:ext cx="2935224" cy="1234440"/>
+            <a:off x="7827264" y="2377440"/>
+            <a:ext cx="3346703" cy="1463040"/>
           </a:xfrm>
           <a:prstGeom prst="rect">
             <a:avLst/>
@@ -31656,27 +32015,27 @@
           <a:p>
             <a:pPr algn="l"/>
             <a:r>
-              <a:rPr sz="1300" b="0" i="0">
+              <a:rPr sz="1250" b="0" i="0">
                 <a:solidFill>
                   <a:srgbClr val="3A4556"/>
                 </a:solidFill>
                 <a:latin typeface="IBM Plex Sans"/>
               </a:rPr>
-              <a:t>The demo 1 cut-offs are local. ELA 8: thresholds are agreed with the data controller.</a:t>
-            </a:r>
-          </a:p>
-        </p:txBody>
-      </p:sp>
-      <p:sp>
-        <p:nvSpPr>
-          <p:cNvPr id="7" name="Rounded Rectangle 6"/>
+              <a:t>Slide 12: direct and indirect prompt injection, the OWASP LLM Top 10 and NIST's design advice: assume injection and limit what the model can do.</a:t>
+            </a:r>
+          </a:p>
+        </p:txBody>
+      </p:sp>
+      <p:sp>
+        <p:nvSpPr>
+          <p:cNvPr id="8" name="Rounded Rectangle 7"/>
           <p:cNvSpPr/>
           <p:nvPr/>
         </p:nvSpPr>
         <p:spPr>
           <a:xfrm>
-            <a:off x="4425696" y="2011680"/>
-            <a:ext cx="3337560" cy="1783080"/>
+            <a:off x="7626096" y="4069080"/>
+            <a:ext cx="3749039" cy="1783080"/>
           </a:xfrm>
           <a:prstGeom prst="roundRect">
             <a:avLst>
@@ -31684,12 +32043,10 @@
             </a:avLst>
           </a:prstGeom>
           <a:solidFill>
-            <a:srgbClr val="FDFCF9"/>
+            <a:srgbClr val="0F1B2D"/>
           </a:solidFill>
-          <a:ln w="12700">
-            <a:solidFill>
-              <a:srgbClr val="E2DFD6"/>
-            </a:solidFill>
+          <a:ln>
+            <a:noFill/>
           </a:ln>
           <a:effectLst/>
         </p:spPr>
@@ -31703,14 +32060,14 @@
       </p:sp>
       <p:sp>
         <p:nvSpPr>
-          <p:cNvPr id="8" name="TextBox 7"/>
+          <p:cNvPr id="9" name="TextBox 8"/>
           <p:cNvSpPr txBox="1"/>
           <p:nvPr/>
         </p:nvSpPr>
         <p:spPr>
           <a:xfrm>
-            <a:off x="4626864" y="2194560"/>
-            <a:ext cx="2935224" cy="365760"/>
+            <a:off x="7827264" y="4251960"/>
+            <a:ext cx="3346703" cy="365760"/>
           </a:xfrm>
           <a:prstGeom prst="rect">
             <a:avLst/>
@@ -31727,25 +32084,25 @@
             <a:r>
               <a:rPr sz="1600" b="1" i="0">
                 <a:solidFill>
-                  <a:srgbClr val="0F1B2D"/>
-                </a:solidFill>
-                <a:latin typeface="IBM Plex Sans"/>
-              </a:rPr>
-              <a:t>Legal advice</a:t>
-            </a:r>
-          </a:p>
-        </p:txBody>
-      </p:sp>
-      <p:sp>
-        <p:nvSpPr>
-          <p:cNvPr id="9" name="TextBox 8"/>
+                  <a:srgbClr val="F2A35E"/>
+                </a:solidFill>
+                <a:latin typeface="IBM Plex Sans"/>
+              </a:rPr>
+              <a:t>Tested elsewhere</a:t>
+            </a:r>
+          </a:p>
+        </p:txBody>
+      </p:sp>
+      <p:sp>
+        <p:nvSpPr>
+          <p:cNvPr id="10" name="TextBox 9"/>
           <p:cNvSpPr txBox="1"/>
           <p:nvPr/>
         </p:nvSpPr>
         <p:spPr>
           <a:xfrm>
-            <a:off x="4626864" y="2468880"/>
-            <a:ext cx="2935224" cy="1234440"/>
+            <a:off x="7827264" y="4526280"/>
+            <a:ext cx="3346703" cy="1234440"/>
           </a:xfrm>
           <a:prstGeom prst="rect">
             <a:avLst/>
@@ -31760,48 +32117,14 @@
           <a:p>
             <a:pPr algn="l"/>
             <a:r>
-              <a:rPr sz="1300" b="0" i="0">
-                <a:solidFill>
-                  <a:srgbClr val="3A4556"/>
-                </a:solidFill>
-                <a:latin typeface="IBM Plex Sans"/>
-              </a:rPr>
-              <a:t>The EU AI Act, GDPR and UK code are summarised, not interpreted. Clause text needs a legal review.</a:t>
-            </a:r>
-          </a:p>
-        </p:txBody>
-      </p:sp>
-      <p:sp>
-        <p:nvSpPr>
-          <p:cNvPr id="10" name="Rounded Rectangle 9"/>
-          <p:cNvSpPr/>
-          <p:nvPr/>
-        </p:nvSpPr>
-        <p:spPr>
-          <a:xfrm>
-            <a:off x="8037576" y="2011680"/>
-            <a:ext cx="3337560" cy="1783080"/>
-          </a:xfrm>
-          <a:prstGeom prst="roundRect">
-            <a:avLst>
-              <a:gd name="adj" fmla="val 6153"/>
-            </a:avLst>
-          </a:prstGeom>
-          <a:solidFill>
-            <a:srgbClr val="FDFCF9"/>
-          </a:solidFill>
-          <a:ln w="12700">
-            <a:solidFill>
-              <a:srgbClr val="E2DFD6"/>
-            </a:solidFill>
-          </a:ln>
-          <a:effectLst/>
-        </p:spPr>
-        <p:txBody>
-          <a:bodyPr rtlCol="0" anchor="ctr"/>
-          <a:lstStyle/>
-          <a:p>
-            <a:pPr algn="ctr"/>
+              <a:rPr sz="1250" b="0" i="0">
+                <a:solidFill>
+                  <a:srgbClr val="D9DEE6"/>
+                </a:solidFill>
+                <a:latin typeface="IBM Plex Sans"/>
+              </a:rPr>
+              <a:t>safety-trust-engine runs garak, AgentDojo and PyRIT against live models and agents, with the same gate pattern.</a:t>
+            </a:r>
           </a:p>
         </p:txBody>
       </p:sp>
@@ -31813,8 +32136,8 @@
         </p:nvSpPr>
         <p:spPr>
           <a:xfrm>
-            <a:off x="8238744" y="2194560"/>
-            <a:ext cx="2935224" cy="365760"/>
+            <a:off x="813816" y="6236208"/>
+            <a:ext cx="10561320" cy="274320"/>
           </a:xfrm>
           <a:prstGeom prst="rect">
             <a:avLst/>
@@ -31829,395 +32152,13 @@
           <a:p>
             <a:pPr algn="l"/>
             <a:r>
-              <a:rPr sz="1600" b="1" i="0">
-                <a:solidFill>
-                  <a:srgbClr val="0F1B2D"/>
-                </a:solidFill>
-                <a:latin typeface="IBM Plex Sans"/>
-              </a:rPr>
-              <a:t>Strong attacks</a:t>
-            </a:r>
-          </a:p>
-        </p:txBody>
-      </p:sp>
-      <p:sp>
-        <p:nvSpPr>
-          <p:cNvPr id="12" name="TextBox 11"/>
-          <p:cNvSpPr txBox="1"/>
-          <p:nvPr/>
-        </p:nvSpPr>
-        <p:spPr>
-          <a:xfrm>
-            <a:off x="8238744" y="2468880"/>
-            <a:ext cx="2935224" cy="1234440"/>
-          </a:xfrm>
-          <a:prstGeom prst="rect">
-            <a:avLst/>
-          </a:prstGeom>
-          <a:noFill/>
-        </p:spPr>
-        <p:txBody>
-          <a:bodyPr wrap="square" anchor="t" lIns="0" rIns="0" tIns="0" bIns="0">
-            <a:spAutoFit/>
-          </a:bodyPr>
-          <a:lstStyle/>
-          <a:p>
-            <a:pPr algn="l"/>
-            <a:r>
-              <a:rPr sz="1300" b="0" i="0">
-                <a:solidFill>
-                  <a:srgbClr val="3A4556"/>
-                </a:solidFill>
-                <a:latin typeface="IBM Plex Sans"/>
-              </a:rPr>
-              <a:t>No LiRA (in sacroml, not run). Demo 3 uses simple greedy and query attacks, not optimised ones.</a:t>
-            </a:r>
-          </a:p>
-        </p:txBody>
-      </p:sp>
-      <p:sp>
-        <p:nvSpPr>
-          <p:cNvPr id="13" name="Rounded Rectangle 12"/>
-          <p:cNvSpPr/>
-          <p:nvPr/>
-        </p:nvSpPr>
-        <p:spPr>
-          <a:xfrm>
-            <a:off x="813816" y="3977639"/>
-            <a:ext cx="3337560" cy="1783080"/>
-          </a:xfrm>
-          <a:prstGeom prst="roundRect">
-            <a:avLst>
-              <a:gd name="adj" fmla="val 6153"/>
-            </a:avLst>
-          </a:prstGeom>
-          <a:solidFill>
-            <a:srgbClr val="FDFCF9"/>
-          </a:solidFill>
-          <a:ln w="12700">
-            <a:solidFill>
-              <a:srgbClr val="E2DFD6"/>
-            </a:solidFill>
-          </a:ln>
-          <a:effectLst/>
-        </p:spPr>
-        <p:txBody>
-          <a:bodyPr rtlCol="0" anchor="ctr"/>
-          <a:lstStyle/>
-          <a:p>
-            <a:pPr algn="ctr"/>
-          </a:p>
-        </p:txBody>
-      </p:sp>
-      <p:sp>
-        <p:nvSpPr>
-          <p:cNvPr id="14" name="TextBox 13"/>
-          <p:cNvSpPr txBox="1"/>
-          <p:nvPr/>
-        </p:nvSpPr>
-        <p:spPr>
-          <a:xfrm>
-            <a:off x="1014984" y="4160520"/>
-            <a:ext cx="2935224" cy="365760"/>
-          </a:xfrm>
-          <a:prstGeom prst="rect">
-            <a:avLst/>
-          </a:prstGeom>
-          <a:noFill/>
-        </p:spPr>
-        <p:txBody>
-          <a:bodyPr wrap="square" anchor="t" lIns="0" rIns="0" tIns="0" bIns="0">
-            <a:spAutoFit/>
-          </a:bodyPr>
-          <a:lstStyle/>
-          <a:p>
-            <a:pPr algn="l"/>
-            <a:r>
-              <a:rPr sz="1600" b="1" i="0">
-                <a:solidFill>
-                  <a:srgbClr val="0F1B2D"/>
-                </a:solidFill>
-                <a:latin typeface="IBM Plex Sans"/>
-              </a:rPr>
-              <a:t>Private training</a:t>
-            </a:r>
-          </a:p>
-        </p:txBody>
-      </p:sp>
-      <p:sp>
-        <p:nvSpPr>
-          <p:cNvPr id="15" name="TextBox 14"/>
-          <p:cNvSpPr txBox="1"/>
-          <p:nvPr/>
-        </p:nvSpPr>
-        <p:spPr>
-          <a:xfrm>
-            <a:off x="1014984" y="4434840"/>
-            <a:ext cx="2935224" cy="1234440"/>
-          </a:xfrm>
-          <a:prstGeom prst="rect">
-            <a:avLst/>
-          </a:prstGeom>
-          <a:noFill/>
-        </p:spPr>
-        <p:txBody>
-          <a:bodyPr wrap="square" anchor="t" lIns="0" rIns="0" tIns="0" bIns="0">
-            <a:spAutoFit/>
-          </a:bodyPr>
-          <a:lstStyle/>
-          <a:p>
-            <a:pPr algn="l"/>
-            <a:r>
-              <a:rPr sz="1300" b="0" i="0">
-                <a:solidFill>
-                  <a:srgbClr val="3A4556"/>
-                </a:solidFill>
-                <a:latin typeface="IBM Plex Sans"/>
-              </a:rPr>
-              <a:t>No differentially private model. DP is sketched on a released mean only.</a:t>
-            </a:r>
-          </a:p>
-        </p:txBody>
-      </p:sp>
-      <p:sp>
-        <p:nvSpPr>
-          <p:cNvPr id="16" name="Rounded Rectangle 15"/>
-          <p:cNvSpPr/>
-          <p:nvPr/>
-        </p:nvSpPr>
-        <p:spPr>
-          <a:xfrm>
-            <a:off x="4425696" y="3977639"/>
-            <a:ext cx="3337560" cy="1783080"/>
-          </a:xfrm>
-          <a:prstGeom prst="roundRect">
-            <a:avLst>
-              <a:gd name="adj" fmla="val 6153"/>
-            </a:avLst>
-          </a:prstGeom>
-          <a:solidFill>
-            <a:srgbClr val="FDFCF9"/>
-          </a:solidFill>
-          <a:ln w="12700">
-            <a:solidFill>
-              <a:srgbClr val="E2DFD6"/>
-            </a:solidFill>
-          </a:ln>
-          <a:effectLst/>
-        </p:spPr>
-        <p:txBody>
-          <a:bodyPr rtlCol="0" anchor="ctr"/>
-          <a:lstStyle/>
-          <a:p>
-            <a:pPr algn="ctr"/>
-          </a:p>
-        </p:txBody>
-      </p:sp>
-      <p:sp>
-        <p:nvSpPr>
-          <p:cNvPr id="17" name="TextBox 16"/>
-          <p:cNvSpPr txBox="1"/>
-          <p:nvPr/>
-        </p:nvSpPr>
-        <p:spPr>
-          <a:xfrm>
-            <a:off x="4626864" y="4160520"/>
-            <a:ext cx="2935224" cy="365760"/>
-          </a:xfrm>
-          <a:prstGeom prst="rect">
-            <a:avLst/>
-          </a:prstGeom>
-          <a:noFill/>
-        </p:spPr>
-        <p:txBody>
-          <a:bodyPr wrap="square" anchor="t" lIns="0" rIns="0" tIns="0" bIns="0">
-            <a:spAutoFit/>
-          </a:bodyPr>
-          <a:lstStyle/>
-          <a:p>
-            <a:pPr algn="l"/>
-            <a:r>
-              <a:rPr sz="1600" b="1" i="0">
-                <a:solidFill>
-                  <a:srgbClr val="0F1B2D"/>
-                </a:solidFill>
-                <a:latin typeface="IBM Plex Sans"/>
-              </a:rPr>
-              <a:t>Generative AI</a:t>
-            </a:r>
-          </a:p>
-        </p:txBody>
-      </p:sp>
-      <p:sp>
-        <p:nvSpPr>
-          <p:cNvPr id="18" name="TextBox 17"/>
-          <p:cNvSpPr txBox="1"/>
-          <p:nvPr/>
-        </p:nvSpPr>
-        <p:spPr>
-          <a:xfrm>
-            <a:off x="4626864" y="4434840"/>
-            <a:ext cx="2935224" cy="1234440"/>
-          </a:xfrm>
-          <a:prstGeom prst="rect">
-            <a:avLst/>
-          </a:prstGeom>
-          <a:noFill/>
-        </p:spPr>
-        <p:txBody>
-          <a:bodyPr wrap="square" anchor="t" lIns="0" rIns="0" tIns="0" bIns="0">
-            <a:spAutoFit/>
-          </a:bodyPr>
-          <a:lstStyle/>
-          <a:p>
-            <a:pPr algn="l"/>
-            <a:r>
-              <a:rPr sz="1300" b="0" i="0">
-                <a:solidFill>
-                  <a:srgbClr val="3A4556"/>
-                </a:solidFill>
-                <a:latin typeface="IBM Plex Sans"/>
-              </a:rPr>
-              <a:t>No LLM demo here. safety-trust-engine tests prompt injection and agents with garak, AgentDojo, PyRIT.</a:t>
-            </a:r>
-          </a:p>
-        </p:txBody>
-      </p:sp>
-      <p:sp>
-        <p:nvSpPr>
-          <p:cNvPr id="19" name="Rounded Rectangle 18"/>
-          <p:cNvSpPr/>
-          <p:nvPr/>
-        </p:nvSpPr>
-        <p:spPr>
-          <a:xfrm>
-            <a:off x="8037576" y="3977639"/>
-            <a:ext cx="3337560" cy="1783080"/>
-          </a:xfrm>
-          <a:prstGeom prst="roundRect">
-            <a:avLst>
-              <a:gd name="adj" fmla="val 6153"/>
-            </a:avLst>
-          </a:prstGeom>
-          <a:solidFill>
-            <a:srgbClr val="FDFCF9"/>
-          </a:solidFill>
-          <a:ln w="12700">
-            <a:solidFill>
-              <a:srgbClr val="E2DFD6"/>
-            </a:solidFill>
-          </a:ln>
-          <a:effectLst/>
-        </p:spPr>
-        <p:txBody>
-          <a:bodyPr rtlCol="0" anchor="ctr"/>
-          <a:lstStyle/>
-          <a:p>
-            <a:pPr algn="ctr"/>
-          </a:p>
-        </p:txBody>
-      </p:sp>
-      <p:sp>
-        <p:nvSpPr>
-          <p:cNvPr id="20" name="TextBox 19"/>
-          <p:cNvSpPr txBox="1"/>
-          <p:nvPr/>
-        </p:nvSpPr>
-        <p:spPr>
-          <a:xfrm>
-            <a:off x="8238744" y="4160520"/>
-            <a:ext cx="2935224" cy="365760"/>
-          </a:xfrm>
-          <a:prstGeom prst="rect">
-            <a:avLst/>
-          </a:prstGeom>
-          <a:noFill/>
-        </p:spPr>
-        <p:txBody>
-          <a:bodyPr wrap="square" anchor="t" lIns="0" rIns="0" tIns="0" bIns="0">
-            <a:spAutoFit/>
-          </a:bodyPr>
-          <a:lstStyle/>
-          <a:p>
-            <a:pPr algn="l"/>
-            <a:r>
-              <a:rPr sz="1600" b="1" i="0">
-                <a:solidFill>
-                  <a:srgbClr val="0F1B2D"/>
-                </a:solidFill>
-                <a:latin typeface="IBM Plex Sans"/>
-              </a:rPr>
-              <a:t>Real data, approval</a:t>
-            </a:r>
-          </a:p>
-        </p:txBody>
-      </p:sp>
-      <p:sp>
-        <p:nvSpPr>
-          <p:cNvPr id="21" name="TextBox 20"/>
-          <p:cNvSpPr txBox="1"/>
-          <p:nvPr/>
-        </p:nvSpPr>
-        <p:spPr>
-          <a:xfrm>
-            <a:off x="8238744" y="4434840"/>
-            <a:ext cx="2935224" cy="1234440"/>
-          </a:xfrm>
-          <a:prstGeom prst="rect">
-            <a:avLst/>
-          </a:prstGeom>
-          <a:noFill/>
-        </p:spPr>
-        <p:txBody>
-          <a:bodyPr wrap="square" anchor="t" lIns="0" rIns="0" tIns="0" bIns="0">
-            <a:spAutoFit/>
-          </a:bodyPr>
-          <a:lstStyle/>
-          <a:p>
-            <a:pPr algn="l"/>
-            <a:r>
-              <a:rPr sz="1300" b="0" i="0">
-                <a:solidFill>
-                  <a:srgbClr val="3A4556"/>
-                </a:solidFill>
-                <a:latin typeface="IBM Plex Sans"/>
-              </a:rPr>
-              <a:t>One synthetic cohort; no demo approves a model. sacroml says 'proceed to next step'.</a:t>
-            </a:r>
-          </a:p>
-        </p:txBody>
-      </p:sp>
-      <p:sp>
-        <p:nvSpPr>
-          <p:cNvPr id="22" name="TextBox 21"/>
-          <p:cNvSpPr txBox="1"/>
-          <p:nvPr/>
-        </p:nvSpPr>
-        <p:spPr>
-          <a:xfrm>
-            <a:off x="813816" y="6236208"/>
-            <a:ext cx="10561320" cy="274320"/>
-          </a:xfrm>
-          <a:prstGeom prst="rect">
-            <a:avLst/>
-          </a:prstGeom>
-          <a:noFill/>
-        </p:spPr>
-        <p:txBody>
-          <a:bodyPr wrap="square" anchor="t" lIns="0" rIns="0" tIns="0" bIns="0">
-            <a:spAutoFit/>
-          </a:bodyPr>
-          <a:lstStyle/>
-          <a:p>
-            <a:pPr algn="l"/>
-            <a:r>
               <a:rPr sz="1200" b="0" i="0">
                 <a:solidFill>
                   <a:srgbClr val="5F6979"/>
                 </a:solidFill>
                 <a:latin typeface="IBM Plex Sans"/>
               </a:rPr>
-              <a:t>docs/brief-for-presentation-and-guide.md, 'Claims to keep accurate'.</a:t>
+              <a:t>NIST AI 100-2e2025 §3 and its taxonomy index. Technical guide §22 and §5.</a:t>
             </a:r>
           </a:p>
         </p:txBody>
@@ -32270,13 +32211,13 @@
           <a:p>
             <a:pPr algn="l"/>
             <a:r>
-              <a:rPr sz="2700" b="1">
+              <a:rPr sz="3000" b="1">
                 <a:solidFill>
                   <a:srgbClr val="0F1B2D"/>
                 </a:solidFill>
                 <a:latin typeface="IBM Plex Sans"/>
               </a:rPr>
-              <a:t>One gate, four lenses: GRAIMATTER passes, Article 15(5) fails</a:t>
+              <a:t>What this repository does not decide</a:t>
             </a:r>
           </a:p>
         </p:txBody>
@@ -32311,683 +32252,25 @@
                 </a:solidFill>
                 <a:latin typeface="Consolas"/>
               </a:rPr>
-              <a:t>RELEASE GATE · DEMO/RUN_GATE.PY · CI</a:t>
-            </a:r>
-          </a:p>
-        </p:txBody>
-      </p:sp>
-      <p:graphicFrame>
-        <p:nvGraphicFramePr>
-          <p:cNvPr id="4" name="Table 3"/>
-          <p:cNvGraphicFramePr>
-            <a:graphicFrameLocks noGrp="1"/>
-          </p:cNvGraphicFramePr>
-          <p:nvPr/>
-        </p:nvGraphicFramePr>
-        <p:xfrm>
-          <a:off x="813816" y="1920240"/>
-          <a:ext cx="6400800" cy="2103120"/>
-        </p:xfrm>
-        <a:graphic>
-          <a:graphicData uri="http://schemas.openxmlformats.org/drawingml/2006/table">
-            <a:tbl>
-              <a:tblPr firstRow="1" bandRow="1">
-                <a:tableStyleId>{5C22544A-7EE6-4342-B048-85BDC9FD1C3A}</a:tableStyleId>
-              </a:tblPr>
-              <a:tblGrid>
-                <a:gridCol w="2377440"/>
-                <a:gridCol w="960120"/>
-                <a:gridCol w="822960"/>
-                <a:gridCol w="822960"/>
-                <a:gridCol w="1417320"/>
-              </a:tblGrid>
-              <a:tr h="420624">
-                <a:tc>
-                  <a:txBody>
-                    <a:bodyPr wrap="square"/>
-                    <a:lstStyle/>
-                    <a:p>
-                      <a:r>
-                        <a:rPr sz="1300" b="1">
-                          <a:solidFill>
-                            <a:srgbClr val="F6F5F0"/>
-                          </a:solidFill>
-                          <a:latin typeface="IBM Plex Sans"/>
-                        </a:rPr>
-                        <a:t>Pack</a:t>
-                      </a:r>
-                    </a:p>
-                  </a:txBody>
-                  <a:tcPr marL="91440" marR="91440" marT="36576" marB="36576" anchor="ctr">
-                    <a:solidFill>
-                      <a:srgbClr val="0F1B2D"/>
-                    </a:solidFill>
-                  </a:tcPr>
-                </a:tc>
-                <a:tc>
-                  <a:txBody>
-                    <a:bodyPr wrap="square"/>
-                    <a:lstStyle/>
-                    <a:p>
-                      <a:r>
-                        <a:rPr sz="1300" b="1">
-                          <a:solidFill>
-                            <a:srgbClr val="F6F5F0"/>
-                          </a:solidFill>
-                          <a:latin typeface="IBM Plex Sans"/>
-                        </a:rPr>
-                        <a:t>Controls</a:t>
-                      </a:r>
-                    </a:p>
-                  </a:txBody>
-                  <a:tcPr marL="91440" marR="91440" marT="36576" marB="36576" anchor="ctr">
-                    <a:solidFill>
-                      <a:srgbClr val="0F1B2D"/>
-                    </a:solidFill>
-                  </a:tcPr>
-                </a:tc>
-                <a:tc>
-                  <a:txBody>
-                    <a:bodyPr wrap="square"/>
-                    <a:lstStyle/>
-                    <a:p>
-                      <a:r>
-                        <a:rPr sz="1300" b="1">
-                          <a:solidFill>
-                            <a:srgbClr val="F6F5F0"/>
-                          </a:solidFill>
-                          <a:latin typeface="IBM Plex Sans"/>
-                        </a:rPr>
-                        <a:t>Pass</a:t>
-                      </a:r>
-                    </a:p>
-                  </a:txBody>
-                  <a:tcPr marL="91440" marR="91440" marT="36576" marB="36576" anchor="ctr">
-                    <a:solidFill>
-                      <a:srgbClr val="0F1B2D"/>
-                    </a:solidFill>
-                  </a:tcPr>
-                </a:tc>
-                <a:tc>
-                  <a:txBody>
-                    <a:bodyPr wrap="square"/>
-                    <a:lstStyle/>
-                    <a:p>
-                      <a:r>
-                        <a:rPr sz="1300" b="1">
-                          <a:solidFill>
-                            <a:srgbClr val="F6F5F0"/>
-                          </a:solidFill>
-                          <a:latin typeface="IBM Plex Sans"/>
-                        </a:rPr>
-                        <a:t>Fail</a:t>
-                      </a:r>
-                    </a:p>
-                  </a:txBody>
-                  <a:tcPr marL="91440" marR="91440" marT="36576" marB="36576" anchor="ctr">
-                    <a:solidFill>
-                      <a:srgbClr val="0F1B2D"/>
-                    </a:solidFill>
-                  </a:tcPr>
-                </a:tc>
-                <a:tc>
-                  <a:txBody>
-                    <a:bodyPr wrap="square"/>
-                    <a:lstStyle/>
-                    <a:p>
-                      <a:r>
-                        <a:rPr sz="1300" b="1">
-                          <a:solidFill>
-                            <a:srgbClr val="F6F5F0"/>
-                          </a:solidFill>
-                          <a:latin typeface="IBM Plex Sans"/>
-                        </a:rPr>
-                        <a:t>Not evidenced</a:t>
-                      </a:r>
-                    </a:p>
-                  </a:txBody>
-                  <a:tcPr marL="91440" marR="91440" marT="36576" marB="36576" anchor="ctr">
-                    <a:solidFill>
-                      <a:srgbClr val="0F1B2D"/>
-                    </a:solidFill>
-                  </a:tcPr>
-                </a:tc>
-              </a:tr>
-              <a:tr h="420624">
-                <a:tc>
-                  <a:txBody>
-                    <a:bodyPr wrap="square"/>
-                    <a:lstStyle/>
-                    <a:p>
-                      <a:r>
-                        <a:rPr sz="1300" b="1">
-                          <a:solidFill>
-                            <a:srgbClr val="0F1B2D"/>
-                          </a:solidFill>
-                          <a:latin typeface="IBM Plex Sans"/>
-                        </a:rPr>
-                        <a:t>EU AI Act 15(5), UK Code</a:t>
-                      </a:r>
-                    </a:p>
-                  </a:txBody>
-                  <a:tcPr marL="91440" marR="91440" marT="36576" marB="36576" anchor="ctr">
-                    <a:solidFill>
-                      <a:srgbClr val="FDFCF9"/>
-                    </a:solidFill>
-                  </a:tcPr>
-                </a:tc>
-                <a:tc>
-                  <a:txBody>
-                    <a:bodyPr wrap="square"/>
-                    <a:lstStyle/>
-                    <a:p>
-                      <a:r>
-                        <a:rPr sz="1300" b="0">
-                          <a:solidFill>
-                            <a:srgbClr val="3A4556"/>
-                          </a:solidFill>
-                          <a:latin typeface="IBM Plex Sans"/>
-                        </a:rPr>
-                        <a:t>8</a:t>
-                      </a:r>
-                    </a:p>
-                  </a:txBody>
-                  <a:tcPr marL="91440" marR="91440" marT="36576" marB="36576" anchor="ctr">
-                    <a:solidFill>
-                      <a:srgbClr val="FDFCF9"/>
-                    </a:solidFill>
-                  </a:tcPr>
-                </a:tc>
-                <a:tc>
-                  <a:txBody>
-                    <a:bodyPr wrap="square"/>
-                    <a:lstStyle/>
-                    <a:p>
-                      <a:r>
-                        <a:rPr sz="1300" b="0">
-                          <a:solidFill>
-                            <a:srgbClr val="3A4556"/>
-                          </a:solidFill>
-                          <a:latin typeface="IBM Plex Sans"/>
-                        </a:rPr>
-                        <a:t>2</a:t>
-                      </a:r>
-                    </a:p>
-                  </a:txBody>
-                  <a:tcPr marL="91440" marR="91440" marT="36576" marB="36576" anchor="ctr">
-                    <a:solidFill>
-                      <a:srgbClr val="FDFCF9"/>
-                    </a:solidFill>
-                  </a:tcPr>
-                </a:tc>
-                <a:tc>
-                  <a:txBody>
-                    <a:bodyPr wrap="square"/>
-                    <a:lstStyle/>
-                    <a:p>
-                      <a:r>
-                        <a:rPr sz="1300" b="0">
-                          <a:solidFill>
-                            <a:srgbClr val="3A4556"/>
-                          </a:solidFill>
-                          <a:latin typeface="IBM Plex Sans"/>
-                        </a:rPr>
-                        <a:t>6</a:t>
-                      </a:r>
-                    </a:p>
-                  </a:txBody>
-                  <a:tcPr marL="91440" marR="91440" marT="36576" marB="36576" anchor="ctr">
-                    <a:solidFill>
-                      <a:srgbClr val="FBE9DC"/>
-                    </a:solidFill>
-                  </a:tcPr>
-                </a:tc>
-                <a:tc>
-                  <a:txBody>
-                    <a:bodyPr wrap="square"/>
-                    <a:lstStyle/>
-                    <a:p>
-                      <a:r>
-                        <a:rPr sz="1300" b="0">
-                          <a:solidFill>
-                            <a:srgbClr val="3A4556"/>
-                          </a:solidFill>
-                          <a:latin typeface="IBM Plex Sans"/>
-                        </a:rPr>
-                        <a:t>0</a:t>
-                      </a:r>
-                    </a:p>
-                  </a:txBody>
-                  <a:tcPr marL="91440" marR="91440" marT="36576" marB="36576" anchor="ctr">
-                    <a:solidFill>
-                      <a:srgbClr val="FDFCF9"/>
-                    </a:solidFill>
-                  </a:tcPr>
-                </a:tc>
-              </a:tr>
-              <a:tr h="420624">
-                <a:tc>
-                  <a:txBody>
-                    <a:bodyPr wrap="square"/>
-                    <a:lstStyle/>
-                    <a:p>
-                      <a:r>
-                        <a:rPr sz="1300" b="1">
-                          <a:solidFill>
-                            <a:srgbClr val="0F1B2D"/>
-                          </a:solidFill>
-                          <a:latin typeface="IBM Plex Sans"/>
-                        </a:rPr>
-                        <a:t>NIST AI 100-2</a:t>
-                      </a:r>
-                    </a:p>
-                  </a:txBody>
-                  <a:tcPr marL="91440" marR="91440" marT="36576" marB="36576" anchor="ctr">
-                    <a:solidFill>
-                      <a:srgbClr val="F1EFE8"/>
-                    </a:solidFill>
-                  </a:tcPr>
-                </a:tc>
-                <a:tc>
-                  <a:txBody>
-                    <a:bodyPr wrap="square"/>
-                    <a:lstStyle/>
-                    <a:p>
-                      <a:r>
-                        <a:rPr sz="1300" b="0">
-                          <a:solidFill>
-                            <a:srgbClr val="3A4556"/>
-                          </a:solidFill>
-                          <a:latin typeface="IBM Plex Sans"/>
-                        </a:rPr>
-                        <a:t>6</a:t>
-                      </a:r>
-                    </a:p>
-                  </a:txBody>
-                  <a:tcPr marL="91440" marR="91440" marT="36576" marB="36576" anchor="ctr">
-                    <a:solidFill>
-                      <a:srgbClr val="F1EFE8"/>
-                    </a:solidFill>
-                  </a:tcPr>
-                </a:tc>
-                <a:tc>
-                  <a:txBody>
-                    <a:bodyPr wrap="square"/>
-                    <a:lstStyle/>
-                    <a:p>
-                      <a:r>
-                        <a:rPr sz="1300" b="0">
-                          <a:solidFill>
-                            <a:srgbClr val="3A4556"/>
-                          </a:solidFill>
-                          <a:latin typeface="IBM Plex Sans"/>
-                        </a:rPr>
-                        <a:t>3</a:t>
-                      </a:r>
-                    </a:p>
-                  </a:txBody>
-                  <a:tcPr marL="91440" marR="91440" marT="36576" marB="36576" anchor="ctr">
-                    <a:solidFill>
-                      <a:srgbClr val="F1EFE8"/>
-                    </a:solidFill>
-                  </a:tcPr>
-                </a:tc>
-                <a:tc>
-                  <a:txBody>
-                    <a:bodyPr wrap="square"/>
-                    <a:lstStyle/>
-                    <a:p>
-                      <a:r>
-                        <a:rPr sz="1300" b="0">
-                          <a:solidFill>
-                            <a:srgbClr val="3A4556"/>
-                          </a:solidFill>
-                          <a:latin typeface="IBM Plex Sans"/>
-                        </a:rPr>
-                        <a:t>3</a:t>
-                      </a:r>
-                    </a:p>
-                  </a:txBody>
-                  <a:tcPr marL="91440" marR="91440" marT="36576" marB="36576" anchor="ctr">
-                    <a:solidFill>
-                      <a:srgbClr val="FBE9DC"/>
-                    </a:solidFill>
-                  </a:tcPr>
-                </a:tc>
-                <a:tc>
-                  <a:txBody>
-                    <a:bodyPr wrap="square"/>
-                    <a:lstStyle/>
-                    <a:p>
-                      <a:r>
-                        <a:rPr sz="1300" b="0">
-                          <a:solidFill>
-                            <a:srgbClr val="3A4556"/>
-                          </a:solidFill>
-                          <a:latin typeface="IBM Plex Sans"/>
-                        </a:rPr>
-                        <a:t>0</a:t>
-                      </a:r>
-                    </a:p>
-                  </a:txBody>
-                  <a:tcPr marL="91440" marR="91440" marT="36576" marB="36576" anchor="ctr">
-                    <a:solidFill>
-                      <a:srgbClr val="F1EFE8"/>
-                    </a:solidFill>
-                  </a:tcPr>
-                </a:tc>
-              </a:tr>
-              <a:tr h="420624">
-                <a:tc>
-                  <a:txBody>
-                    <a:bodyPr wrap="square"/>
-                    <a:lstStyle/>
-                    <a:p>
-                      <a:r>
-                        <a:rPr sz="1300" b="1">
-                          <a:solidFill>
-                            <a:srgbClr val="0F1B2D"/>
-                          </a:solidFill>
-                          <a:latin typeface="IBM Plex Sans"/>
-                        </a:rPr>
-                        <a:t>GRAIMATTER TECH</a:t>
-                      </a:r>
-                    </a:p>
-                  </a:txBody>
-                  <a:tcPr marL="91440" marR="91440" marT="36576" marB="36576" anchor="ctr">
-                    <a:solidFill>
-                      <a:srgbClr val="FDFCF9"/>
-                    </a:solidFill>
-                  </a:tcPr>
-                </a:tc>
-                <a:tc>
-                  <a:txBody>
-                    <a:bodyPr wrap="square"/>
-                    <a:lstStyle/>
-                    <a:p>
-                      <a:r>
-                        <a:rPr sz="1300" b="0">
-                          <a:solidFill>
-                            <a:srgbClr val="3A4556"/>
-                          </a:solidFill>
-                          <a:latin typeface="IBM Plex Sans"/>
-                        </a:rPr>
-                        <a:t>6</a:t>
-                      </a:r>
-                    </a:p>
-                  </a:txBody>
-                  <a:tcPr marL="91440" marR="91440" marT="36576" marB="36576" anchor="ctr">
-                    <a:solidFill>
-                      <a:srgbClr val="FDFCF9"/>
-                    </a:solidFill>
-                  </a:tcPr>
-                </a:tc>
-                <a:tc>
-                  <a:txBody>
-                    <a:bodyPr wrap="square"/>
-                    <a:lstStyle/>
-                    <a:p>
-                      <a:r>
-                        <a:rPr sz="1300" b="0">
-                          <a:solidFill>
-                            <a:srgbClr val="3A4556"/>
-                          </a:solidFill>
-                          <a:latin typeface="IBM Plex Sans"/>
-                        </a:rPr>
-                        <a:t>5</a:t>
-                      </a:r>
-                    </a:p>
-                  </a:txBody>
-                  <a:tcPr marL="91440" marR="91440" marT="36576" marB="36576" anchor="ctr">
-                    <a:solidFill>
-                      <a:srgbClr val="DCEBDD"/>
-                    </a:solidFill>
-                  </a:tcPr>
-                </a:tc>
-                <a:tc>
-                  <a:txBody>
-                    <a:bodyPr wrap="square"/>
-                    <a:lstStyle/>
-                    <a:p>
-                      <a:r>
-                        <a:rPr sz="1300" b="0">
-                          <a:solidFill>
-                            <a:srgbClr val="3A4556"/>
-                          </a:solidFill>
-                          <a:latin typeface="IBM Plex Sans"/>
-                        </a:rPr>
-                        <a:t>0</a:t>
-                      </a:r>
-                    </a:p>
-                  </a:txBody>
-                  <a:tcPr marL="91440" marR="91440" marT="36576" marB="36576" anchor="ctr">
-                    <a:solidFill>
-                      <a:srgbClr val="FDFCF9"/>
-                    </a:solidFill>
-                  </a:tcPr>
-                </a:tc>
-                <a:tc>
-                  <a:txBody>
-                    <a:bodyPr wrap="square"/>
-                    <a:lstStyle/>
-                    <a:p>
-                      <a:r>
-                        <a:rPr sz="1300" b="0">
-                          <a:solidFill>
-                            <a:srgbClr val="3A4556"/>
-                          </a:solidFill>
-                          <a:latin typeface="IBM Plex Sans"/>
-                        </a:rPr>
-                        <a:t>1 (demo 2)</a:t>
-                      </a:r>
-                    </a:p>
-                  </a:txBody>
-                  <a:tcPr marL="91440" marR="91440" marT="36576" marB="36576" anchor="ctr">
-                    <a:solidFill>
-                      <a:srgbClr val="FDFCF9"/>
-                    </a:solidFill>
-                  </a:tcPr>
-                </a:tc>
-              </a:tr>
-              <a:tr h="420624">
-                <a:tc>
-                  <a:txBody>
-                    <a:bodyPr wrap="square"/>
-                    <a:lstStyle/>
-                    <a:p>
-                      <a:r>
-                        <a:rPr sz="1300" b="1">
-                          <a:solidFill>
-                            <a:srgbClr val="0F1B2D"/>
-                          </a:solidFill>
-                          <a:latin typeface="IBM Plex Sans"/>
-                        </a:rPr>
-                        <a:t>NIST AI RMF, SR 26-02</a:t>
-                      </a:r>
-                    </a:p>
-                  </a:txBody>
-                  <a:tcPr marL="91440" marR="91440" marT="36576" marB="36576" anchor="ctr">
-                    <a:solidFill>
-                      <a:srgbClr val="F1EFE8"/>
-                    </a:solidFill>
-                  </a:tcPr>
-                </a:tc>
-                <a:tc>
-                  <a:txBody>
-                    <a:bodyPr wrap="square"/>
-                    <a:lstStyle/>
-                    <a:p>
-                      <a:r>
-                        <a:rPr sz="1300" b="0">
-                          <a:solidFill>
-                            <a:srgbClr val="3A4556"/>
-                          </a:solidFill>
-                          <a:latin typeface="IBM Plex Sans"/>
-                        </a:rPr>
-                        <a:t>8</a:t>
-                      </a:r>
-                    </a:p>
-                  </a:txBody>
-                  <a:tcPr marL="91440" marR="91440" marT="36576" marB="36576" anchor="ctr">
-                    <a:solidFill>
-                      <a:srgbClr val="F1EFE8"/>
-                    </a:solidFill>
-                  </a:tcPr>
-                </a:tc>
-                <a:tc>
-                  <a:txBody>
-                    <a:bodyPr wrap="square"/>
-                    <a:lstStyle/>
-                    <a:p>
-                      <a:r>
-                        <a:rPr sz="1300" b="0">
-                          <a:solidFill>
-                            <a:srgbClr val="3A4556"/>
-                          </a:solidFill>
-                          <a:latin typeface="IBM Plex Sans"/>
-                        </a:rPr>
-                        <a:t>5</a:t>
-                      </a:r>
-                    </a:p>
-                  </a:txBody>
-                  <a:tcPr marL="91440" marR="91440" marT="36576" marB="36576" anchor="ctr">
-                    <a:solidFill>
-                      <a:srgbClr val="F1EFE8"/>
-                    </a:solidFill>
-                  </a:tcPr>
-                </a:tc>
-                <a:tc>
-                  <a:txBody>
-                    <a:bodyPr wrap="square"/>
-                    <a:lstStyle/>
-                    <a:p>
-                      <a:r>
-                        <a:rPr sz="1300" b="0">
-                          <a:solidFill>
-                            <a:srgbClr val="3A4556"/>
-                          </a:solidFill>
-                          <a:latin typeface="IBM Plex Sans"/>
-                        </a:rPr>
-                        <a:t>3</a:t>
-                      </a:r>
-                    </a:p>
-                  </a:txBody>
-                  <a:tcPr marL="91440" marR="91440" marT="36576" marB="36576" anchor="ctr">
-                    <a:solidFill>
-                      <a:srgbClr val="FBE9DC"/>
-                    </a:solidFill>
-                  </a:tcPr>
-                </a:tc>
-                <a:tc>
-                  <a:txBody>
-                    <a:bodyPr wrap="square"/>
-                    <a:lstStyle/>
-                    <a:p>
-                      <a:r>
-                        <a:rPr sz="1300" b="0">
-                          <a:solidFill>
-                            <a:srgbClr val="3A4556"/>
-                          </a:solidFill>
-                          <a:latin typeface="IBM Plex Sans"/>
-                        </a:rPr>
-                        <a:t>0</a:t>
-                      </a:r>
-                    </a:p>
-                  </a:txBody>
-                  <a:tcPr marL="91440" marR="91440" marT="36576" marB="36576" anchor="ctr">
-                    <a:solidFill>
-                      <a:srgbClr val="F1EFE8"/>
-                    </a:solidFill>
-                  </a:tcPr>
-                </a:tc>
-              </a:tr>
-            </a:tbl>
-          </a:graphicData>
-        </a:graphic>
-      </p:graphicFrame>
-      <p:sp>
-        <p:nvSpPr>
-          <p:cNvPr id="5" name="TextBox 4"/>
-          <p:cNvSpPr txBox="1"/>
-          <p:nvPr/>
-        </p:nvSpPr>
-        <p:spPr>
-          <a:xfrm>
-            <a:off x="813816" y="4114800"/>
-            <a:ext cx="6400800" cy="1188720"/>
-          </a:xfrm>
-          <a:prstGeom prst="rect">
-            <a:avLst/>
-          </a:prstGeom>
-          <a:noFill/>
-        </p:spPr>
-        <p:txBody>
-          <a:bodyPr wrap="square" anchor="t" lIns="0" rIns="0" tIns="0" bIns="0">
-            <a:spAutoFit/>
-          </a:bodyPr>
-          <a:lstStyle/>
-          <a:p>
-            <a:pPr algn="l"/>
-            <a:r>
-              <a:rPr sz="1300" b="1" i="0">
-                <a:solidFill>
-                  <a:srgbClr val="3A4556"/>
-                </a:solidFill>
-                <a:latin typeface="IBM Plex Sans"/>
-              </a:rPr>
-              <a:t>Breached: </a:t>
-            </a:r>
-            <a:r>
-              <a:rPr sz="1300" b="0" i="0">
-                <a:solidFill>
-                  <a:srgbClr val="3A4556"/>
-                </a:solidFill>
-                <a:latin typeface="IBM Plex Sans"/>
-              </a:rPr>
-              <a:t>evasion 78.7% (tolerance 10%), a copy agreeing 86.9% after one 200-row budget (80%), a backdoor lifting trigger success by 71.7 points (tolerance 10).</a:t>
-            </a:r>
-          </a:p>
-          <a:p>
-            <a:pPr algn="l">
-              <a:spcBef>
-                <a:spcPts val="600"/>
-              </a:spcBef>
-            </a:pPr>
-            <a:r>
-              <a:rPr sz="1300" b="1" i="0">
-                <a:solidFill>
-                  <a:srgbClr val="3A4556"/>
-                </a:solidFill>
-                <a:latin typeface="IBM Plex Sans"/>
-              </a:rPr>
-              <a:t>Within: </a:t>
-            </a:r>
-            <a:r>
-              <a:rPr sz="1300" b="0" i="0">
-                <a:solidFill>
-                  <a:srgbClr val="3A4556"/>
-                </a:solidFill>
-                <a:latin typeface="IBM Plex Sans"/>
-              </a:rPr>
-              <a:t>membership, attribute, holdout gap, stored rows, release checks, query budget, and the supply chain: no tampered file of demo 4 gets past the pin and the scan or floor.</a:t>
-            </a:r>
-          </a:p>
-        </p:txBody>
-      </p:sp>
-      <p:sp>
-        <p:nvSpPr>
-          <p:cNvPr id="6" name="Rounded Rectangle 5"/>
+              <a:t>PART 4B · LIMITS</a:t>
+            </a:r>
+          </a:p>
+        </p:txBody>
+      </p:sp>
+      <p:sp>
+        <p:nvSpPr>
+          <p:cNvPr id="4" name="Rounded Rectangle 3"/>
           <p:cNvSpPr/>
           <p:nvPr/>
         </p:nvSpPr>
         <p:spPr>
           <a:xfrm>
-            <a:off x="7534656" y="1920240"/>
-            <a:ext cx="3840480" cy="1874519"/>
+            <a:off x="813816" y="2011680"/>
+            <a:ext cx="3337560" cy="1783080"/>
           </a:xfrm>
           <a:prstGeom prst="roundRect">
             <a:avLst>
-              <a:gd name="adj" fmla="val 5853"/>
+              <a:gd name="adj" fmla="val 6153"/>
             </a:avLst>
           </a:prstGeom>
           <a:solidFill>
@@ -33010,14 +32293,14 @@
       </p:sp>
       <p:sp>
         <p:nvSpPr>
-          <p:cNvPr id="7" name="TextBox 6"/>
+          <p:cNvPr id="5" name="TextBox 4"/>
           <p:cNvSpPr txBox="1"/>
           <p:nvPr/>
         </p:nvSpPr>
         <p:spPr>
           <a:xfrm>
-            <a:off x="7735824" y="2103120"/>
-            <a:ext cx="3438144" cy="365760"/>
+            <a:off x="1014984" y="2194560"/>
+            <a:ext cx="2935224" cy="365760"/>
           </a:xfrm>
           <a:prstGeom prst="rect">
             <a:avLst/>
@@ -33038,21 +32321,21 @@
                 </a:solidFill>
                 <a:latin typeface="IBM Plex Sans"/>
               </a:rPr>
-              <a:t>Never a silent green</a:t>
-            </a:r>
-          </a:p>
-        </p:txBody>
-      </p:sp>
-      <p:sp>
-        <p:nvSpPr>
-          <p:cNvPr id="8" name="TextBox 7"/>
+              <a:t>A real risk appetite</a:t>
+            </a:r>
+          </a:p>
+        </p:txBody>
+      </p:sp>
+      <p:sp>
+        <p:nvSpPr>
+          <p:cNvPr id="6" name="TextBox 5"/>
           <p:cNvSpPr txBox="1"/>
           <p:nvPr/>
         </p:nvSpPr>
         <p:spPr>
           <a:xfrm>
-            <a:off x="7735824" y="2377440"/>
-            <a:ext cx="3438144" cy="1325879"/>
+            <a:off x="1014984" y="2468880"/>
+            <a:ext cx="2935224" cy="1234440"/>
           </a:xfrm>
           <a:prstGeom prst="rect">
             <a:avLst/>
@@ -33067,38 +32350,40 @@
           <a:p>
             <a:pPr algn="l"/>
             <a:r>
-              <a:rPr sz="1250" b="0" i="0">
+              <a:rPr sz="1300" b="0" i="0">
                 <a:solidFill>
                   <a:srgbClr val="3A4556"/>
                 </a:solidFill>
                 <a:latin typeface="IBM Plex Sans"/>
               </a:rPr>
-              <a:t>A control whose demo did not run is not_evidenced, not pass. CI does not install sacroml, so it declares demo 2 out of scope with --accept-missing 2 and the report says so.</a:t>
-            </a:r>
-          </a:p>
-        </p:txBody>
-      </p:sp>
-      <p:sp>
-        <p:nvSpPr>
-          <p:cNvPr id="9" name="Rounded Rectangle 8"/>
+              <a:t>The demo 1 cut-offs are local. ELA 8: thresholds are agreed with the data controller.</a:t>
+            </a:r>
+          </a:p>
+        </p:txBody>
+      </p:sp>
+      <p:sp>
+        <p:nvSpPr>
+          <p:cNvPr id="7" name="Rounded Rectangle 6"/>
           <p:cNvSpPr/>
           <p:nvPr/>
         </p:nvSpPr>
         <p:spPr>
           <a:xfrm>
-            <a:off x="7534656" y="3931920"/>
-            <a:ext cx="3840480" cy="1874519"/>
+            <a:off x="4425696" y="2011680"/>
+            <a:ext cx="3337560" cy="1783080"/>
           </a:xfrm>
           <a:prstGeom prst="roundRect">
             <a:avLst>
-              <a:gd name="adj" fmla="val 5853"/>
+              <a:gd name="adj" fmla="val 6153"/>
             </a:avLst>
           </a:prstGeom>
           <a:solidFill>
-            <a:srgbClr val="0F1B2D"/>
+            <a:srgbClr val="FDFCF9"/>
           </a:solidFill>
-          <a:ln>
-            <a:noFill/>
+          <a:ln w="12700">
+            <a:solidFill>
+              <a:srgbClr val="E2DFD6"/>
+            </a:solidFill>
           </a:ln>
           <a:effectLst/>
         </p:spPr>
@@ -33112,14 +32397,14 @@
       </p:sp>
       <p:sp>
         <p:nvSpPr>
-          <p:cNvPr id="10" name="TextBox 9"/>
+          <p:cNvPr id="8" name="TextBox 7"/>
           <p:cNvSpPr txBox="1"/>
           <p:nvPr/>
         </p:nvSpPr>
         <p:spPr>
           <a:xfrm>
-            <a:off x="7735824" y="4114800"/>
-            <a:ext cx="3438144" cy="365760"/>
+            <a:off x="4626864" y="2194560"/>
+            <a:ext cx="2935224" cy="365760"/>
           </a:xfrm>
           <a:prstGeom prst="rect">
             <a:avLst/>
@@ -33136,25 +32421,25 @@
             <a:r>
               <a:rPr sz="1600" b="1" i="0">
                 <a:solidFill>
-                  <a:srgbClr val="F2A35E"/>
-                </a:solidFill>
-                <a:latin typeface="IBM Plex Sans"/>
-              </a:rPr>
-              <a:t>Read with SR 26-02</a:t>
-            </a:r>
-          </a:p>
-        </p:txBody>
-      </p:sp>
-      <p:sp>
-        <p:nvSpPr>
-          <p:cNvPr id="11" name="TextBox 10"/>
+                  <a:srgbClr val="0F1B2D"/>
+                </a:solidFill>
+                <a:latin typeface="IBM Plex Sans"/>
+              </a:rPr>
+              <a:t>Legal advice</a:t>
+            </a:r>
+          </a:p>
+        </p:txBody>
+      </p:sp>
+      <p:sp>
+        <p:nvSpPr>
+          <p:cNvPr id="9" name="TextBox 8"/>
           <p:cNvSpPr txBox="1"/>
           <p:nvPr/>
         </p:nvSpPr>
         <p:spPr>
           <a:xfrm>
-            <a:off x="7735824" y="4389120"/>
-            <a:ext cx="3438144" cy="1325879"/>
+            <a:off x="4626864" y="2468880"/>
+            <a:ext cx="2935224" cy="1234440"/>
           </a:xfrm>
           <a:prstGeom prst="rect">
             <a:avLst/>
@@ -33169,27 +32454,61 @@
           <a:p>
             <a:pPr algn="l"/>
             <a:r>
-              <a:rPr sz="1250" b="0" i="0">
-                <a:solidFill>
-                  <a:srgbClr val="D9DEE6"/>
-                </a:solidFill>
-                <a:latin typeface="IBM Plex Sans"/>
-              </a:rPr>
-              <a:t>A risk classifier is a model in the plain sense of model risk guidance. The TRE holdout (TECH 6) is the independent validation; the gate in CI is the ongoing monitoring.</a:t>
-            </a:r>
-          </a:p>
-        </p:txBody>
-      </p:sp>
-      <p:sp>
-        <p:nvSpPr>
-          <p:cNvPr id="12" name="TextBox 11"/>
+              <a:rPr sz="1300" b="0" i="0">
+                <a:solidFill>
+                  <a:srgbClr val="3A4556"/>
+                </a:solidFill>
+                <a:latin typeface="IBM Plex Sans"/>
+              </a:rPr>
+              <a:t>The EU AI Act, GDPR and UK code are summarised, not interpreted. Clause text needs a legal review.</a:t>
+            </a:r>
+          </a:p>
+        </p:txBody>
+      </p:sp>
+      <p:sp>
+        <p:nvSpPr>
+          <p:cNvPr id="10" name="Rounded Rectangle 9"/>
+          <p:cNvSpPr/>
+          <p:nvPr/>
+        </p:nvSpPr>
+        <p:spPr>
+          <a:xfrm>
+            <a:off x="8037576" y="2011680"/>
+            <a:ext cx="3337560" cy="1783080"/>
+          </a:xfrm>
+          <a:prstGeom prst="roundRect">
+            <a:avLst>
+              <a:gd name="adj" fmla="val 6153"/>
+            </a:avLst>
+          </a:prstGeom>
+          <a:solidFill>
+            <a:srgbClr val="FDFCF9"/>
+          </a:solidFill>
+          <a:ln w="12700">
+            <a:solidFill>
+              <a:srgbClr val="E2DFD6"/>
+            </a:solidFill>
+          </a:ln>
+          <a:effectLst/>
+        </p:spPr>
+        <p:txBody>
+          <a:bodyPr rtlCol="0" anchor="ctr"/>
+          <a:lstStyle/>
+          <a:p>
+            <a:pPr algn="ctr"/>
+          </a:p>
+        </p:txBody>
+      </p:sp>
+      <p:sp>
+        <p:nvSpPr>
+          <p:cNvPr id="11" name="TextBox 10"/>
           <p:cNvSpPr txBox="1"/>
           <p:nvPr/>
         </p:nvSpPr>
         <p:spPr>
           <a:xfrm>
-            <a:off x="813816" y="6236208"/>
-            <a:ext cx="10561320" cy="274320"/>
+            <a:off x="8238744" y="2194560"/>
+            <a:ext cx="2935224" cy="365760"/>
           </a:xfrm>
           <a:prstGeom prst="rect">
             <a:avLst/>
@@ -33204,13 +32523,395 @@
           <a:p>
             <a:pPr algn="l"/>
             <a:r>
+              <a:rPr sz="1600" b="1" i="0">
+                <a:solidFill>
+                  <a:srgbClr val="0F1B2D"/>
+                </a:solidFill>
+                <a:latin typeface="IBM Plex Sans"/>
+              </a:rPr>
+              <a:t>Strong attacks</a:t>
+            </a:r>
+          </a:p>
+        </p:txBody>
+      </p:sp>
+      <p:sp>
+        <p:nvSpPr>
+          <p:cNvPr id="12" name="TextBox 11"/>
+          <p:cNvSpPr txBox="1"/>
+          <p:nvPr/>
+        </p:nvSpPr>
+        <p:spPr>
+          <a:xfrm>
+            <a:off x="8238744" y="2468880"/>
+            <a:ext cx="2935224" cy="1234440"/>
+          </a:xfrm>
+          <a:prstGeom prst="rect">
+            <a:avLst/>
+          </a:prstGeom>
+          <a:noFill/>
+        </p:spPr>
+        <p:txBody>
+          <a:bodyPr wrap="square" anchor="t" lIns="0" rIns="0" tIns="0" bIns="0">
+            <a:spAutoFit/>
+          </a:bodyPr>
+          <a:lstStyle/>
+          <a:p>
+            <a:pPr algn="l"/>
+            <a:r>
+              <a:rPr sz="1300" b="0" i="0">
+                <a:solidFill>
+                  <a:srgbClr val="3A4556"/>
+                </a:solidFill>
+                <a:latin typeface="IBM Plex Sans"/>
+              </a:rPr>
+              <a:t>No LiRA (in sacroml, not run). Demo 3 uses simple greedy and query attacks, not optimised ones.</a:t>
+            </a:r>
+          </a:p>
+        </p:txBody>
+      </p:sp>
+      <p:sp>
+        <p:nvSpPr>
+          <p:cNvPr id="13" name="Rounded Rectangle 12"/>
+          <p:cNvSpPr/>
+          <p:nvPr/>
+        </p:nvSpPr>
+        <p:spPr>
+          <a:xfrm>
+            <a:off x="813816" y="3977639"/>
+            <a:ext cx="3337560" cy="1783080"/>
+          </a:xfrm>
+          <a:prstGeom prst="roundRect">
+            <a:avLst>
+              <a:gd name="adj" fmla="val 6153"/>
+            </a:avLst>
+          </a:prstGeom>
+          <a:solidFill>
+            <a:srgbClr val="FDFCF9"/>
+          </a:solidFill>
+          <a:ln w="12700">
+            <a:solidFill>
+              <a:srgbClr val="E2DFD6"/>
+            </a:solidFill>
+          </a:ln>
+          <a:effectLst/>
+        </p:spPr>
+        <p:txBody>
+          <a:bodyPr rtlCol="0" anchor="ctr"/>
+          <a:lstStyle/>
+          <a:p>
+            <a:pPr algn="ctr"/>
+          </a:p>
+        </p:txBody>
+      </p:sp>
+      <p:sp>
+        <p:nvSpPr>
+          <p:cNvPr id="14" name="TextBox 13"/>
+          <p:cNvSpPr txBox="1"/>
+          <p:nvPr/>
+        </p:nvSpPr>
+        <p:spPr>
+          <a:xfrm>
+            <a:off x="1014984" y="4160520"/>
+            <a:ext cx="2935224" cy="365760"/>
+          </a:xfrm>
+          <a:prstGeom prst="rect">
+            <a:avLst/>
+          </a:prstGeom>
+          <a:noFill/>
+        </p:spPr>
+        <p:txBody>
+          <a:bodyPr wrap="square" anchor="t" lIns="0" rIns="0" tIns="0" bIns="0">
+            <a:spAutoFit/>
+          </a:bodyPr>
+          <a:lstStyle/>
+          <a:p>
+            <a:pPr algn="l"/>
+            <a:r>
+              <a:rPr sz="1600" b="1" i="0">
+                <a:solidFill>
+                  <a:srgbClr val="0F1B2D"/>
+                </a:solidFill>
+                <a:latin typeface="IBM Plex Sans"/>
+              </a:rPr>
+              <a:t>Private training</a:t>
+            </a:r>
+          </a:p>
+        </p:txBody>
+      </p:sp>
+      <p:sp>
+        <p:nvSpPr>
+          <p:cNvPr id="15" name="TextBox 14"/>
+          <p:cNvSpPr txBox="1"/>
+          <p:nvPr/>
+        </p:nvSpPr>
+        <p:spPr>
+          <a:xfrm>
+            <a:off x="1014984" y="4434840"/>
+            <a:ext cx="2935224" cy="1234440"/>
+          </a:xfrm>
+          <a:prstGeom prst="rect">
+            <a:avLst/>
+          </a:prstGeom>
+          <a:noFill/>
+        </p:spPr>
+        <p:txBody>
+          <a:bodyPr wrap="square" anchor="t" lIns="0" rIns="0" tIns="0" bIns="0">
+            <a:spAutoFit/>
+          </a:bodyPr>
+          <a:lstStyle/>
+          <a:p>
+            <a:pPr algn="l"/>
+            <a:r>
+              <a:rPr sz="1300" b="0" i="0">
+                <a:solidFill>
+                  <a:srgbClr val="3A4556"/>
+                </a:solidFill>
+                <a:latin typeface="IBM Plex Sans"/>
+              </a:rPr>
+              <a:t>No differentially private model. DP is sketched on a released mean only.</a:t>
+            </a:r>
+          </a:p>
+        </p:txBody>
+      </p:sp>
+      <p:sp>
+        <p:nvSpPr>
+          <p:cNvPr id="16" name="Rounded Rectangle 15"/>
+          <p:cNvSpPr/>
+          <p:nvPr/>
+        </p:nvSpPr>
+        <p:spPr>
+          <a:xfrm>
+            <a:off x="4425696" y="3977639"/>
+            <a:ext cx="3337560" cy="1783080"/>
+          </a:xfrm>
+          <a:prstGeom prst="roundRect">
+            <a:avLst>
+              <a:gd name="adj" fmla="val 6153"/>
+            </a:avLst>
+          </a:prstGeom>
+          <a:solidFill>
+            <a:srgbClr val="FDFCF9"/>
+          </a:solidFill>
+          <a:ln w="12700">
+            <a:solidFill>
+              <a:srgbClr val="E2DFD6"/>
+            </a:solidFill>
+          </a:ln>
+          <a:effectLst/>
+        </p:spPr>
+        <p:txBody>
+          <a:bodyPr rtlCol="0" anchor="ctr"/>
+          <a:lstStyle/>
+          <a:p>
+            <a:pPr algn="ctr"/>
+          </a:p>
+        </p:txBody>
+      </p:sp>
+      <p:sp>
+        <p:nvSpPr>
+          <p:cNvPr id="17" name="TextBox 16"/>
+          <p:cNvSpPr txBox="1"/>
+          <p:nvPr/>
+        </p:nvSpPr>
+        <p:spPr>
+          <a:xfrm>
+            <a:off x="4626864" y="4160520"/>
+            <a:ext cx="2935224" cy="365760"/>
+          </a:xfrm>
+          <a:prstGeom prst="rect">
+            <a:avLst/>
+          </a:prstGeom>
+          <a:noFill/>
+        </p:spPr>
+        <p:txBody>
+          <a:bodyPr wrap="square" anchor="t" lIns="0" rIns="0" tIns="0" bIns="0">
+            <a:spAutoFit/>
+          </a:bodyPr>
+          <a:lstStyle/>
+          <a:p>
+            <a:pPr algn="l"/>
+            <a:r>
+              <a:rPr sz="1600" b="1" i="0">
+                <a:solidFill>
+                  <a:srgbClr val="0F1B2D"/>
+                </a:solidFill>
+                <a:latin typeface="IBM Plex Sans"/>
+              </a:rPr>
+              <a:t>Generative AI</a:t>
+            </a:r>
+          </a:p>
+        </p:txBody>
+      </p:sp>
+      <p:sp>
+        <p:nvSpPr>
+          <p:cNvPr id="18" name="TextBox 17"/>
+          <p:cNvSpPr txBox="1"/>
+          <p:nvPr/>
+        </p:nvSpPr>
+        <p:spPr>
+          <a:xfrm>
+            <a:off x="4626864" y="4434840"/>
+            <a:ext cx="2935224" cy="1234440"/>
+          </a:xfrm>
+          <a:prstGeom prst="rect">
+            <a:avLst/>
+          </a:prstGeom>
+          <a:noFill/>
+        </p:spPr>
+        <p:txBody>
+          <a:bodyPr wrap="square" anchor="t" lIns="0" rIns="0" tIns="0" bIns="0">
+            <a:spAutoFit/>
+          </a:bodyPr>
+          <a:lstStyle/>
+          <a:p>
+            <a:pPr algn="l"/>
+            <a:r>
+              <a:rPr sz="1300" b="0" i="0">
+                <a:solidFill>
+                  <a:srgbClr val="3A4556"/>
+                </a:solidFill>
+                <a:latin typeface="IBM Plex Sans"/>
+              </a:rPr>
+              <a:t>No LLM demo here. safety-trust-engine tests prompt injection and agents with garak, AgentDojo, PyRIT.</a:t>
+            </a:r>
+          </a:p>
+        </p:txBody>
+      </p:sp>
+      <p:sp>
+        <p:nvSpPr>
+          <p:cNvPr id="19" name="Rounded Rectangle 18"/>
+          <p:cNvSpPr/>
+          <p:nvPr/>
+        </p:nvSpPr>
+        <p:spPr>
+          <a:xfrm>
+            <a:off x="8037576" y="3977639"/>
+            <a:ext cx="3337560" cy="1783080"/>
+          </a:xfrm>
+          <a:prstGeom prst="roundRect">
+            <a:avLst>
+              <a:gd name="adj" fmla="val 6153"/>
+            </a:avLst>
+          </a:prstGeom>
+          <a:solidFill>
+            <a:srgbClr val="FDFCF9"/>
+          </a:solidFill>
+          <a:ln w="12700">
+            <a:solidFill>
+              <a:srgbClr val="E2DFD6"/>
+            </a:solidFill>
+          </a:ln>
+          <a:effectLst/>
+        </p:spPr>
+        <p:txBody>
+          <a:bodyPr rtlCol="0" anchor="ctr"/>
+          <a:lstStyle/>
+          <a:p>
+            <a:pPr algn="ctr"/>
+          </a:p>
+        </p:txBody>
+      </p:sp>
+      <p:sp>
+        <p:nvSpPr>
+          <p:cNvPr id="20" name="TextBox 19"/>
+          <p:cNvSpPr txBox="1"/>
+          <p:nvPr/>
+        </p:nvSpPr>
+        <p:spPr>
+          <a:xfrm>
+            <a:off x="8238744" y="4160520"/>
+            <a:ext cx="2935224" cy="365760"/>
+          </a:xfrm>
+          <a:prstGeom prst="rect">
+            <a:avLst/>
+          </a:prstGeom>
+          <a:noFill/>
+        </p:spPr>
+        <p:txBody>
+          <a:bodyPr wrap="square" anchor="t" lIns="0" rIns="0" tIns="0" bIns="0">
+            <a:spAutoFit/>
+          </a:bodyPr>
+          <a:lstStyle/>
+          <a:p>
+            <a:pPr algn="l"/>
+            <a:r>
+              <a:rPr sz="1600" b="1" i="0">
+                <a:solidFill>
+                  <a:srgbClr val="0F1B2D"/>
+                </a:solidFill>
+                <a:latin typeface="IBM Plex Sans"/>
+              </a:rPr>
+              <a:t>Real data, approval</a:t>
+            </a:r>
+          </a:p>
+        </p:txBody>
+      </p:sp>
+      <p:sp>
+        <p:nvSpPr>
+          <p:cNvPr id="21" name="TextBox 20"/>
+          <p:cNvSpPr txBox="1"/>
+          <p:nvPr/>
+        </p:nvSpPr>
+        <p:spPr>
+          <a:xfrm>
+            <a:off x="8238744" y="4434840"/>
+            <a:ext cx="2935224" cy="1234440"/>
+          </a:xfrm>
+          <a:prstGeom prst="rect">
+            <a:avLst/>
+          </a:prstGeom>
+          <a:noFill/>
+        </p:spPr>
+        <p:txBody>
+          <a:bodyPr wrap="square" anchor="t" lIns="0" rIns="0" tIns="0" bIns="0">
+            <a:spAutoFit/>
+          </a:bodyPr>
+          <a:lstStyle/>
+          <a:p>
+            <a:pPr algn="l"/>
+            <a:r>
+              <a:rPr sz="1300" b="0" i="0">
+                <a:solidFill>
+                  <a:srgbClr val="3A4556"/>
+                </a:solidFill>
+                <a:latin typeface="IBM Plex Sans"/>
+              </a:rPr>
+              <a:t>One synthetic cohort; no demo approves a model. sacroml says 'proceed to next step'.</a:t>
+            </a:r>
+          </a:p>
+        </p:txBody>
+      </p:sp>
+      <p:sp>
+        <p:nvSpPr>
+          <p:cNvPr id="22" name="TextBox 21"/>
+          <p:cNvSpPr txBox="1"/>
+          <p:nvPr/>
+        </p:nvSpPr>
+        <p:spPr>
+          <a:xfrm>
+            <a:off x="813816" y="6236208"/>
+            <a:ext cx="10561320" cy="274320"/>
+          </a:xfrm>
+          <a:prstGeom prst="rect">
+            <a:avLst/>
+          </a:prstGeom>
+          <a:noFill/>
+        </p:spPr>
+        <p:txBody>
+          <a:bodyPr wrap="square" anchor="t" lIns="0" rIns="0" tIns="0" bIns="0">
+            <a:spAutoFit/>
+          </a:bodyPr>
+          <a:lstStyle/>
+          <a:p>
+            <a:pPr algn="l"/>
+            <a:r>
               <a:rPr sz="1200" b="0" i="0">
                 <a:solidFill>
                   <a:srgbClr val="5F6979"/>
                 </a:solidFill>
                 <a:latin typeface="IBM Plex Sans"/>
               </a:rPr>
-              <a:t>Tolerances are a demo risk appetite (ELA 8), not official cut-offs. Pattern from safety-trust-engine. demo/output/gate/.</a:t>
+              <a:t>docs/brief-for-presentation-and-guide.md, 'Claims to keep accurate'.</a:t>
             </a:r>
           </a:p>
         </p:txBody>
@@ -33263,13 +32964,13 @@
           <a:p>
             <a:pPr algn="l"/>
             <a:r>
-              <a:rPr sz="3000" b="1">
+              <a:rPr sz="2700" b="1">
                 <a:solidFill>
                   <a:srgbClr val="0F1B2D"/>
                 </a:solidFill>
                 <a:latin typeface="IBM Plex Sans"/>
               </a:rPr>
-              <a:t>Four demos and a gate, reports under demo/output</a:t>
+              <a:t>One gate, four lenses: GRAIMATTER passes, Article 15(5) fails</a:t>
             </a:r>
           </a:p>
         </p:txBody>
@@ -33304,43 +33005,600 @@
                 </a:solidFill>
                 <a:latin typeface="Consolas"/>
               </a:rPr>
-              <a:t>RUN IT YOURSELF</a:t>
-            </a:r>
-          </a:p>
-        </p:txBody>
-      </p:sp>
-      <p:sp>
-        <p:nvSpPr>
-          <p:cNvPr id="4" name="Rounded Rectangle 3"/>
-          <p:cNvSpPr/>
-          <p:nvPr/>
-        </p:nvSpPr>
-        <p:spPr>
-          <a:xfrm>
-            <a:off x="813816" y="2011680"/>
-            <a:ext cx="5669280" cy="3886200"/>
-          </a:xfrm>
-          <a:prstGeom prst="roundRect">
-            <a:avLst>
-              <a:gd name="adj" fmla="val 2823"/>
-            </a:avLst>
-          </a:prstGeom>
-          <a:solidFill>
-            <a:srgbClr val="0F1B2D"/>
-          </a:solidFill>
-          <a:ln>
-            <a:noFill/>
-          </a:ln>
-          <a:effectLst/>
-        </p:spPr>
-        <p:txBody>
-          <a:bodyPr rtlCol="0" anchor="ctr"/>
-          <a:lstStyle/>
-          <a:p>
-            <a:pPr algn="ctr"/>
-          </a:p>
-        </p:txBody>
-      </p:sp>
+              <a:t>RELEASE GATE · DEMO/RUN_GATE.PY · CI</a:t>
+            </a:r>
+          </a:p>
+        </p:txBody>
+      </p:sp>
+      <p:graphicFrame>
+        <p:nvGraphicFramePr>
+          <p:cNvPr id="4" name="Table 3"/>
+          <p:cNvGraphicFramePr>
+            <a:graphicFrameLocks noGrp="1"/>
+          </p:cNvGraphicFramePr>
+          <p:nvPr/>
+        </p:nvGraphicFramePr>
+        <p:xfrm>
+          <a:off x="813816" y="1920240"/>
+          <a:ext cx="6400800" cy="2103120"/>
+        </p:xfrm>
+        <a:graphic>
+          <a:graphicData uri="http://schemas.openxmlformats.org/drawingml/2006/table">
+            <a:tbl>
+              <a:tblPr firstRow="1" bandRow="1">
+                <a:tableStyleId>{5C22544A-7EE6-4342-B048-85BDC9FD1C3A}</a:tableStyleId>
+              </a:tblPr>
+              <a:tblGrid>
+                <a:gridCol w="2377440"/>
+                <a:gridCol w="960120"/>
+                <a:gridCol w="822960"/>
+                <a:gridCol w="822960"/>
+                <a:gridCol w="1417320"/>
+              </a:tblGrid>
+              <a:tr h="420624">
+                <a:tc>
+                  <a:txBody>
+                    <a:bodyPr wrap="square"/>
+                    <a:lstStyle/>
+                    <a:p>
+                      <a:r>
+                        <a:rPr sz="1300" b="1">
+                          <a:solidFill>
+                            <a:srgbClr val="F6F5F0"/>
+                          </a:solidFill>
+                          <a:latin typeface="IBM Plex Sans"/>
+                        </a:rPr>
+                        <a:t>Pack</a:t>
+                      </a:r>
+                    </a:p>
+                  </a:txBody>
+                  <a:tcPr marL="91440" marR="91440" marT="36576" marB="36576" anchor="ctr">
+                    <a:solidFill>
+                      <a:srgbClr val="0F1B2D"/>
+                    </a:solidFill>
+                  </a:tcPr>
+                </a:tc>
+                <a:tc>
+                  <a:txBody>
+                    <a:bodyPr wrap="square"/>
+                    <a:lstStyle/>
+                    <a:p>
+                      <a:r>
+                        <a:rPr sz="1300" b="1">
+                          <a:solidFill>
+                            <a:srgbClr val="F6F5F0"/>
+                          </a:solidFill>
+                          <a:latin typeface="IBM Plex Sans"/>
+                        </a:rPr>
+                        <a:t>Controls</a:t>
+                      </a:r>
+                    </a:p>
+                  </a:txBody>
+                  <a:tcPr marL="91440" marR="91440" marT="36576" marB="36576" anchor="ctr">
+                    <a:solidFill>
+                      <a:srgbClr val="0F1B2D"/>
+                    </a:solidFill>
+                  </a:tcPr>
+                </a:tc>
+                <a:tc>
+                  <a:txBody>
+                    <a:bodyPr wrap="square"/>
+                    <a:lstStyle/>
+                    <a:p>
+                      <a:r>
+                        <a:rPr sz="1300" b="1">
+                          <a:solidFill>
+                            <a:srgbClr val="F6F5F0"/>
+                          </a:solidFill>
+                          <a:latin typeface="IBM Plex Sans"/>
+                        </a:rPr>
+                        <a:t>Pass</a:t>
+                      </a:r>
+                    </a:p>
+                  </a:txBody>
+                  <a:tcPr marL="91440" marR="91440" marT="36576" marB="36576" anchor="ctr">
+                    <a:solidFill>
+                      <a:srgbClr val="0F1B2D"/>
+                    </a:solidFill>
+                  </a:tcPr>
+                </a:tc>
+                <a:tc>
+                  <a:txBody>
+                    <a:bodyPr wrap="square"/>
+                    <a:lstStyle/>
+                    <a:p>
+                      <a:r>
+                        <a:rPr sz="1300" b="1">
+                          <a:solidFill>
+                            <a:srgbClr val="F6F5F0"/>
+                          </a:solidFill>
+                          <a:latin typeface="IBM Plex Sans"/>
+                        </a:rPr>
+                        <a:t>Fail</a:t>
+                      </a:r>
+                    </a:p>
+                  </a:txBody>
+                  <a:tcPr marL="91440" marR="91440" marT="36576" marB="36576" anchor="ctr">
+                    <a:solidFill>
+                      <a:srgbClr val="0F1B2D"/>
+                    </a:solidFill>
+                  </a:tcPr>
+                </a:tc>
+                <a:tc>
+                  <a:txBody>
+                    <a:bodyPr wrap="square"/>
+                    <a:lstStyle/>
+                    <a:p>
+                      <a:r>
+                        <a:rPr sz="1300" b="1">
+                          <a:solidFill>
+                            <a:srgbClr val="F6F5F0"/>
+                          </a:solidFill>
+                          <a:latin typeface="IBM Plex Sans"/>
+                        </a:rPr>
+                        <a:t>Not evidenced</a:t>
+                      </a:r>
+                    </a:p>
+                  </a:txBody>
+                  <a:tcPr marL="91440" marR="91440" marT="36576" marB="36576" anchor="ctr">
+                    <a:solidFill>
+                      <a:srgbClr val="0F1B2D"/>
+                    </a:solidFill>
+                  </a:tcPr>
+                </a:tc>
+              </a:tr>
+              <a:tr h="420624">
+                <a:tc>
+                  <a:txBody>
+                    <a:bodyPr wrap="square"/>
+                    <a:lstStyle/>
+                    <a:p>
+                      <a:r>
+                        <a:rPr sz="1300" b="1">
+                          <a:solidFill>
+                            <a:srgbClr val="0F1B2D"/>
+                          </a:solidFill>
+                          <a:latin typeface="IBM Plex Sans"/>
+                        </a:rPr>
+                        <a:t>EU AI Act 15(5), UK Code</a:t>
+                      </a:r>
+                    </a:p>
+                  </a:txBody>
+                  <a:tcPr marL="91440" marR="91440" marT="36576" marB="36576" anchor="ctr">
+                    <a:solidFill>
+                      <a:srgbClr val="FDFCF9"/>
+                    </a:solidFill>
+                  </a:tcPr>
+                </a:tc>
+                <a:tc>
+                  <a:txBody>
+                    <a:bodyPr wrap="square"/>
+                    <a:lstStyle/>
+                    <a:p>
+                      <a:r>
+                        <a:rPr sz="1300" b="0">
+                          <a:solidFill>
+                            <a:srgbClr val="3A4556"/>
+                          </a:solidFill>
+                          <a:latin typeface="IBM Plex Sans"/>
+                        </a:rPr>
+                        <a:t>8</a:t>
+                      </a:r>
+                    </a:p>
+                  </a:txBody>
+                  <a:tcPr marL="91440" marR="91440" marT="36576" marB="36576" anchor="ctr">
+                    <a:solidFill>
+                      <a:srgbClr val="FDFCF9"/>
+                    </a:solidFill>
+                  </a:tcPr>
+                </a:tc>
+                <a:tc>
+                  <a:txBody>
+                    <a:bodyPr wrap="square"/>
+                    <a:lstStyle/>
+                    <a:p>
+                      <a:r>
+                        <a:rPr sz="1300" b="0">
+                          <a:solidFill>
+                            <a:srgbClr val="3A4556"/>
+                          </a:solidFill>
+                          <a:latin typeface="IBM Plex Sans"/>
+                        </a:rPr>
+                        <a:t>2</a:t>
+                      </a:r>
+                    </a:p>
+                  </a:txBody>
+                  <a:tcPr marL="91440" marR="91440" marT="36576" marB="36576" anchor="ctr">
+                    <a:solidFill>
+                      <a:srgbClr val="FDFCF9"/>
+                    </a:solidFill>
+                  </a:tcPr>
+                </a:tc>
+                <a:tc>
+                  <a:txBody>
+                    <a:bodyPr wrap="square"/>
+                    <a:lstStyle/>
+                    <a:p>
+                      <a:r>
+                        <a:rPr sz="1300" b="0">
+                          <a:solidFill>
+                            <a:srgbClr val="3A4556"/>
+                          </a:solidFill>
+                          <a:latin typeface="IBM Plex Sans"/>
+                        </a:rPr>
+                        <a:t>6</a:t>
+                      </a:r>
+                    </a:p>
+                  </a:txBody>
+                  <a:tcPr marL="91440" marR="91440" marT="36576" marB="36576" anchor="ctr">
+                    <a:solidFill>
+                      <a:srgbClr val="FBE9DC"/>
+                    </a:solidFill>
+                  </a:tcPr>
+                </a:tc>
+                <a:tc>
+                  <a:txBody>
+                    <a:bodyPr wrap="square"/>
+                    <a:lstStyle/>
+                    <a:p>
+                      <a:r>
+                        <a:rPr sz="1300" b="0">
+                          <a:solidFill>
+                            <a:srgbClr val="3A4556"/>
+                          </a:solidFill>
+                          <a:latin typeface="IBM Plex Sans"/>
+                        </a:rPr>
+                        <a:t>0</a:t>
+                      </a:r>
+                    </a:p>
+                  </a:txBody>
+                  <a:tcPr marL="91440" marR="91440" marT="36576" marB="36576" anchor="ctr">
+                    <a:solidFill>
+                      <a:srgbClr val="FDFCF9"/>
+                    </a:solidFill>
+                  </a:tcPr>
+                </a:tc>
+              </a:tr>
+              <a:tr h="420624">
+                <a:tc>
+                  <a:txBody>
+                    <a:bodyPr wrap="square"/>
+                    <a:lstStyle/>
+                    <a:p>
+                      <a:r>
+                        <a:rPr sz="1300" b="1">
+                          <a:solidFill>
+                            <a:srgbClr val="0F1B2D"/>
+                          </a:solidFill>
+                          <a:latin typeface="IBM Plex Sans"/>
+                        </a:rPr>
+                        <a:t>NIST AI 100-2</a:t>
+                      </a:r>
+                    </a:p>
+                  </a:txBody>
+                  <a:tcPr marL="91440" marR="91440" marT="36576" marB="36576" anchor="ctr">
+                    <a:solidFill>
+                      <a:srgbClr val="F1EFE8"/>
+                    </a:solidFill>
+                  </a:tcPr>
+                </a:tc>
+                <a:tc>
+                  <a:txBody>
+                    <a:bodyPr wrap="square"/>
+                    <a:lstStyle/>
+                    <a:p>
+                      <a:r>
+                        <a:rPr sz="1300" b="0">
+                          <a:solidFill>
+                            <a:srgbClr val="3A4556"/>
+                          </a:solidFill>
+                          <a:latin typeface="IBM Plex Sans"/>
+                        </a:rPr>
+                        <a:t>6</a:t>
+                      </a:r>
+                    </a:p>
+                  </a:txBody>
+                  <a:tcPr marL="91440" marR="91440" marT="36576" marB="36576" anchor="ctr">
+                    <a:solidFill>
+                      <a:srgbClr val="F1EFE8"/>
+                    </a:solidFill>
+                  </a:tcPr>
+                </a:tc>
+                <a:tc>
+                  <a:txBody>
+                    <a:bodyPr wrap="square"/>
+                    <a:lstStyle/>
+                    <a:p>
+                      <a:r>
+                        <a:rPr sz="1300" b="0">
+                          <a:solidFill>
+                            <a:srgbClr val="3A4556"/>
+                          </a:solidFill>
+                          <a:latin typeface="IBM Plex Sans"/>
+                        </a:rPr>
+                        <a:t>3</a:t>
+                      </a:r>
+                    </a:p>
+                  </a:txBody>
+                  <a:tcPr marL="91440" marR="91440" marT="36576" marB="36576" anchor="ctr">
+                    <a:solidFill>
+                      <a:srgbClr val="F1EFE8"/>
+                    </a:solidFill>
+                  </a:tcPr>
+                </a:tc>
+                <a:tc>
+                  <a:txBody>
+                    <a:bodyPr wrap="square"/>
+                    <a:lstStyle/>
+                    <a:p>
+                      <a:r>
+                        <a:rPr sz="1300" b="0">
+                          <a:solidFill>
+                            <a:srgbClr val="3A4556"/>
+                          </a:solidFill>
+                          <a:latin typeface="IBM Plex Sans"/>
+                        </a:rPr>
+                        <a:t>3</a:t>
+                      </a:r>
+                    </a:p>
+                  </a:txBody>
+                  <a:tcPr marL="91440" marR="91440" marT="36576" marB="36576" anchor="ctr">
+                    <a:solidFill>
+                      <a:srgbClr val="FBE9DC"/>
+                    </a:solidFill>
+                  </a:tcPr>
+                </a:tc>
+                <a:tc>
+                  <a:txBody>
+                    <a:bodyPr wrap="square"/>
+                    <a:lstStyle/>
+                    <a:p>
+                      <a:r>
+                        <a:rPr sz="1300" b="0">
+                          <a:solidFill>
+                            <a:srgbClr val="3A4556"/>
+                          </a:solidFill>
+                          <a:latin typeface="IBM Plex Sans"/>
+                        </a:rPr>
+                        <a:t>0</a:t>
+                      </a:r>
+                    </a:p>
+                  </a:txBody>
+                  <a:tcPr marL="91440" marR="91440" marT="36576" marB="36576" anchor="ctr">
+                    <a:solidFill>
+                      <a:srgbClr val="F1EFE8"/>
+                    </a:solidFill>
+                  </a:tcPr>
+                </a:tc>
+              </a:tr>
+              <a:tr h="420624">
+                <a:tc>
+                  <a:txBody>
+                    <a:bodyPr wrap="square"/>
+                    <a:lstStyle/>
+                    <a:p>
+                      <a:r>
+                        <a:rPr sz="1300" b="1">
+                          <a:solidFill>
+                            <a:srgbClr val="0F1B2D"/>
+                          </a:solidFill>
+                          <a:latin typeface="IBM Plex Sans"/>
+                        </a:rPr>
+                        <a:t>GRAIMATTER TECH</a:t>
+                      </a:r>
+                    </a:p>
+                  </a:txBody>
+                  <a:tcPr marL="91440" marR="91440" marT="36576" marB="36576" anchor="ctr">
+                    <a:solidFill>
+                      <a:srgbClr val="FDFCF9"/>
+                    </a:solidFill>
+                  </a:tcPr>
+                </a:tc>
+                <a:tc>
+                  <a:txBody>
+                    <a:bodyPr wrap="square"/>
+                    <a:lstStyle/>
+                    <a:p>
+                      <a:r>
+                        <a:rPr sz="1300" b="0">
+                          <a:solidFill>
+                            <a:srgbClr val="3A4556"/>
+                          </a:solidFill>
+                          <a:latin typeface="IBM Plex Sans"/>
+                        </a:rPr>
+                        <a:t>6</a:t>
+                      </a:r>
+                    </a:p>
+                  </a:txBody>
+                  <a:tcPr marL="91440" marR="91440" marT="36576" marB="36576" anchor="ctr">
+                    <a:solidFill>
+                      <a:srgbClr val="FDFCF9"/>
+                    </a:solidFill>
+                  </a:tcPr>
+                </a:tc>
+                <a:tc>
+                  <a:txBody>
+                    <a:bodyPr wrap="square"/>
+                    <a:lstStyle/>
+                    <a:p>
+                      <a:r>
+                        <a:rPr sz="1300" b="0">
+                          <a:solidFill>
+                            <a:srgbClr val="3A4556"/>
+                          </a:solidFill>
+                          <a:latin typeface="IBM Plex Sans"/>
+                        </a:rPr>
+                        <a:t>5</a:t>
+                      </a:r>
+                    </a:p>
+                  </a:txBody>
+                  <a:tcPr marL="91440" marR="91440" marT="36576" marB="36576" anchor="ctr">
+                    <a:solidFill>
+                      <a:srgbClr val="DCEBDD"/>
+                    </a:solidFill>
+                  </a:tcPr>
+                </a:tc>
+                <a:tc>
+                  <a:txBody>
+                    <a:bodyPr wrap="square"/>
+                    <a:lstStyle/>
+                    <a:p>
+                      <a:r>
+                        <a:rPr sz="1300" b="0">
+                          <a:solidFill>
+                            <a:srgbClr val="3A4556"/>
+                          </a:solidFill>
+                          <a:latin typeface="IBM Plex Sans"/>
+                        </a:rPr>
+                        <a:t>0</a:t>
+                      </a:r>
+                    </a:p>
+                  </a:txBody>
+                  <a:tcPr marL="91440" marR="91440" marT="36576" marB="36576" anchor="ctr">
+                    <a:solidFill>
+                      <a:srgbClr val="FDFCF9"/>
+                    </a:solidFill>
+                  </a:tcPr>
+                </a:tc>
+                <a:tc>
+                  <a:txBody>
+                    <a:bodyPr wrap="square"/>
+                    <a:lstStyle/>
+                    <a:p>
+                      <a:r>
+                        <a:rPr sz="1300" b="0">
+                          <a:solidFill>
+                            <a:srgbClr val="3A4556"/>
+                          </a:solidFill>
+                          <a:latin typeface="IBM Plex Sans"/>
+                        </a:rPr>
+                        <a:t>1 (demo 2)</a:t>
+                      </a:r>
+                    </a:p>
+                  </a:txBody>
+                  <a:tcPr marL="91440" marR="91440" marT="36576" marB="36576" anchor="ctr">
+                    <a:solidFill>
+                      <a:srgbClr val="FDFCF9"/>
+                    </a:solidFill>
+                  </a:tcPr>
+                </a:tc>
+              </a:tr>
+              <a:tr h="420624">
+                <a:tc>
+                  <a:txBody>
+                    <a:bodyPr wrap="square"/>
+                    <a:lstStyle/>
+                    <a:p>
+                      <a:r>
+                        <a:rPr sz="1300" b="1">
+                          <a:solidFill>
+                            <a:srgbClr val="0F1B2D"/>
+                          </a:solidFill>
+                          <a:latin typeface="IBM Plex Sans"/>
+                        </a:rPr>
+                        <a:t>NIST AI RMF, SR 26-02</a:t>
+                      </a:r>
+                    </a:p>
+                  </a:txBody>
+                  <a:tcPr marL="91440" marR="91440" marT="36576" marB="36576" anchor="ctr">
+                    <a:solidFill>
+                      <a:srgbClr val="F1EFE8"/>
+                    </a:solidFill>
+                  </a:tcPr>
+                </a:tc>
+                <a:tc>
+                  <a:txBody>
+                    <a:bodyPr wrap="square"/>
+                    <a:lstStyle/>
+                    <a:p>
+                      <a:r>
+                        <a:rPr sz="1300" b="0">
+                          <a:solidFill>
+                            <a:srgbClr val="3A4556"/>
+                          </a:solidFill>
+                          <a:latin typeface="IBM Plex Sans"/>
+                        </a:rPr>
+                        <a:t>8</a:t>
+                      </a:r>
+                    </a:p>
+                  </a:txBody>
+                  <a:tcPr marL="91440" marR="91440" marT="36576" marB="36576" anchor="ctr">
+                    <a:solidFill>
+                      <a:srgbClr val="F1EFE8"/>
+                    </a:solidFill>
+                  </a:tcPr>
+                </a:tc>
+                <a:tc>
+                  <a:txBody>
+                    <a:bodyPr wrap="square"/>
+                    <a:lstStyle/>
+                    <a:p>
+                      <a:r>
+                        <a:rPr sz="1300" b="0">
+                          <a:solidFill>
+                            <a:srgbClr val="3A4556"/>
+                          </a:solidFill>
+                          <a:latin typeface="IBM Plex Sans"/>
+                        </a:rPr>
+                        <a:t>5</a:t>
+                      </a:r>
+                    </a:p>
+                  </a:txBody>
+                  <a:tcPr marL="91440" marR="91440" marT="36576" marB="36576" anchor="ctr">
+                    <a:solidFill>
+                      <a:srgbClr val="F1EFE8"/>
+                    </a:solidFill>
+                  </a:tcPr>
+                </a:tc>
+                <a:tc>
+                  <a:txBody>
+                    <a:bodyPr wrap="square"/>
+                    <a:lstStyle/>
+                    <a:p>
+                      <a:r>
+                        <a:rPr sz="1300" b="0">
+                          <a:solidFill>
+                            <a:srgbClr val="3A4556"/>
+                          </a:solidFill>
+                          <a:latin typeface="IBM Plex Sans"/>
+                        </a:rPr>
+                        <a:t>3</a:t>
+                      </a:r>
+                    </a:p>
+                  </a:txBody>
+                  <a:tcPr marL="91440" marR="91440" marT="36576" marB="36576" anchor="ctr">
+                    <a:solidFill>
+                      <a:srgbClr val="FBE9DC"/>
+                    </a:solidFill>
+                  </a:tcPr>
+                </a:tc>
+                <a:tc>
+                  <a:txBody>
+                    <a:bodyPr wrap="square"/>
+                    <a:lstStyle/>
+                    <a:p>
+                      <a:r>
+                        <a:rPr sz="1300" b="0">
+                          <a:solidFill>
+                            <a:srgbClr val="3A4556"/>
+                          </a:solidFill>
+                          <a:latin typeface="IBM Plex Sans"/>
+                        </a:rPr>
+                        <a:t>0</a:t>
+                      </a:r>
+                    </a:p>
+                  </a:txBody>
+                  <a:tcPr marL="91440" marR="91440" marT="36576" marB="36576" anchor="ctr">
+                    <a:solidFill>
+                      <a:srgbClr val="F1EFE8"/>
+                    </a:solidFill>
+                  </a:tcPr>
+                </a:tc>
+              </a:tr>
+            </a:tbl>
+          </a:graphicData>
+        </a:graphic>
+      </p:graphicFrame>
       <p:sp>
         <p:nvSpPr>
           <p:cNvPr id="5" name="TextBox 4"/>
@@ -33349,8 +33607,8 @@
         </p:nvSpPr>
         <p:spPr>
           <a:xfrm>
-            <a:off x="1088136" y="2194560"/>
-            <a:ext cx="5212080" cy="3566160"/>
+            <a:off x="813816" y="4114800"/>
+            <a:ext cx="6400800" cy="1188720"/>
           </a:xfrm>
           <a:prstGeom prst="rect">
             <a:avLst/>
@@ -33365,13 +33623,22 @@
           <a:p>
             <a:pPr algn="l"/>
             <a:r>
-              <a:rPr sz="1250" b="0" i="0">
-                <a:solidFill>
-                  <a:srgbClr val="F6F5F0"/>
-                </a:solidFill>
-                <a:latin typeface="Consolas"/>
-              </a:rPr>
-              <a:t>uv venv --python 3.11</a:t>
+              <a:rPr sz="1300" b="1" i="0">
+                <a:solidFill>
+                  <a:srgbClr val="3A4556"/>
+                </a:solidFill>
+                <a:latin typeface="IBM Plex Sans"/>
+              </a:rPr>
+              <a:t>Breached: </a:t>
+            </a:r>
+            <a:r>
+              <a:rPr sz="1300" b="0" i="0">
+                <a:solidFill>
+                  <a:srgbClr val="3A4556"/>
+                </a:solidFill>
+                <a:latin typeface="IBM Plex Sans"/>
+              </a:rPr>
+              <a:t>evasion 78.7% (tolerance 10%), a copy agreeing 86.9% after one 200-row budget (80%), a backdoor lifting trigger success by 71.7 points (tolerance 10).</a:t>
             </a:r>
           </a:p>
           <a:p>
@@ -33381,189 +33648,22 @@
               </a:spcBef>
             </a:pPr>
             <a:r>
-              <a:rPr sz="1250" b="0" i="0">
-                <a:solidFill>
-                  <a:srgbClr val="F6F5F0"/>
-                </a:solidFill>
-                <a:latin typeface="Consolas"/>
-              </a:rPr>
-              <a:t>uv pip install -r demo/requirements.txt</a:t>
-            </a:r>
-          </a:p>
-          <a:p>
-            <a:pPr algn="l">
-              <a:spcBef>
-                <a:spcPts val="600"/>
-              </a:spcBef>
-            </a:pPr>
-            <a:r>
-              <a:rPr sz="1250" b="0" i="0">
-                <a:solidFill>
-                  <a:srgbClr val="F6F5F0"/>
-                </a:solidFill>
-                <a:latin typeface="Consolas"/>
-              </a:rPr>
-              <a:t/>
-            </a:r>
-          </a:p>
-          <a:p>
-            <a:pPr algn="l">
-              <a:spcBef>
-                <a:spcPts val="600"/>
-              </a:spcBef>
-            </a:pPr>
-            <a:r>
-              <a:rPr sz="1250" b="0" i="0">
-                <a:solidFill>
-                  <a:srgbClr val="F6F5F0"/>
-                </a:solidFill>
-                <a:latin typeface="Consolas"/>
-              </a:rPr>
-              <a:t>uv run python demo/run_aml_demo.py</a:t>
-            </a:r>
-          </a:p>
-          <a:p>
-            <a:pPr algn="l">
-              <a:spcBef>
-                <a:spcPts val="600"/>
-              </a:spcBef>
-            </a:pPr>
-            <a:r>
-              <a:rPr sz="1250" b="0" i="0">
-                <a:solidFill>
-                  <a:srgbClr val="F6F5F0"/>
-                </a:solidFill>
-                <a:latin typeface="Consolas"/>
-              </a:rPr>
-              <a:t>uv run python demo/run_supply_chain_demo.py</a:t>
-            </a:r>
-          </a:p>
-          <a:p>
-            <a:pPr algn="l">
-              <a:spcBef>
-                <a:spcPts val="600"/>
-              </a:spcBef>
-            </a:pPr>
-            <a:r>
-              <a:rPr sz="1250" b="0" i="0">
-                <a:solidFill>
-                  <a:srgbClr val="F6F5F0"/>
-                </a:solidFill>
-                <a:latin typeface="Consolas"/>
-              </a:rPr>
-              <a:t>uv run python demo/run_demo.py</a:t>
-            </a:r>
-          </a:p>
-          <a:p>
-            <a:pPr algn="l">
-              <a:spcBef>
-                <a:spcPts val="600"/>
-              </a:spcBef>
-            </a:pPr>
-            <a:r>
-              <a:rPr sz="1250" b="0" i="0">
-                <a:solidFill>
-                  <a:srgbClr val="F6F5F0"/>
-                </a:solidFill>
-                <a:latin typeface="Consolas"/>
-              </a:rPr>
-              <a:t>uv run python demo/run_sacroml_demo.py</a:t>
-            </a:r>
-          </a:p>
-          <a:p>
-            <a:pPr algn="l">
-              <a:spcBef>
-                <a:spcPts val="600"/>
-              </a:spcBef>
-            </a:pPr>
-            <a:r>
-              <a:rPr sz="1250" b="0" i="0">
-                <a:solidFill>
-                  <a:srgbClr val="F6F5F0"/>
-                </a:solidFill>
-                <a:latin typeface="Consolas"/>
-              </a:rPr>
-              <a:t>uv run python demo/run_gate.py</a:t>
-            </a:r>
-          </a:p>
-          <a:p>
-            <a:pPr algn="l">
-              <a:spcBef>
-                <a:spcPts val="600"/>
-              </a:spcBef>
-            </a:pPr>
-            <a:r>
-              <a:rPr sz="1250" b="0" i="0">
-                <a:solidFill>
-                  <a:srgbClr val="F6F5F0"/>
-                </a:solidFill>
-                <a:latin typeface="Consolas"/>
-              </a:rPr>
-              <a:t/>
-            </a:r>
-          </a:p>
-          <a:p>
-            <a:pPr algn="l">
-              <a:spcBef>
-                <a:spcPts val="600"/>
-              </a:spcBef>
-            </a:pPr>
-            <a:r>
-              <a:rPr sz="1250" b="0" i="0">
-                <a:solidFill>
-                  <a:srgbClr val="F6F5F0"/>
-                </a:solidFill>
-                <a:latin typeface="Consolas"/>
-              </a:rPr>
-              <a:t># figures and this deck</a:t>
-            </a:r>
-          </a:p>
-          <a:p>
-            <a:pPr algn="l">
-              <a:spcBef>
-                <a:spcPts val="600"/>
-              </a:spcBef>
-            </a:pPr>
-            <a:r>
-              <a:rPr sz="1250" b="0" i="0">
-                <a:solidFill>
-                  <a:srgbClr val="F6F5F0"/>
-                </a:solidFill>
-                <a:latin typeface="Consolas"/>
-              </a:rPr>
-              <a:t>python docs/guide/make_figures.py</a:t>
-            </a:r>
-          </a:p>
-          <a:p>
-            <a:pPr algn="l">
-              <a:spcBef>
-                <a:spcPts val="600"/>
-              </a:spcBef>
-            </a:pPr>
-            <a:r>
-              <a:rPr sz="1250" b="0" i="0">
-                <a:solidFill>
-                  <a:srgbClr val="F6F5F0"/>
-                </a:solidFill>
-                <a:latin typeface="Consolas"/>
-              </a:rPr>
-              <a:t>python docs/guide/make_aml_figures.py</a:t>
-            </a:r>
-          </a:p>
-          <a:p>
-            <a:pPr algn="l">
-              <a:spcBef>
-                <a:spcPts val="600"/>
-              </a:spcBef>
-            </a:pPr>
-            <a:r>
-              <a:rPr sz="1250" b="0" i="0">
-                <a:solidFill>
-                  <a:srgbClr val="F6F5F0"/>
-                </a:solidFill>
-                <a:latin typeface="Consolas"/>
-              </a:rPr>
-              <a:t>python docs/make_deck.py</a:t>
+              <a:rPr sz="1300" b="1" i="0">
+                <a:solidFill>
+                  <a:srgbClr val="3A4556"/>
+                </a:solidFill>
+                <a:latin typeface="IBM Plex Sans"/>
+              </a:rPr>
+              <a:t>Within: </a:t>
+            </a:r>
+            <a:r>
+              <a:rPr sz="1300" b="0" i="0">
+                <a:solidFill>
+                  <a:srgbClr val="3A4556"/>
+                </a:solidFill>
+                <a:latin typeface="IBM Plex Sans"/>
+              </a:rPr>
+              <a:t>membership, attribute, holdout gap, stored rows, release checks, query budget, and the supply chain: no tampered file of demo 4 gets past the pin and the scan or floor.</a:t>
             </a:r>
           </a:p>
         </p:txBody>
@@ -33576,12 +33676,12 @@
         </p:nvSpPr>
         <p:spPr>
           <a:xfrm>
-            <a:off x="6757416" y="2011680"/>
-            <a:ext cx="4617720" cy="1188720"/>
+            <a:off x="7534656" y="1920240"/>
+            <a:ext cx="3840480" cy="1874519"/>
           </a:xfrm>
           <a:prstGeom prst="roundRect">
             <a:avLst>
-              <a:gd name="adj" fmla="val 8000"/>
+              <a:gd name="adj" fmla="val 5853"/>
             </a:avLst>
           </a:prstGeom>
           <a:solidFill>
@@ -33610,8 +33710,8 @@
         </p:nvSpPr>
         <p:spPr>
           <a:xfrm>
-            <a:off x="6958583" y="2194560"/>
-            <a:ext cx="4215383" cy="365760"/>
+            <a:off x="7735824" y="2103120"/>
+            <a:ext cx="3438144" cy="365760"/>
           </a:xfrm>
           <a:prstGeom prst="rect">
             <a:avLst/>
@@ -33632,7 +33732,7 @@
                 </a:solidFill>
                 <a:latin typeface="IBM Plex Sans"/>
               </a:rPr>
-              <a:t>Demos 3 and 4 · seconds</a:t>
+              <a:t>Never a silent green</a:t>
             </a:r>
           </a:p>
         </p:txBody>
@@ -33645,8 +33745,8 @@
         </p:nvSpPr>
         <p:spPr>
           <a:xfrm>
-            <a:off x="6958583" y="2468880"/>
-            <a:ext cx="4215383" cy="640080"/>
+            <a:off x="7735824" y="2377440"/>
+            <a:ext cx="3438144" cy="1325879"/>
           </a:xfrm>
           <a:prstGeom prst="rect">
             <a:avLst/>
@@ -33667,7 +33767,7 @@
                 </a:solidFill>
                 <a:latin typeface="IBM Plex Sans"/>
               </a:rPr>
-              <a:t>aml_report.txt: evasion, extraction, backdoor. supply_chain_report.txt: four tampered files.</a:t>
+              <a:t>A control whose demo did not run is not_evidenced, not pass. CI does not install sacroml, so it declares demo 2 out of scope with --accept-missing 2 and the report says so.</a:t>
             </a:r>
           </a:p>
         </p:txBody>
@@ -33680,7 +33780,513 @@
         </p:nvSpPr>
         <p:spPr>
           <a:xfrm>
-            <a:off x="6757416" y="3337560"/>
+            <a:off x="7534656" y="3931920"/>
+            <a:ext cx="3840480" cy="1874519"/>
+          </a:xfrm>
+          <a:prstGeom prst="roundRect">
+            <a:avLst>
+              <a:gd name="adj" fmla="val 5853"/>
+            </a:avLst>
+          </a:prstGeom>
+          <a:solidFill>
+            <a:srgbClr val="0F1B2D"/>
+          </a:solidFill>
+          <a:ln>
+            <a:noFill/>
+          </a:ln>
+          <a:effectLst/>
+        </p:spPr>
+        <p:txBody>
+          <a:bodyPr rtlCol="0" anchor="ctr"/>
+          <a:lstStyle/>
+          <a:p>
+            <a:pPr algn="ctr"/>
+          </a:p>
+        </p:txBody>
+      </p:sp>
+      <p:sp>
+        <p:nvSpPr>
+          <p:cNvPr id="10" name="TextBox 9"/>
+          <p:cNvSpPr txBox="1"/>
+          <p:nvPr/>
+        </p:nvSpPr>
+        <p:spPr>
+          <a:xfrm>
+            <a:off x="7735824" y="4114800"/>
+            <a:ext cx="3438144" cy="365760"/>
+          </a:xfrm>
+          <a:prstGeom prst="rect">
+            <a:avLst/>
+          </a:prstGeom>
+          <a:noFill/>
+        </p:spPr>
+        <p:txBody>
+          <a:bodyPr wrap="square" anchor="t" lIns="0" rIns="0" tIns="0" bIns="0">
+            <a:spAutoFit/>
+          </a:bodyPr>
+          <a:lstStyle/>
+          <a:p>
+            <a:pPr algn="l"/>
+            <a:r>
+              <a:rPr sz="1600" b="1" i="0">
+                <a:solidFill>
+                  <a:srgbClr val="F2A35E"/>
+                </a:solidFill>
+                <a:latin typeface="IBM Plex Sans"/>
+              </a:rPr>
+              <a:t>Read with SR 26-02</a:t>
+            </a:r>
+          </a:p>
+        </p:txBody>
+      </p:sp>
+      <p:sp>
+        <p:nvSpPr>
+          <p:cNvPr id="11" name="TextBox 10"/>
+          <p:cNvSpPr txBox="1"/>
+          <p:nvPr/>
+        </p:nvSpPr>
+        <p:spPr>
+          <a:xfrm>
+            <a:off x="7735824" y="4389120"/>
+            <a:ext cx="3438144" cy="1325879"/>
+          </a:xfrm>
+          <a:prstGeom prst="rect">
+            <a:avLst/>
+          </a:prstGeom>
+          <a:noFill/>
+        </p:spPr>
+        <p:txBody>
+          <a:bodyPr wrap="square" anchor="t" lIns="0" rIns="0" tIns="0" bIns="0">
+            <a:spAutoFit/>
+          </a:bodyPr>
+          <a:lstStyle/>
+          <a:p>
+            <a:pPr algn="l"/>
+            <a:r>
+              <a:rPr sz="1250" b="0" i="0">
+                <a:solidFill>
+                  <a:srgbClr val="D9DEE6"/>
+                </a:solidFill>
+                <a:latin typeface="IBM Plex Sans"/>
+              </a:rPr>
+              <a:t>A risk classifier is a model in the plain sense of model risk guidance. The TRE holdout (TECH 6) is the independent validation; the gate in CI is the ongoing monitoring.</a:t>
+            </a:r>
+          </a:p>
+        </p:txBody>
+      </p:sp>
+      <p:sp>
+        <p:nvSpPr>
+          <p:cNvPr id="12" name="TextBox 11"/>
+          <p:cNvSpPr txBox="1"/>
+          <p:nvPr/>
+        </p:nvSpPr>
+        <p:spPr>
+          <a:xfrm>
+            <a:off x="813816" y="6236208"/>
+            <a:ext cx="10561320" cy="274320"/>
+          </a:xfrm>
+          <a:prstGeom prst="rect">
+            <a:avLst/>
+          </a:prstGeom>
+          <a:noFill/>
+        </p:spPr>
+        <p:txBody>
+          <a:bodyPr wrap="square" anchor="t" lIns="0" rIns="0" tIns="0" bIns="0">
+            <a:spAutoFit/>
+          </a:bodyPr>
+          <a:lstStyle/>
+          <a:p>
+            <a:pPr algn="l"/>
+            <a:r>
+              <a:rPr sz="1200" b="0" i="0">
+                <a:solidFill>
+                  <a:srgbClr val="5F6979"/>
+                </a:solidFill>
+                <a:latin typeface="IBM Plex Sans"/>
+              </a:rPr>
+              <a:t>Tolerances are a demo risk appetite (ELA 8), not official cut-offs. Pattern from safety-trust-engine. demo/output/gate/.</a:t>
+            </a:r>
+          </a:p>
+        </p:txBody>
+      </p:sp>
+    </p:spTree>
+  </p:cSld>
+  <p:clrMapOvr>
+    <a:masterClrMapping/>
+  </p:clrMapOvr>
+</p:sld>
+</file>
+
+<file path=ppt/slides/slide53.xml><?xml version="1.0" encoding="utf-8"?>
+<p:sld xmlns:a="http://schemas.openxmlformats.org/drawingml/2006/main" xmlns:p="http://schemas.openxmlformats.org/presentationml/2006/main" xmlns:r="http://schemas.openxmlformats.org/officeDocument/2006/relationships">
+  <p:cSld>
+    <p:bg>
+      <p:bgPr>
+        <a:solidFill>
+          <a:srgbClr val="F6F5F0"/>
+        </a:solidFill>
+        <a:effectLst/>
+      </p:bgPr>
+    </p:bg>
+    <p:spTree>
+      <p:nvGrpSpPr>
+        <p:cNvPr id="1" name=""/>
+        <p:cNvGrpSpPr/>
+        <p:nvPr/>
+      </p:nvGrpSpPr>
+      <p:grpSpPr/>
+      <p:sp>
+        <p:nvSpPr>
+          <p:cNvPr id="2" name="Title 1"/>
+          <p:cNvSpPr>
+            <a:spLocks noGrp="1"/>
+          </p:cNvSpPr>
+          <p:nvPr>
+            <p:ph type="title"/>
+          </p:nvPr>
+        </p:nvSpPr>
+        <p:spPr>
+          <a:xfrm>
+            <a:off x="813816" y="1207008"/>
+            <a:ext cx="10561320" cy="868680"/>
+          </a:xfrm>
+        </p:spPr>
+        <p:txBody>
+          <a:bodyPr wrap="square" anchor="t" lIns="0" rIns="0" tIns="0" bIns="0"/>
+          <a:lstStyle/>
+          <a:p>
+            <a:pPr algn="l"/>
+            <a:r>
+              <a:rPr sz="3000" b="1">
+                <a:solidFill>
+                  <a:srgbClr val="0F1B2D"/>
+                </a:solidFill>
+                <a:latin typeface="IBM Plex Sans"/>
+              </a:rPr>
+              <a:t>Five demos and a gate, reports under demo/output</a:t>
+            </a:r>
+          </a:p>
+        </p:txBody>
+      </p:sp>
+      <p:sp>
+        <p:nvSpPr>
+          <p:cNvPr id="3" name="TextBox 2"/>
+          <p:cNvSpPr txBox="1"/>
+          <p:nvPr/>
+        </p:nvSpPr>
+        <p:spPr>
+          <a:xfrm>
+            <a:off x="813816" y="813816"/>
+            <a:ext cx="10561320" cy="274320"/>
+          </a:xfrm>
+          <a:prstGeom prst="rect">
+            <a:avLst/>
+          </a:prstGeom>
+          <a:noFill/>
+        </p:spPr>
+        <p:txBody>
+          <a:bodyPr wrap="square" anchor="t" lIns="0" rIns="0" tIns="0" bIns="0">
+            <a:spAutoFit/>
+          </a:bodyPr>
+          <a:lstStyle/>
+          <a:p>
+            <a:pPr algn="l"/>
+            <a:r>
+              <a:rPr sz="1200" b="0" i="0">
+                <a:solidFill>
+                  <a:srgbClr val="B4521A"/>
+                </a:solidFill>
+                <a:latin typeface="Consolas"/>
+              </a:rPr>
+              <a:t>RUN IT YOURSELF</a:t>
+            </a:r>
+          </a:p>
+        </p:txBody>
+      </p:sp>
+      <p:sp>
+        <p:nvSpPr>
+          <p:cNvPr id="4" name="Rounded Rectangle 3"/>
+          <p:cNvSpPr/>
+          <p:nvPr/>
+        </p:nvSpPr>
+        <p:spPr>
+          <a:xfrm>
+            <a:off x="813816" y="2011680"/>
+            <a:ext cx="5669280" cy="4160520"/>
+          </a:xfrm>
+          <a:prstGeom prst="roundRect">
+            <a:avLst>
+              <a:gd name="adj" fmla="val 2637"/>
+            </a:avLst>
+          </a:prstGeom>
+          <a:solidFill>
+            <a:srgbClr val="0F1B2D"/>
+          </a:solidFill>
+          <a:ln>
+            <a:noFill/>
+          </a:ln>
+          <a:effectLst/>
+        </p:spPr>
+        <p:txBody>
+          <a:bodyPr rtlCol="0" anchor="ctr"/>
+          <a:lstStyle/>
+          <a:p>
+            <a:pPr algn="ctr"/>
+          </a:p>
+        </p:txBody>
+      </p:sp>
+      <p:sp>
+        <p:nvSpPr>
+          <p:cNvPr id="5" name="TextBox 4"/>
+          <p:cNvSpPr txBox="1"/>
+          <p:nvPr/>
+        </p:nvSpPr>
+        <p:spPr>
+          <a:xfrm>
+            <a:off x="1088136" y="2148840"/>
+            <a:ext cx="5212080" cy="3886200"/>
+          </a:xfrm>
+          <a:prstGeom prst="rect">
+            <a:avLst/>
+          </a:prstGeom>
+          <a:noFill/>
+        </p:spPr>
+        <p:txBody>
+          <a:bodyPr wrap="square" anchor="t" lIns="0" rIns="0" tIns="0" bIns="0">
+            <a:spAutoFit/>
+          </a:bodyPr>
+          <a:lstStyle/>
+          <a:p>
+            <a:pPr algn="l"/>
+            <a:r>
+              <a:rPr sz="1200" b="0" i="0">
+                <a:solidFill>
+                  <a:srgbClr val="F6F5F0"/>
+                </a:solidFill>
+                <a:latin typeface="Consolas"/>
+              </a:rPr>
+              <a:t>uv venv --python 3.11</a:t>
+            </a:r>
+          </a:p>
+          <a:p>
+            <a:pPr algn="l">
+              <a:spcBef>
+                <a:spcPts val="600"/>
+              </a:spcBef>
+            </a:pPr>
+            <a:r>
+              <a:rPr sz="1200" b="0" i="0">
+                <a:solidFill>
+                  <a:srgbClr val="F6F5F0"/>
+                </a:solidFill>
+                <a:latin typeface="Consolas"/>
+              </a:rPr>
+              <a:t>uv pip install -r demo/requirements.txt</a:t>
+            </a:r>
+          </a:p>
+          <a:p>
+            <a:pPr algn="l">
+              <a:spcBef>
+                <a:spcPts val="600"/>
+              </a:spcBef>
+            </a:pPr>
+            <a:r>
+              <a:rPr sz="1200" b="0" i="0">
+                <a:solidFill>
+                  <a:srgbClr val="F6F5F0"/>
+                </a:solidFill>
+                <a:latin typeface="Consolas"/>
+              </a:rPr>
+              <a:t/>
+            </a:r>
+          </a:p>
+          <a:p>
+            <a:pPr algn="l">
+              <a:spcBef>
+                <a:spcPts val="600"/>
+              </a:spcBef>
+            </a:pPr>
+            <a:r>
+              <a:rPr sz="1200" b="0" i="0">
+                <a:solidFill>
+                  <a:srgbClr val="F6F5F0"/>
+                </a:solidFill>
+                <a:latin typeface="Consolas"/>
+              </a:rPr>
+              <a:t>uv run python demo/run_aml_demo.py</a:t>
+            </a:r>
+          </a:p>
+          <a:p>
+            <a:pPr algn="l">
+              <a:spcBef>
+                <a:spcPts val="600"/>
+              </a:spcBef>
+            </a:pPr>
+            <a:r>
+              <a:rPr sz="1200" b="0" i="0">
+                <a:solidFill>
+                  <a:srgbClr val="F6F5F0"/>
+                </a:solidFill>
+                <a:latin typeface="Consolas"/>
+              </a:rPr>
+              <a:t>uv run python demo/run_supply_chain_demo.py</a:t>
+            </a:r>
+          </a:p>
+          <a:p>
+            <a:pPr algn="l">
+              <a:spcBef>
+                <a:spcPts val="600"/>
+              </a:spcBef>
+            </a:pPr>
+            <a:r>
+              <a:rPr sz="1200" b="0" i="0">
+                <a:solidFill>
+                  <a:srgbClr val="F6F5F0"/>
+                </a:solidFill>
+                <a:latin typeface="Consolas"/>
+              </a:rPr>
+              <a:t>uv run python demo/run_demo.py</a:t>
+            </a:r>
+          </a:p>
+          <a:p>
+            <a:pPr algn="l">
+              <a:spcBef>
+                <a:spcPts val="600"/>
+              </a:spcBef>
+            </a:pPr>
+            <a:r>
+              <a:rPr sz="1200" b="0" i="0">
+                <a:solidFill>
+                  <a:srgbClr val="F6F5F0"/>
+                </a:solidFill>
+                <a:latin typeface="Consolas"/>
+              </a:rPr>
+              <a:t>uv run python demo/run_sacroml_demo.py</a:t>
+            </a:r>
+          </a:p>
+          <a:p>
+            <a:pPr algn="l">
+              <a:spcBef>
+                <a:spcPts val="600"/>
+              </a:spcBef>
+            </a:pPr>
+            <a:r>
+              <a:rPr sz="1200" b="0" i="0">
+                <a:solidFill>
+                  <a:srgbClr val="F6F5F0"/>
+                </a:solidFill>
+                <a:latin typeface="Consolas"/>
+              </a:rPr>
+              <a:t>uv run python demo/run_stego_demo.py</a:t>
+            </a:r>
+          </a:p>
+          <a:p>
+            <a:pPr algn="l">
+              <a:spcBef>
+                <a:spcPts val="600"/>
+              </a:spcBef>
+            </a:pPr>
+            <a:r>
+              <a:rPr sz="1200" b="0" i="0">
+                <a:solidFill>
+                  <a:srgbClr val="F6F5F0"/>
+                </a:solidFill>
+                <a:latin typeface="Consolas"/>
+              </a:rPr>
+              <a:t>uv run python demo/run_gate.py</a:t>
+            </a:r>
+          </a:p>
+          <a:p>
+            <a:pPr algn="l">
+              <a:spcBef>
+                <a:spcPts val="600"/>
+              </a:spcBef>
+            </a:pPr>
+            <a:r>
+              <a:rPr sz="1200" b="0" i="0">
+                <a:solidFill>
+                  <a:srgbClr val="F6F5F0"/>
+                </a:solidFill>
+                <a:latin typeface="Consolas"/>
+              </a:rPr>
+              <a:t/>
+            </a:r>
+          </a:p>
+          <a:p>
+            <a:pPr algn="l">
+              <a:spcBef>
+                <a:spcPts val="600"/>
+              </a:spcBef>
+            </a:pPr>
+            <a:r>
+              <a:rPr sz="1200" b="0" i="0">
+                <a:solidFill>
+                  <a:srgbClr val="F6F5F0"/>
+                </a:solidFill>
+                <a:latin typeface="Consolas"/>
+              </a:rPr>
+              <a:t># figures and this deck</a:t>
+            </a:r>
+          </a:p>
+          <a:p>
+            <a:pPr algn="l">
+              <a:spcBef>
+                <a:spcPts val="600"/>
+              </a:spcBef>
+            </a:pPr>
+            <a:r>
+              <a:rPr sz="1200" b="0" i="0">
+                <a:solidFill>
+                  <a:srgbClr val="F6F5F0"/>
+                </a:solidFill>
+                <a:latin typeface="Consolas"/>
+              </a:rPr>
+              <a:t>python docs/guide/make_figures.py</a:t>
+            </a:r>
+          </a:p>
+          <a:p>
+            <a:pPr algn="l">
+              <a:spcBef>
+                <a:spcPts val="600"/>
+              </a:spcBef>
+            </a:pPr>
+            <a:r>
+              <a:rPr sz="1200" b="0" i="0">
+                <a:solidFill>
+                  <a:srgbClr val="F6F5F0"/>
+                </a:solidFill>
+                <a:latin typeface="Consolas"/>
+              </a:rPr>
+              <a:t>python docs/guide/make_aml_figures.py</a:t>
+            </a:r>
+          </a:p>
+          <a:p>
+            <a:pPr algn="l">
+              <a:spcBef>
+                <a:spcPts val="600"/>
+              </a:spcBef>
+            </a:pPr>
+            <a:r>
+              <a:rPr sz="1200" b="0" i="0">
+                <a:solidFill>
+                  <a:srgbClr val="F6F5F0"/>
+                </a:solidFill>
+                <a:latin typeface="Consolas"/>
+              </a:rPr>
+              <a:t>python docs/make_deck.py</a:t>
+            </a:r>
+          </a:p>
+        </p:txBody>
+      </p:sp>
+      <p:sp>
+        <p:nvSpPr>
+          <p:cNvPr id="6" name="Rounded Rectangle 5"/>
+          <p:cNvSpPr/>
+          <p:nvPr/>
+        </p:nvSpPr>
+        <p:spPr>
+          <a:xfrm>
+            <a:off x="6757416" y="2011680"/>
             <a:ext cx="4617720" cy="1188720"/>
           </a:xfrm>
           <a:prstGeom prst="roundRect">
@@ -33708,13 +34314,13 @@
       </p:sp>
       <p:sp>
         <p:nvSpPr>
-          <p:cNvPr id="10" name="TextBox 9"/>
+          <p:cNvPr id="7" name="TextBox 6"/>
           <p:cNvSpPr txBox="1"/>
           <p:nvPr/>
         </p:nvSpPr>
         <p:spPr>
           <a:xfrm>
-            <a:off x="6958583" y="3520440"/>
+            <a:off x="6958583" y="2194560"/>
             <a:ext cx="4215383" cy="365760"/>
           </a:xfrm>
           <a:prstGeom prst="rect">
@@ -33736,20 +34342,20 @@
                 </a:solidFill>
                 <a:latin typeface="IBM Plex Sans"/>
               </a:rPr>
-              <a:t>Demo 1 · seconds</a:t>
-            </a:r>
-          </a:p>
-        </p:txBody>
-      </p:sp>
-      <p:sp>
-        <p:nvSpPr>
-          <p:cNvPr id="11" name="TextBox 10"/>
+              <a:t>Demos 3 and 4 · seconds</a:t>
+            </a:r>
+          </a:p>
+        </p:txBody>
+      </p:sp>
+      <p:sp>
+        <p:nvSpPr>
+          <p:cNvPr id="8" name="TextBox 7"/>
           <p:cNvSpPr txBox="1"/>
           <p:nvPr/>
         </p:nvSpPr>
         <p:spPr>
           <a:xfrm>
-            <a:off x="6958583" y="3794760"/>
+            <a:off x="6958583" y="2468880"/>
             <a:ext cx="4215383" cy="640080"/>
           </a:xfrm>
           <a:prstGeom prst="rect">
@@ -33771,21 +34377,21 @@
                 </a:solidFill>
                 <a:latin typeface="IBM Plex Sans"/>
               </a:rPr>
-              <a:t>demo_report.txt, data dictionary, register entry, pipeline snapshot, release reports.</a:t>
-            </a:r>
-          </a:p>
-        </p:txBody>
-      </p:sp>
-      <p:sp>
-        <p:nvSpPr>
-          <p:cNvPr id="12" name="Rounded Rectangle 11"/>
+              <a:t>aml_report.txt: evasion, extraction, backdoor. supply_chain_report.txt: four tampered files.</a:t>
+            </a:r>
+          </a:p>
+        </p:txBody>
+      </p:sp>
+      <p:sp>
+        <p:nvSpPr>
+          <p:cNvPr id="9" name="Rounded Rectangle 8"/>
           <p:cNvSpPr/>
           <p:nvPr/>
         </p:nvSpPr>
         <p:spPr>
           <a:xfrm>
-            <a:off x="6757416" y="4663440"/>
-            <a:ext cx="4617720" cy="1234440"/>
+            <a:off x="6757416" y="3291840"/>
+            <a:ext cx="4617720" cy="1143000"/>
           </a:xfrm>
           <a:prstGeom prst="roundRect">
             <a:avLst>
@@ -33812,13 +34418,13 @@
       </p:sp>
       <p:sp>
         <p:nvSpPr>
-          <p:cNvPr id="13" name="TextBox 12"/>
+          <p:cNvPr id="10" name="TextBox 9"/>
           <p:cNvSpPr txBox="1"/>
           <p:nvPr/>
         </p:nvSpPr>
         <p:spPr>
           <a:xfrm>
-            <a:off x="6958583" y="4846320"/>
+            <a:off x="6958583" y="3474720"/>
             <a:ext cx="4215383" cy="365760"/>
           </a:xfrm>
           <a:prstGeom prst="rect">
@@ -33840,6 +34446,110 @@
                 </a:solidFill>
                 <a:latin typeface="IBM Plex Sans"/>
               </a:rPr>
+              <a:t>Demos 1 and 6 · seconds</a:t>
+            </a:r>
+          </a:p>
+        </p:txBody>
+      </p:sp>
+      <p:sp>
+        <p:nvSpPr>
+          <p:cNvPr id="11" name="TextBox 10"/>
+          <p:cNvSpPr txBox="1"/>
+          <p:nvPr/>
+        </p:nvSpPr>
+        <p:spPr>
+          <a:xfrm>
+            <a:off x="6958583" y="3749040"/>
+            <a:ext cx="4215383" cy="594360"/>
+          </a:xfrm>
+          <a:prstGeom prst="rect">
+            <a:avLst/>
+          </a:prstGeom>
+          <a:noFill/>
+        </p:spPr>
+        <p:txBody>
+          <a:bodyPr wrap="square" anchor="t" lIns="0" rIns="0" tIns="0" bIns="0">
+            <a:spAutoFit/>
+          </a:bodyPr>
+          <a:lstStyle/>
+          <a:p>
+            <a:pPr algn="l"/>
+            <a:r>
+              <a:rPr sz="1250" b="0" i="0">
+                <a:solidFill>
+                  <a:srgbClr val="3A4556"/>
+                </a:solidFill>
+                <a:latin typeface="IBM Plex Sans"/>
+              </a:rPr>
+              <a:t>demo_report.txt, register entry, release reports. stego_report.txt: two covert channels and their defences.</a:t>
+            </a:r>
+          </a:p>
+        </p:txBody>
+      </p:sp>
+      <p:sp>
+        <p:nvSpPr>
+          <p:cNvPr id="12" name="Rounded Rectangle 11"/>
+          <p:cNvSpPr/>
+          <p:nvPr/>
+        </p:nvSpPr>
+        <p:spPr>
+          <a:xfrm>
+            <a:off x="6757416" y="4526280"/>
+            <a:ext cx="4617720" cy="1371600"/>
+          </a:xfrm>
+          <a:prstGeom prst="roundRect">
+            <a:avLst>
+              <a:gd name="adj" fmla="val 8000"/>
+            </a:avLst>
+          </a:prstGeom>
+          <a:solidFill>
+            <a:srgbClr val="FDFCF9"/>
+          </a:solidFill>
+          <a:ln w="12700">
+            <a:solidFill>
+              <a:srgbClr val="E2DFD6"/>
+            </a:solidFill>
+          </a:ln>
+          <a:effectLst/>
+        </p:spPr>
+        <p:txBody>
+          <a:bodyPr rtlCol="0" anchor="ctr"/>
+          <a:lstStyle/>
+          <a:p>
+            <a:pPr algn="ctr"/>
+          </a:p>
+        </p:txBody>
+      </p:sp>
+      <p:sp>
+        <p:nvSpPr>
+          <p:cNvPr id="13" name="TextBox 12"/>
+          <p:cNvSpPr txBox="1"/>
+          <p:nvPr/>
+        </p:nvSpPr>
+        <p:spPr>
+          <a:xfrm>
+            <a:off x="6958583" y="4709160"/>
+            <a:ext cx="4215383" cy="365760"/>
+          </a:xfrm>
+          <a:prstGeom prst="rect">
+            <a:avLst/>
+          </a:prstGeom>
+          <a:noFill/>
+        </p:spPr>
+        <p:txBody>
+          <a:bodyPr wrap="square" anchor="t" lIns="0" rIns="0" tIns="0" bIns="0">
+            <a:spAutoFit/>
+          </a:bodyPr>
+          <a:lstStyle/>
+          <a:p>
+            <a:pPr algn="l"/>
+            <a:r>
+              <a:rPr sz="1600" b="1" i="0">
+                <a:solidFill>
+                  <a:srgbClr val="0F1B2D"/>
+                </a:solidFill>
+                <a:latin typeface="IBM Plex Sans"/>
+              </a:rPr>
               <a:t>Demo 2 · a few minutes</a:t>
             </a:r>
           </a:p>
@@ -33853,8 +34563,8 @@
         </p:nvSpPr>
         <p:spPr>
           <a:xfrm>
-            <a:off x="6958583" y="5120640"/>
-            <a:ext cx="4215383" cy="685800"/>
+            <a:off x="6958583" y="4983480"/>
+            <a:ext cx="4215383" cy="822960"/>
           </a:xfrm>
           <a:prstGeom prst="rect">
             <a:avLst/>
@@ -33923,7 +34633,7 @@
 </p:sld>
 </file>
 
-<file path=ppt/slides/slide53.xml><?xml version="1.0" encoding="utf-8"?>
+<file path=ppt/slides/slide54.xml><?xml version="1.0" encoding="utf-8"?>
 <p:sld xmlns:a="http://schemas.openxmlformats.org/drawingml/2006/main" xmlns:p="http://schemas.openxmlformats.org/presentationml/2006/main" xmlns:r="http://schemas.openxmlformats.org/officeDocument/2006/relationships">
   <p:cSld>
     <p:bg>
